--- a/POWER SUPPLY/Power unit conversion.pptx
+++ b/POWER SUPPLY/Power unit conversion.pptx
@@ -32,27 +32,29 @@
     <p:sldId id="281" r:id="rId26"/>
     <p:sldId id="282" r:id="rId27"/>
     <p:sldId id="283" r:id="rId28"/>
-    <p:sldId id="289" r:id="rId29"/>
-    <p:sldId id="291" r:id="rId30"/>
-    <p:sldId id="292" r:id="rId31"/>
-    <p:sldId id="293" r:id="rId32"/>
-    <p:sldId id="284" r:id="rId33"/>
-    <p:sldId id="285" r:id="rId34"/>
-    <p:sldId id="286" r:id="rId35"/>
-    <p:sldId id="288" r:id="rId36"/>
-    <p:sldId id="287" r:id="rId37"/>
-    <p:sldId id="290" r:id="rId38"/>
-    <p:sldId id="294" r:id="rId39"/>
-    <p:sldId id="301" r:id="rId40"/>
-    <p:sldId id="295" r:id="rId41"/>
-    <p:sldId id="303" r:id="rId42"/>
-    <p:sldId id="296" r:id="rId43"/>
-    <p:sldId id="297" r:id="rId44"/>
-    <p:sldId id="298" r:id="rId45"/>
-    <p:sldId id="299" r:id="rId46"/>
-    <p:sldId id="300" r:id="rId47"/>
-    <p:sldId id="302" r:id="rId48"/>
-    <p:sldId id="273" r:id="rId49"/>
+    <p:sldId id="304" r:id="rId29"/>
+    <p:sldId id="289" r:id="rId30"/>
+    <p:sldId id="291" r:id="rId31"/>
+    <p:sldId id="292" r:id="rId32"/>
+    <p:sldId id="293" r:id="rId33"/>
+    <p:sldId id="284" r:id="rId34"/>
+    <p:sldId id="285" r:id="rId35"/>
+    <p:sldId id="286" r:id="rId36"/>
+    <p:sldId id="288" r:id="rId37"/>
+    <p:sldId id="287" r:id="rId38"/>
+    <p:sldId id="290" r:id="rId39"/>
+    <p:sldId id="294" r:id="rId40"/>
+    <p:sldId id="301" r:id="rId41"/>
+    <p:sldId id="295" r:id="rId42"/>
+    <p:sldId id="303" r:id="rId43"/>
+    <p:sldId id="296" r:id="rId44"/>
+    <p:sldId id="297" r:id="rId45"/>
+    <p:sldId id="298" r:id="rId46"/>
+    <p:sldId id="299" r:id="rId47"/>
+    <p:sldId id="300" r:id="rId48"/>
+    <p:sldId id="302" r:id="rId49"/>
+    <p:sldId id="273" r:id="rId50"/>
+    <p:sldId id="305" r:id="rId51"/>
   </p:sldIdLst>
   <p:sldSz cx="12192000" cy="6858000"/>
   <p:notesSz cx="6858000" cy="9144000"/>
@@ -317,7 +319,7 @@
           <a:p>
             <a:fld id="{369113F3-EB50-4037-9BEA-173FE8DBAA4D}" type="datetimeFigureOut">
               <a:rPr lang="en-US" smtClean="0"/>
-              <a:t>5/23/2025</a:t>
+              <a:t>6/27/2025</a:t>
             </a:fld>
             <a:endParaRPr lang="en-US"/>
           </a:p>
@@ -515,7 +517,7 @@
           <a:p>
             <a:fld id="{369113F3-EB50-4037-9BEA-173FE8DBAA4D}" type="datetimeFigureOut">
               <a:rPr lang="en-US" smtClean="0"/>
-              <a:t>5/23/2025</a:t>
+              <a:t>6/27/2025</a:t>
             </a:fld>
             <a:endParaRPr lang="en-US"/>
           </a:p>
@@ -723,7 +725,7 @@
           <a:p>
             <a:fld id="{369113F3-EB50-4037-9BEA-173FE8DBAA4D}" type="datetimeFigureOut">
               <a:rPr lang="en-US" smtClean="0"/>
-              <a:t>5/23/2025</a:t>
+              <a:t>6/27/2025</a:t>
             </a:fld>
             <a:endParaRPr lang="en-US"/>
           </a:p>
@@ -921,7 +923,7 @@
           <a:p>
             <a:fld id="{369113F3-EB50-4037-9BEA-173FE8DBAA4D}" type="datetimeFigureOut">
               <a:rPr lang="en-US" smtClean="0"/>
-              <a:t>5/23/2025</a:t>
+              <a:t>6/27/2025</a:t>
             </a:fld>
             <a:endParaRPr lang="en-US"/>
           </a:p>
@@ -1196,7 +1198,7 @@
           <a:p>
             <a:fld id="{369113F3-EB50-4037-9BEA-173FE8DBAA4D}" type="datetimeFigureOut">
               <a:rPr lang="en-US" smtClean="0"/>
-              <a:t>5/23/2025</a:t>
+              <a:t>6/27/2025</a:t>
             </a:fld>
             <a:endParaRPr lang="en-US"/>
           </a:p>
@@ -1461,7 +1463,7 @@
           <a:p>
             <a:fld id="{369113F3-EB50-4037-9BEA-173FE8DBAA4D}" type="datetimeFigureOut">
               <a:rPr lang="en-US" smtClean="0"/>
-              <a:t>5/23/2025</a:t>
+              <a:t>6/27/2025</a:t>
             </a:fld>
             <a:endParaRPr lang="en-US"/>
           </a:p>
@@ -1873,7 +1875,7 @@
           <a:p>
             <a:fld id="{369113F3-EB50-4037-9BEA-173FE8DBAA4D}" type="datetimeFigureOut">
               <a:rPr lang="en-US" smtClean="0"/>
-              <a:t>5/23/2025</a:t>
+              <a:t>6/27/2025</a:t>
             </a:fld>
             <a:endParaRPr lang="en-US"/>
           </a:p>
@@ -2014,7 +2016,7 @@
           <a:p>
             <a:fld id="{369113F3-EB50-4037-9BEA-173FE8DBAA4D}" type="datetimeFigureOut">
               <a:rPr lang="en-US" smtClean="0"/>
-              <a:t>5/23/2025</a:t>
+              <a:t>6/27/2025</a:t>
             </a:fld>
             <a:endParaRPr lang="en-US"/>
           </a:p>
@@ -2127,7 +2129,7 @@
           <a:p>
             <a:fld id="{369113F3-EB50-4037-9BEA-173FE8DBAA4D}" type="datetimeFigureOut">
               <a:rPr lang="en-US" smtClean="0"/>
-              <a:t>5/23/2025</a:t>
+              <a:t>6/27/2025</a:t>
             </a:fld>
             <a:endParaRPr lang="en-US"/>
           </a:p>
@@ -2438,7 +2440,7 @@
           <a:p>
             <a:fld id="{369113F3-EB50-4037-9BEA-173FE8DBAA4D}" type="datetimeFigureOut">
               <a:rPr lang="en-US" smtClean="0"/>
-              <a:t>5/23/2025</a:t>
+              <a:t>6/27/2025</a:t>
             </a:fld>
             <a:endParaRPr lang="en-US"/>
           </a:p>
@@ -2726,7 +2728,7 @@
           <a:p>
             <a:fld id="{369113F3-EB50-4037-9BEA-173FE8DBAA4D}" type="datetimeFigureOut">
               <a:rPr lang="en-US" smtClean="0"/>
-              <a:t>5/23/2025</a:t>
+              <a:t>6/27/2025</a:t>
             </a:fld>
             <a:endParaRPr lang="en-US"/>
           </a:p>
@@ -2967,7 +2969,7 @@
           <a:p>
             <a:fld id="{369113F3-EB50-4037-9BEA-173FE8DBAA4D}" type="datetimeFigureOut">
               <a:rPr lang="en-US" smtClean="0"/>
-              <a:t>5/23/2025</a:t>
+              <a:t>6/27/2025</a:t>
             </a:fld>
             <a:endParaRPr lang="en-US"/>
           </a:p>
@@ -10171,7 +10173,7 @@
                 <a:latin typeface="Cambria" panose="02040503050406030204" pitchFamily="18" charset="0"/>
                 <a:ea typeface="Cambria" panose="02040503050406030204" pitchFamily="18" charset="0"/>
               </a:rPr>
-              <a:t>in dB</a:t>
+              <a:t>&amp; decibel dB</a:t>
             </a:r>
           </a:p>
         </p:txBody>
@@ -11902,6 +11904,230 @@
   <p:clrMapOvr>
     <a:masterClrMapping/>
   </p:clrMapOvr>
+  <p:timing>
+    <p:tnLst>
+      <p:par>
+        <p:cTn id="1" dur="indefinite" restart="never" nodeType="tmRoot">
+          <p:childTnLst>
+            <p:seq concurrent="1" nextAc="seek">
+              <p:cTn id="2" dur="indefinite" nodeType="mainSeq">
+                <p:childTnLst>
+                  <p:par>
+                    <p:cTn id="3" fill="hold">
+                      <p:stCondLst>
+                        <p:cond delay="indefinite"/>
+                        <p:cond evt="onBegin" delay="0">
+                          <p:tn val="2"/>
+                        </p:cond>
+                      </p:stCondLst>
+                      <p:childTnLst>
+                        <p:par>
+                          <p:cTn id="4" fill="hold">
+                            <p:stCondLst>
+                              <p:cond delay="0"/>
+                            </p:stCondLst>
+                            <p:childTnLst>
+                              <p:par>
+                                <p:cTn id="5" presetID="22" presetClass="entr" presetSubtype="8" fill="hold" grpId="0" nodeType="withEffect">
+                                  <p:stCondLst>
+                                    <p:cond delay="0"/>
+                                  </p:stCondLst>
+                                  <p:childTnLst>
+                                    <p:set>
+                                      <p:cBhvr>
+                                        <p:cTn id="6" dur="1" fill="hold">
+                                          <p:stCondLst>
+                                            <p:cond delay="0"/>
+                                          </p:stCondLst>
+                                        </p:cTn>
+                                        <p:tgtEl>
+                                          <p:spTgt spid="4"/>
+                                        </p:tgtEl>
+                                        <p:attrNameLst>
+                                          <p:attrName>style.visibility</p:attrName>
+                                        </p:attrNameLst>
+                                      </p:cBhvr>
+                                      <p:to>
+                                        <p:strVal val="visible"/>
+                                      </p:to>
+                                    </p:set>
+                                    <p:animEffect transition="in" filter="wipe(left)">
+                                      <p:cBhvr>
+                                        <p:cTn id="7" dur="500"/>
+                                        <p:tgtEl>
+                                          <p:spTgt spid="4"/>
+                                        </p:tgtEl>
+                                      </p:cBhvr>
+                                    </p:animEffect>
+                                  </p:childTnLst>
+                                </p:cTn>
+                              </p:par>
+                            </p:childTnLst>
+                          </p:cTn>
+                        </p:par>
+                        <p:par>
+                          <p:cTn id="8" fill="hold">
+                            <p:stCondLst>
+                              <p:cond delay="500"/>
+                            </p:stCondLst>
+                            <p:childTnLst>
+                              <p:par>
+                                <p:cTn id="9" presetID="22" presetClass="entr" presetSubtype="8" fill="hold" grpId="0" nodeType="afterEffect">
+                                  <p:stCondLst>
+                                    <p:cond delay="0"/>
+                                  </p:stCondLst>
+                                  <p:childTnLst>
+                                    <p:set>
+                                      <p:cBhvr>
+                                        <p:cTn id="10" dur="1" fill="hold">
+                                          <p:stCondLst>
+                                            <p:cond delay="0"/>
+                                          </p:stCondLst>
+                                        </p:cTn>
+                                        <p:tgtEl>
+                                          <p:spTgt spid="7"/>
+                                        </p:tgtEl>
+                                        <p:attrNameLst>
+                                          <p:attrName>style.visibility</p:attrName>
+                                        </p:attrNameLst>
+                                      </p:cBhvr>
+                                      <p:to>
+                                        <p:strVal val="visible"/>
+                                      </p:to>
+                                    </p:set>
+                                    <p:animEffect transition="in" filter="wipe(left)">
+                                      <p:cBhvr>
+                                        <p:cTn id="11" dur="500"/>
+                                        <p:tgtEl>
+                                          <p:spTgt spid="7"/>
+                                        </p:tgtEl>
+                                      </p:cBhvr>
+                                    </p:animEffect>
+                                  </p:childTnLst>
+                                </p:cTn>
+                              </p:par>
+                            </p:childTnLst>
+                          </p:cTn>
+                        </p:par>
+                        <p:par>
+                          <p:cTn id="12" fill="hold">
+                            <p:stCondLst>
+                              <p:cond delay="1000"/>
+                            </p:stCondLst>
+                            <p:childTnLst>
+                              <p:par>
+                                <p:cTn id="13" presetID="22" presetClass="entr" presetSubtype="8" fill="hold" grpId="0" nodeType="afterEffect">
+                                  <p:stCondLst>
+                                    <p:cond delay="0"/>
+                                  </p:stCondLst>
+                                  <p:childTnLst>
+                                    <p:set>
+                                      <p:cBhvr>
+                                        <p:cTn id="14" dur="1" fill="hold">
+                                          <p:stCondLst>
+                                            <p:cond delay="0"/>
+                                          </p:stCondLst>
+                                        </p:cTn>
+                                        <p:tgtEl>
+                                          <p:spTgt spid="10"/>
+                                        </p:tgtEl>
+                                        <p:attrNameLst>
+                                          <p:attrName>style.visibility</p:attrName>
+                                        </p:attrNameLst>
+                                      </p:cBhvr>
+                                      <p:to>
+                                        <p:strVal val="visible"/>
+                                      </p:to>
+                                    </p:set>
+                                    <p:animEffect transition="in" filter="wipe(left)">
+                                      <p:cBhvr>
+                                        <p:cTn id="15" dur="500"/>
+                                        <p:tgtEl>
+                                          <p:spTgt spid="10"/>
+                                        </p:tgtEl>
+                                      </p:cBhvr>
+                                    </p:animEffect>
+                                  </p:childTnLst>
+                                </p:cTn>
+                              </p:par>
+                            </p:childTnLst>
+                          </p:cTn>
+                        </p:par>
+                        <p:par>
+                          <p:cTn id="16" fill="hold">
+                            <p:stCondLst>
+                              <p:cond delay="1500"/>
+                            </p:stCondLst>
+                            <p:childTnLst>
+                              <p:par>
+                                <p:cTn id="17" presetID="22" presetClass="entr" presetSubtype="8" fill="hold" grpId="0" nodeType="afterEffect">
+                                  <p:stCondLst>
+                                    <p:cond delay="0"/>
+                                  </p:stCondLst>
+                                  <p:childTnLst>
+                                    <p:set>
+                                      <p:cBhvr>
+                                        <p:cTn id="18" dur="1" fill="hold">
+                                          <p:stCondLst>
+                                            <p:cond delay="0"/>
+                                          </p:stCondLst>
+                                        </p:cTn>
+                                        <p:tgtEl>
+                                          <p:spTgt spid="11"/>
+                                        </p:tgtEl>
+                                        <p:attrNameLst>
+                                          <p:attrName>style.visibility</p:attrName>
+                                        </p:attrNameLst>
+                                      </p:cBhvr>
+                                      <p:to>
+                                        <p:strVal val="visible"/>
+                                      </p:to>
+                                    </p:set>
+                                    <p:animEffect transition="in" filter="wipe(left)">
+                                      <p:cBhvr>
+                                        <p:cTn id="19" dur="500"/>
+                                        <p:tgtEl>
+                                          <p:spTgt spid="11"/>
+                                        </p:tgtEl>
+                                      </p:cBhvr>
+                                    </p:animEffect>
+                                  </p:childTnLst>
+                                </p:cTn>
+                              </p:par>
+                            </p:childTnLst>
+                          </p:cTn>
+                        </p:par>
+                      </p:childTnLst>
+                    </p:cTn>
+                  </p:par>
+                </p:childTnLst>
+              </p:cTn>
+              <p:prevCondLst>
+                <p:cond evt="onPrev" delay="0">
+                  <p:tgtEl>
+                    <p:sldTgt/>
+                  </p:tgtEl>
+                </p:cond>
+              </p:prevCondLst>
+              <p:nextCondLst>
+                <p:cond evt="onNext" delay="0">
+                  <p:tgtEl>
+                    <p:sldTgt/>
+                  </p:tgtEl>
+                </p:cond>
+              </p:nextCondLst>
+            </p:seq>
+          </p:childTnLst>
+        </p:cTn>
+      </p:par>
+    </p:tnLst>
+    <p:bldLst>
+      <p:bldP spid="4" grpId="0"/>
+      <p:bldP spid="7" grpId="0"/>
+      <p:bldP spid="10" grpId="0"/>
+      <p:bldP spid="11" grpId="0"/>
+    </p:bldLst>
+  </p:timing>
 </p:sld>
 </file>
 
@@ -12776,6 +13002,140 @@
   <p:clrMapOvr>
     <a:masterClrMapping/>
   </p:clrMapOvr>
+  <p:timing>
+    <p:tnLst>
+      <p:par>
+        <p:cTn id="1" dur="indefinite" restart="never" nodeType="tmRoot">
+          <p:childTnLst>
+            <p:seq concurrent="1" nextAc="seek">
+              <p:cTn id="2" dur="indefinite" nodeType="mainSeq">
+                <p:childTnLst>
+                  <p:par>
+                    <p:cTn id="3" fill="hold">
+                      <p:stCondLst>
+                        <p:cond delay="indefinite"/>
+                        <p:cond evt="onBegin" delay="0">
+                          <p:tn val="2"/>
+                        </p:cond>
+                      </p:stCondLst>
+                      <p:childTnLst>
+                        <p:par>
+                          <p:cTn id="4" fill="hold">
+                            <p:stCondLst>
+                              <p:cond delay="0"/>
+                            </p:stCondLst>
+                            <p:childTnLst>
+                              <p:par>
+                                <p:cTn id="5" presetID="22" presetClass="entr" presetSubtype="8" fill="hold" grpId="0" nodeType="withEffect">
+                                  <p:stCondLst>
+                                    <p:cond delay="0"/>
+                                  </p:stCondLst>
+                                  <p:childTnLst>
+                                    <p:set>
+                                      <p:cBhvr>
+                                        <p:cTn id="6" dur="1" fill="hold">
+                                          <p:stCondLst>
+                                            <p:cond delay="0"/>
+                                          </p:stCondLst>
+                                        </p:cTn>
+                                        <p:tgtEl>
+                                          <p:spTgt spid="11"/>
+                                        </p:tgtEl>
+                                        <p:attrNameLst>
+                                          <p:attrName>style.visibility</p:attrName>
+                                        </p:attrNameLst>
+                                      </p:cBhvr>
+                                      <p:to>
+                                        <p:strVal val="visible"/>
+                                      </p:to>
+                                    </p:set>
+                                    <p:animEffect transition="in" filter="wipe(left)">
+                                      <p:cBhvr>
+                                        <p:cTn id="7" dur="500"/>
+                                        <p:tgtEl>
+                                          <p:spTgt spid="11"/>
+                                        </p:tgtEl>
+                                      </p:cBhvr>
+                                    </p:animEffect>
+                                  </p:childTnLst>
+                                </p:cTn>
+                              </p:par>
+                            </p:childTnLst>
+                          </p:cTn>
+                        </p:par>
+                        <p:par>
+                          <p:cTn id="8" fill="hold">
+                            <p:stCondLst>
+                              <p:cond delay="500"/>
+                            </p:stCondLst>
+                            <p:childTnLst>
+                              <p:par>
+                                <p:cTn id="9" presetID="22" presetClass="entr" presetSubtype="8" fill="hold" grpId="0" nodeType="afterEffect">
+                                  <p:stCondLst>
+                                    <p:cond delay="0"/>
+                                  </p:stCondLst>
+                                  <p:childTnLst>
+                                    <p:set>
+                                      <p:cBhvr>
+                                        <p:cTn id="10" dur="1" fill="hold">
+                                          <p:stCondLst>
+                                            <p:cond delay="0"/>
+                                          </p:stCondLst>
+                                        </p:cTn>
+                                        <p:tgtEl>
+                                          <p:spTgt spid="10"/>
+                                        </p:tgtEl>
+                                        <p:attrNameLst>
+                                          <p:attrName>style.visibility</p:attrName>
+                                        </p:attrNameLst>
+                                      </p:cBhvr>
+                                      <p:to>
+                                        <p:strVal val="visible"/>
+                                      </p:to>
+                                    </p:set>
+                                    <p:animEffect transition="in" filter="wipe(left)">
+                                      <p:cBhvr>
+                                        <p:cTn id="11" dur="500"/>
+                                        <p:tgtEl>
+                                          <p:spTgt spid="10"/>
+                                        </p:tgtEl>
+                                      </p:cBhvr>
+                                    </p:animEffect>
+                                  </p:childTnLst>
+                                </p:cTn>
+                              </p:par>
+                            </p:childTnLst>
+                          </p:cTn>
+                        </p:par>
+                      </p:childTnLst>
+                    </p:cTn>
+                  </p:par>
+                </p:childTnLst>
+              </p:cTn>
+              <p:prevCondLst>
+                <p:cond evt="onPrev" delay="0">
+                  <p:tgtEl>
+                    <p:sldTgt/>
+                  </p:tgtEl>
+                </p:cond>
+              </p:prevCondLst>
+              <p:nextCondLst>
+                <p:cond evt="onNext" delay="0">
+                  <p:tgtEl>
+                    <p:sldTgt/>
+                  </p:tgtEl>
+                </p:cond>
+              </p:nextCondLst>
+            </p:seq>
+          </p:childTnLst>
+        </p:cTn>
+      </p:par>
+    </p:tnLst>
+    <p:bldLst>
+      <p:bldP spid="10" grpId="0"/>
+      <p:bldP spid="11" grpId="0"/>
+    </p:bldLst>
+  </p:timing>
 </p:sld>
 </file>
 
@@ -13517,6 +13877,185 @@
   <p:clrMapOvr>
     <a:masterClrMapping/>
   </p:clrMapOvr>
+  <p:timing>
+    <p:tnLst>
+      <p:par>
+        <p:cTn id="1" dur="indefinite" restart="never" nodeType="tmRoot">
+          <p:childTnLst>
+            <p:seq concurrent="1" nextAc="seek">
+              <p:cTn id="2" dur="indefinite" nodeType="mainSeq">
+                <p:childTnLst>
+                  <p:par>
+                    <p:cTn id="3" fill="hold">
+                      <p:stCondLst>
+                        <p:cond delay="indefinite"/>
+                        <p:cond evt="onBegin" delay="0">
+                          <p:tn val="2"/>
+                        </p:cond>
+                      </p:stCondLst>
+                      <p:childTnLst>
+                        <p:par>
+                          <p:cTn id="4" fill="hold">
+                            <p:stCondLst>
+                              <p:cond delay="0"/>
+                            </p:stCondLst>
+                            <p:childTnLst>
+                              <p:par>
+                                <p:cTn id="5" presetID="22" presetClass="entr" presetSubtype="8" fill="hold" grpId="0" nodeType="withEffect">
+                                  <p:stCondLst>
+                                    <p:cond delay="0"/>
+                                  </p:stCondLst>
+                                  <p:childTnLst>
+                                    <p:set>
+                                      <p:cBhvr>
+                                        <p:cTn id="6" dur="1" fill="hold">
+                                          <p:stCondLst>
+                                            <p:cond delay="0"/>
+                                          </p:stCondLst>
+                                        </p:cTn>
+                                        <p:tgtEl>
+                                          <p:spTgt spid="3"/>
+                                        </p:tgtEl>
+                                        <p:attrNameLst>
+                                          <p:attrName>style.visibility</p:attrName>
+                                        </p:attrNameLst>
+                                      </p:cBhvr>
+                                      <p:to>
+                                        <p:strVal val="visible"/>
+                                      </p:to>
+                                    </p:set>
+                                    <p:animEffect transition="in" filter="wipe(left)">
+                                      <p:cBhvr>
+                                        <p:cTn id="7" dur="500"/>
+                                        <p:tgtEl>
+                                          <p:spTgt spid="3"/>
+                                        </p:tgtEl>
+                                      </p:cBhvr>
+                                    </p:animEffect>
+                                  </p:childTnLst>
+                                </p:cTn>
+                              </p:par>
+                            </p:childTnLst>
+                          </p:cTn>
+                        </p:par>
+                        <p:par>
+                          <p:cTn id="8" fill="hold">
+                            <p:stCondLst>
+                              <p:cond delay="500"/>
+                            </p:stCondLst>
+                            <p:childTnLst>
+                              <p:par>
+                                <p:cTn id="9" presetID="22" presetClass="entr" presetSubtype="8" fill="hold" grpId="0" nodeType="afterEffect">
+                                  <p:stCondLst>
+                                    <p:cond delay="0"/>
+                                  </p:stCondLst>
+                                  <p:childTnLst>
+                                    <p:set>
+                                      <p:cBhvr>
+                                        <p:cTn id="10" dur="1" fill="hold">
+                                          <p:stCondLst>
+                                            <p:cond delay="0"/>
+                                          </p:stCondLst>
+                                        </p:cTn>
+                                        <p:tgtEl>
+                                          <p:spTgt spid="10"/>
+                                        </p:tgtEl>
+                                        <p:attrNameLst>
+                                          <p:attrName>style.visibility</p:attrName>
+                                        </p:attrNameLst>
+                                      </p:cBhvr>
+                                      <p:to>
+                                        <p:strVal val="visible"/>
+                                      </p:to>
+                                    </p:set>
+                                    <p:animEffect transition="in" filter="wipe(left)">
+                                      <p:cBhvr>
+                                        <p:cTn id="11" dur="500"/>
+                                        <p:tgtEl>
+                                          <p:spTgt spid="10"/>
+                                        </p:tgtEl>
+                                      </p:cBhvr>
+                                    </p:animEffect>
+                                  </p:childTnLst>
+                                </p:cTn>
+                              </p:par>
+                            </p:childTnLst>
+                          </p:cTn>
+                        </p:par>
+                        <p:par>
+                          <p:cTn id="12" fill="hold">
+                            <p:stCondLst>
+                              <p:cond delay="1000"/>
+                            </p:stCondLst>
+                            <p:childTnLst>
+                              <p:par>
+                                <p:cTn id="13" presetID="22" presetClass="entr" presetSubtype="8" fill="hold" grpId="0" nodeType="afterEffect">
+                                  <p:stCondLst>
+                                    <p:cond delay="0"/>
+                                  </p:stCondLst>
+                                  <p:childTnLst>
+                                    <p:set>
+                                      <p:cBhvr>
+                                        <p:cTn id="14" dur="1" fill="hold">
+                                          <p:stCondLst>
+                                            <p:cond delay="0"/>
+                                          </p:stCondLst>
+                                        </p:cTn>
+                                        <p:tgtEl>
+                                          <p:spTgt spid="7"/>
+                                        </p:tgtEl>
+                                        <p:attrNameLst>
+                                          <p:attrName>style.visibility</p:attrName>
+                                        </p:attrNameLst>
+                                      </p:cBhvr>
+                                      <p:to>
+                                        <p:strVal val="visible"/>
+                                      </p:to>
+                                    </p:set>
+                                    <p:animEffect transition="in" filter="wipe(left)">
+                                      <p:cBhvr>
+                                        <p:cTn id="15" dur="500"/>
+                                        <p:tgtEl>
+                                          <p:spTgt spid="7"/>
+                                        </p:tgtEl>
+                                      </p:cBhvr>
+                                    </p:animEffect>
+                                  </p:childTnLst>
+                                </p:cTn>
+                              </p:par>
+                            </p:childTnLst>
+                          </p:cTn>
+                        </p:par>
+                      </p:childTnLst>
+                    </p:cTn>
+                  </p:par>
+                </p:childTnLst>
+              </p:cTn>
+              <p:prevCondLst>
+                <p:cond evt="onPrev" delay="0">
+                  <p:tgtEl>
+                    <p:sldTgt/>
+                  </p:tgtEl>
+                </p:cond>
+              </p:prevCondLst>
+              <p:nextCondLst>
+                <p:cond evt="onNext" delay="0">
+                  <p:tgtEl>
+                    <p:sldTgt/>
+                  </p:tgtEl>
+                </p:cond>
+              </p:nextCondLst>
+            </p:seq>
+          </p:childTnLst>
+        </p:cTn>
+      </p:par>
+    </p:tnLst>
+    <p:bldLst>
+      <p:bldP spid="10" grpId="0"/>
+      <p:bldP spid="7" grpId="0"/>
+      <p:bldP spid="3" grpId="0"/>
+    </p:bldLst>
+  </p:timing>
 </p:sld>
 </file>
 
@@ -14517,6 +15056,275 @@
   <p:clrMapOvr>
     <a:masterClrMapping/>
   </p:clrMapOvr>
+  <p:timing>
+    <p:tnLst>
+      <p:par>
+        <p:cTn id="1" dur="indefinite" restart="never" nodeType="tmRoot">
+          <p:childTnLst>
+            <p:seq concurrent="1" nextAc="seek">
+              <p:cTn id="2" dur="indefinite" nodeType="mainSeq">
+                <p:childTnLst>
+                  <p:par>
+                    <p:cTn id="3" fill="hold">
+                      <p:stCondLst>
+                        <p:cond delay="indefinite"/>
+                        <p:cond evt="onBegin" delay="0">
+                          <p:tn val="2"/>
+                        </p:cond>
+                      </p:stCondLst>
+                      <p:childTnLst>
+                        <p:par>
+                          <p:cTn id="4" fill="hold">
+                            <p:stCondLst>
+                              <p:cond delay="0"/>
+                            </p:stCondLst>
+                            <p:childTnLst>
+                              <p:par>
+                                <p:cTn id="5" presetID="22" presetClass="entr" presetSubtype="8" fill="hold" grpId="0" nodeType="withEffect">
+                                  <p:stCondLst>
+                                    <p:cond delay="0"/>
+                                  </p:stCondLst>
+                                  <p:childTnLst>
+                                    <p:set>
+                                      <p:cBhvr>
+                                        <p:cTn id="6" dur="1" fill="hold">
+                                          <p:stCondLst>
+                                            <p:cond delay="0"/>
+                                          </p:stCondLst>
+                                        </p:cTn>
+                                        <p:tgtEl>
+                                          <p:spTgt spid="5"/>
+                                        </p:tgtEl>
+                                        <p:attrNameLst>
+                                          <p:attrName>style.visibility</p:attrName>
+                                        </p:attrNameLst>
+                                      </p:cBhvr>
+                                      <p:to>
+                                        <p:strVal val="visible"/>
+                                      </p:to>
+                                    </p:set>
+                                    <p:animEffect transition="in" filter="wipe(left)">
+                                      <p:cBhvr>
+                                        <p:cTn id="7" dur="500"/>
+                                        <p:tgtEl>
+                                          <p:spTgt spid="5"/>
+                                        </p:tgtEl>
+                                      </p:cBhvr>
+                                    </p:animEffect>
+                                  </p:childTnLst>
+                                </p:cTn>
+                              </p:par>
+                            </p:childTnLst>
+                          </p:cTn>
+                        </p:par>
+                        <p:par>
+                          <p:cTn id="8" fill="hold">
+                            <p:stCondLst>
+                              <p:cond delay="500"/>
+                            </p:stCondLst>
+                            <p:childTnLst>
+                              <p:par>
+                                <p:cTn id="9" presetID="22" presetClass="entr" presetSubtype="8" fill="hold" grpId="0" nodeType="afterEffect">
+                                  <p:stCondLst>
+                                    <p:cond delay="0"/>
+                                  </p:stCondLst>
+                                  <p:childTnLst>
+                                    <p:set>
+                                      <p:cBhvr>
+                                        <p:cTn id="10" dur="1" fill="hold">
+                                          <p:stCondLst>
+                                            <p:cond delay="0"/>
+                                          </p:stCondLst>
+                                        </p:cTn>
+                                        <p:tgtEl>
+                                          <p:spTgt spid="3"/>
+                                        </p:tgtEl>
+                                        <p:attrNameLst>
+                                          <p:attrName>style.visibility</p:attrName>
+                                        </p:attrNameLst>
+                                      </p:cBhvr>
+                                      <p:to>
+                                        <p:strVal val="visible"/>
+                                      </p:to>
+                                    </p:set>
+                                    <p:animEffect transition="in" filter="wipe(left)">
+                                      <p:cBhvr>
+                                        <p:cTn id="11" dur="500"/>
+                                        <p:tgtEl>
+                                          <p:spTgt spid="3"/>
+                                        </p:tgtEl>
+                                      </p:cBhvr>
+                                    </p:animEffect>
+                                  </p:childTnLst>
+                                </p:cTn>
+                              </p:par>
+                            </p:childTnLst>
+                          </p:cTn>
+                        </p:par>
+                        <p:par>
+                          <p:cTn id="12" fill="hold">
+                            <p:stCondLst>
+                              <p:cond delay="1000"/>
+                            </p:stCondLst>
+                            <p:childTnLst>
+                              <p:par>
+                                <p:cTn id="13" presetID="22" presetClass="entr" presetSubtype="8" fill="hold" grpId="0" nodeType="afterEffect">
+                                  <p:stCondLst>
+                                    <p:cond delay="0"/>
+                                  </p:stCondLst>
+                                  <p:childTnLst>
+                                    <p:set>
+                                      <p:cBhvr>
+                                        <p:cTn id="14" dur="1" fill="hold">
+                                          <p:stCondLst>
+                                            <p:cond delay="0"/>
+                                          </p:stCondLst>
+                                        </p:cTn>
+                                        <p:tgtEl>
+                                          <p:spTgt spid="6"/>
+                                        </p:tgtEl>
+                                        <p:attrNameLst>
+                                          <p:attrName>style.visibility</p:attrName>
+                                        </p:attrNameLst>
+                                      </p:cBhvr>
+                                      <p:to>
+                                        <p:strVal val="visible"/>
+                                      </p:to>
+                                    </p:set>
+                                    <p:animEffect transition="in" filter="wipe(left)">
+                                      <p:cBhvr>
+                                        <p:cTn id="15" dur="500"/>
+                                        <p:tgtEl>
+                                          <p:spTgt spid="6"/>
+                                        </p:tgtEl>
+                                      </p:cBhvr>
+                                    </p:animEffect>
+                                  </p:childTnLst>
+                                </p:cTn>
+                              </p:par>
+                            </p:childTnLst>
+                          </p:cTn>
+                        </p:par>
+                        <p:par>
+                          <p:cTn id="16" fill="hold">
+                            <p:stCondLst>
+                              <p:cond delay="1500"/>
+                            </p:stCondLst>
+                            <p:childTnLst>
+                              <p:par>
+                                <p:cTn id="17" presetID="22" presetClass="entr" presetSubtype="8" fill="hold" grpId="0" nodeType="afterEffect">
+                                  <p:stCondLst>
+                                    <p:cond delay="0"/>
+                                  </p:stCondLst>
+                                  <p:childTnLst>
+                                    <p:set>
+                                      <p:cBhvr>
+                                        <p:cTn id="18" dur="1" fill="hold">
+                                          <p:stCondLst>
+                                            <p:cond delay="0"/>
+                                          </p:stCondLst>
+                                        </p:cTn>
+                                        <p:tgtEl>
+                                          <p:spTgt spid="7"/>
+                                        </p:tgtEl>
+                                        <p:attrNameLst>
+                                          <p:attrName>style.visibility</p:attrName>
+                                        </p:attrNameLst>
+                                      </p:cBhvr>
+                                      <p:to>
+                                        <p:strVal val="visible"/>
+                                      </p:to>
+                                    </p:set>
+                                    <p:animEffect transition="in" filter="wipe(left)">
+                                      <p:cBhvr>
+                                        <p:cTn id="19" dur="500"/>
+                                        <p:tgtEl>
+                                          <p:spTgt spid="7"/>
+                                        </p:tgtEl>
+                                      </p:cBhvr>
+                                    </p:animEffect>
+                                  </p:childTnLst>
+                                </p:cTn>
+                              </p:par>
+                            </p:childTnLst>
+                          </p:cTn>
+                        </p:par>
+                        <p:par>
+                          <p:cTn id="20" fill="hold">
+                            <p:stCondLst>
+                              <p:cond delay="2000"/>
+                            </p:stCondLst>
+                            <p:childTnLst>
+                              <p:par>
+                                <p:cTn id="21" presetID="22" presetClass="entr" presetSubtype="8" fill="hold" grpId="0" nodeType="afterEffect">
+                                  <p:stCondLst>
+                                    <p:cond delay="0"/>
+                                  </p:stCondLst>
+                                  <p:childTnLst>
+                                    <p:set>
+                                      <p:cBhvr>
+                                        <p:cTn id="22" dur="1" fill="hold">
+                                          <p:stCondLst>
+                                            <p:cond delay="0"/>
+                                          </p:stCondLst>
+                                        </p:cTn>
+                                        <p:tgtEl>
+                                          <p:spTgt spid="8"/>
+                                        </p:tgtEl>
+                                        <p:attrNameLst>
+                                          <p:attrName>style.visibility</p:attrName>
+                                        </p:attrNameLst>
+                                      </p:cBhvr>
+                                      <p:to>
+                                        <p:strVal val="visible"/>
+                                      </p:to>
+                                    </p:set>
+                                    <p:animEffect transition="in" filter="wipe(left)">
+                                      <p:cBhvr>
+                                        <p:cTn id="23" dur="500"/>
+                                        <p:tgtEl>
+                                          <p:spTgt spid="8"/>
+                                        </p:tgtEl>
+                                      </p:cBhvr>
+                                    </p:animEffect>
+                                  </p:childTnLst>
+                                </p:cTn>
+                              </p:par>
+                            </p:childTnLst>
+                          </p:cTn>
+                        </p:par>
+                      </p:childTnLst>
+                    </p:cTn>
+                  </p:par>
+                </p:childTnLst>
+              </p:cTn>
+              <p:prevCondLst>
+                <p:cond evt="onPrev" delay="0">
+                  <p:tgtEl>
+                    <p:sldTgt/>
+                  </p:tgtEl>
+                </p:cond>
+              </p:prevCondLst>
+              <p:nextCondLst>
+                <p:cond evt="onNext" delay="0">
+                  <p:tgtEl>
+                    <p:sldTgt/>
+                  </p:tgtEl>
+                </p:cond>
+              </p:nextCondLst>
+            </p:seq>
+          </p:childTnLst>
+        </p:cTn>
+      </p:par>
+    </p:tnLst>
+    <p:bldLst>
+      <p:bldP spid="3" grpId="0"/>
+      <p:bldP spid="5" grpId="0"/>
+      <p:bldP spid="6" grpId="0"/>
+      <p:bldP spid="7" grpId="0"/>
+      <p:bldP spid="8" grpId="0"/>
+    </p:bldLst>
+  </p:timing>
 </p:sld>
 </file>
 
@@ -15094,7 +15902,7 @@
         </p:nvSpPr>
         <p:spPr>
           <a:xfrm>
-            <a:off x="887506" y="3429000"/>
+            <a:off x="865093" y="3087906"/>
             <a:ext cx="3402107" cy="646331"/>
           </a:xfrm>
           <a:prstGeom prst="rect">
@@ -15118,6 +15926,44 @@
           </a:p>
         </p:txBody>
       </p:sp>
+      <p:sp>
+        <p:nvSpPr>
+          <p:cNvPr id="3" name="TextBox 2">
+            <a:extLst>
+              <a:ext uri="{FF2B5EF4-FFF2-40B4-BE49-F238E27FC236}">
+                <a16:creationId xmlns:a16="http://schemas.microsoft.com/office/drawing/2014/main" id="{DECB563F-FEE9-7BA3-31BD-FB317A3215F8}"/>
+              </a:ext>
+            </a:extLst>
+          </p:cNvPr>
+          <p:cNvSpPr txBox="1"/>
+          <p:nvPr/>
+        </p:nvSpPr>
+        <p:spPr>
+          <a:xfrm>
+            <a:off x="9067211" y="3193676"/>
+            <a:ext cx="3402107" cy="646331"/>
+          </a:xfrm>
+          <a:prstGeom prst="rect">
+            <a:avLst/>
+          </a:prstGeom>
+          <a:noFill/>
+        </p:spPr>
+        <p:txBody>
+          <a:bodyPr wrap="square" rtlCol="0">
+            <a:spAutoFit/>
+          </a:bodyPr>
+          <a:lstStyle/>
+          <a:p>
+            <a:r>
+              <a:rPr lang="en-US" sz="3600" dirty="0">
+                <a:latin typeface="Cambria" panose="02040503050406030204" pitchFamily="18" charset="0"/>
+                <a:ea typeface="Cambria" panose="02040503050406030204" pitchFamily="18" charset="0"/>
+              </a:rPr>
+              <a:t>Pout = ? </a:t>
+            </a:r>
+          </a:p>
+        </p:txBody>
+      </p:sp>
     </p:spTree>
     <p:extLst>
       <p:ext uri="{BB962C8B-B14F-4D97-AF65-F5344CB8AC3E}">
@@ -15128,6 +15974,631 @@
   <p:clrMapOvr>
     <a:masterClrMapping/>
   </p:clrMapOvr>
+  <p:timing>
+    <p:tnLst>
+      <p:par>
+        <p:cTn id="1" dur="indefinite" restart="never" nodeType="tmRoot">
+          <p:childTnLst>
+            <p:seq concurrent="1" nextAc="seek">
+              <p:cTn id="2" dur="indefinite" nodeType="mainSeq">
+                <p:childTnLst>
+                  <p:par>
+                    <p:cTn id="3" fill="hold">
+                      <p:stCondLst>
+                        <p:cond delay="indefinite"/>
+                        <p:cond evt="onBegin" delay="0">
+                          <p:tn val="2"/>
+                        </p:cond>
+                      </p:stCondLst>
+                      <p:childTnLst>
+                        <p:par>
+                          <p:cTn id="4" fill="hold">
+                            <p:stCondLst>
+                              <p:cond delay="0"/>
+                            </p:stCondLst>
+                            <p:childTnLst>
+                              <p:par>
+                                <p:cTn id="5" presetID="22" presetClass="entr" presetSubtype="8" fill="hold" grpId="0" nodeType="withEffect">
+                                  <p:stCondLst>
+                                    <p:cond delay="0"/>
+                                  </p:stCondLst>
+                                  <p:childTnLst>
+                                    <p:set>
+                                      <p:cBhvr>
+                                        <p:cTn id="6" dur="1" fill="hold">
+                                          <p:stCondLst>
+                                            <p:cond delay="0"/>
+                                          </p:stCondLst>
+                                        </p:cTn>
+                                        <p:tgtEl>
+                                          <p:spTgt spid="4"/>
+                                        </p:tgtEl>
+                                        <p:attrNameLst>
+                                          <p:attrName>style.visibility</p:attrName>
+                                        </p:attrNameLst>
+                                      </p:cBhvr>
+                                      <p:to>
+                                        <p:strVal val="visible"/>
+                                      </p:to>
+                                    </p:set>
+                                    <p:animEffect transition="in" filter="wipe(left)">
+                                      <p:cBhvr>
+                                        <p:cTn id="7" dur="500"/>
+                                        <p:tgtEl>
+                                          <p:spTgt spid="4"/>
+                                        </p:tgtEl>
+                                      </p:cBhvr>
+                                    </p:animEffect>
+                                  </p:childTnLst>
+                                </p:cTn>
+                              </p:par>
+                            </p:childTnLst>
+                          </p:cTn>
+                        </p:par>
+                        <p:par>
+                          <p:cTn id="8" fill="hold">
+                            <p:stCondLst>
+                              <p:cond delay="500"/>
+                            </p:stCondLst>
+                            <p:childTnLst>
+                              <p:par>
+                                <p:cTn id="9" presetID="22" presetClass="entr" presetSubtype="4" fill="hold" grpId="0" nodeType="afterEffect">
+                                  <p:stCondLst>
+                                    <p:cond delay="0"/>
+                                  </p:stCondLst>
+                                  <p:childTnLst>
+                                    <p:set>
+                                      <p:cBhvr>
+                                        <p:cTn id="10" dur="1" fill="hold">
+                                          <p:stCondLst>
+                                            <p:cond delay="0"/>
+                                          </p:stCondLst>
+                                        </p:cTn>
+                                        <p:tgtEl>
+                                          <p:spTgt spid="6"/>
+                                        </p:tgtEl>
+                                        <p:attrNameLst>
+                                          <p:attrName>style.visibility</p:attrName>
+                                        </p:attrNameLst>
+                                      </p:cBhvr>
+                                      <p:to>
+                                        <p:strVal val="visible"/>
+                                      </p:to>
+                                    </p:set>
+                                    <p:animEffect transition="in" filter="wipe(down)">
+                                      <p:cBhvr>
+                                        <p:cTn id="11" dur="500"/>
+                                        <p:tgtEl>
+                                          <p:spTgt spid="6"/>
+                                        </p:tgtEl>
+                                      </p:cBhvr>
+                                    </p:animEffect>
+                                  </p:childTnLst>
+                                </p:cTn>
+                              </p:par>
+                            </p:childTnLst>
+                          </p:cTn>
+                        </p:par>
+                        <p:par>
+                          <p:cTn id="12" fill="hold">
+                            <p:stCondLst>
+                              <p:cond delay="1000"/>
+                            </p:stCondLst>
+                            <p:childTnLst>
+                              <p:par>
+                                <p:cTn id="13" presetID="22" presetClass="entr" presetSubtype="8" fill="hold" grpId="0" nodeType="afterEffect">
+                                  <p:stCondLst>
+                                    <p:cond delay="0"/>
+                                  </p:stCondLst>
+                                  <p:childTnLst>
+                                    <p:set>
+                                      <p:cBhvr>
+                                        <p:cTn id="14" dur="1" fill="hold">
+                                          <p:stCondLst>
+                                            <p:cond delay="0"/>
+                                          </p:stCondLst>
+                                        </p:cTn>
+                                        <p:tgtEl>
+                                          <p:spTgt spid="16"/>
+                                        </p:tgtEl>
+                                        <p:attrNameLst>
+                                          <p:attrName>style.visibility</p:attrName>
+                                        </p:attrNameLst>
+                                      </p:cBhvr>
+                                      <p:to>
+                                        <p:strVal val="visible"/>
+                                      </p:to>
+                                    </p:set>
+                                    <p:animEffect transition="in" filter="wipe(left)">
+                                      <p:cBhvr>
+                                        <p:cTn id="15" dur="500"/>
+                                        <p:tgtEl>
+                                          <p:spTgt spid="16"/>
+                                        </p:tgtEl>
+                                      </p:cBhvr>
+                                    </p:animEffect>
+                                  </p:childTnLst>
+                                </p:cTn>
+                              </p:par>
+                            </p:childTnLst>
+                          </p:cTn>
+                        </p:par>
+                        <p:par>
+                          <p:cTn id="16" fill="hold">
+                            <p:stCondLst>
+                              <p:cond delay="1500"/>
+                            </p:stCondLst>
+                            <p:childTnLst>
+                              <p:par>
+                                <p:cTn id="17" presetID="22" presetClass="entr" presetSubtype="8" fill="hold" nodeType="afterEffect">
+                                  <p:stCondLst>
+                                    <p:cond delay="0"/>
+                                  </p:stCondLst>
+                                  <p:childTnLst>
+                                    <p:set>
+                                      <p:cBhvr>
+                                        <p:cTn id="18" dur="1" fill="hold">
+                                          <p:stCondLst>
+                                            <p:cond delay="0"/>
+                                          </p:stCondLst>
+                                        </p:cTn>
+                                        <p:tgtEl>
+                                          <p:spTgt spid="10"/>
+                                        </p:tgtEl>
+                                        <p:attrNameLst>
+                                          <p:attrName>style.visibility</p:attrName>
+                                        </p:attrNameLst>
+                                      </p:cBhvr>
+                                      <p:to>
+                                        <p:strVal val="visible"/>
+                                      </p:to>
+                                    </p:set>
+                                    <p:animEffect transition="in" filter="wipe(left)">
+                                      <p:cBhvr>
+                                        <p:cTn id="19" dur="500"/>
+                                        <p:tgtEl>
+                                          <p:spTgt spid="10"/>
+                                        </p:tgtEl>
+                                      </p:cBhvr>
+                                    </p:animEffect>
+                                  </p:childTnLst>
+                                </p:cTn>
+                              </p:par>
+                            </p:childTnLst>
+                          </p:cTn>
+                        </p:par>
+                        <p:par>
+                          <p:cTn id="20" fill="hold">
+                            <p:stCondLst>
+                              <p:cond delay="2000"/>
+                            </p:stCondLst>
+                            <p:childTnLst>
+                              <p:par>
+                                <p:cTn id="21" presetID="22" presetClass="entr" presetSubtype="4" fill="hold" grpId="0" nodeType="afterEffect">
+                                  <p:stCondLst>
+                                    <p:cond delay="0"/>
+                                  </p:stCondLst>
+                                  <p:childTnLst>
+                                    <p:set>
+                                      <p:cBhvr>
+                                        <p:cTn id="22" dur="1" fill="hold">
+                                          <p:stCondLst>
+                                            <p:cond delay="0"/>
+                                          </p:stCondLst>
+                                        </p:cTn>
+                                        <p:tgtEl>
+                                          <p:spTgt spid="13"/>
+                                        </p:tgtEl>
+                                        <p:attrNameLst>
+                                          <p:attrName>style.visibility</p:attrName>
+                                        </p:attrNameLst>
+                                      </p:cBhvr>
+                                      <p:to>
+                                        <p:strVal val="visible"/>
+                                      </p:to>
+                                    </p:set>
+                                    <p:animEffect transition="in" filter="wipe(down)">
+                                      <p:cBhvr>
+                                        <p:cTn id="23" dur="500"/>
+                                        <p:tgtEl>
+                                          <p:spTgt spid="13"/>
+                                        </p:tgtEl>
+                                      </p:cBhvr>
+                                    </p:animEffect>
+                                  </p:childTnLst>
+                                </p:cTn>
+                              </p:par>
+                            </p:childTnLst>
+                          </p:cTn>
+                        </p:par>
+                        <p:par>
+                          <p:cTn id="24" fill="hold">
+                            <p:stCondLst>
+                              <p:cond delay="2500"/>
+                            </p:stCondLst>
+                            <p:childTnLst>
+                              <p:par>
+                                <p:cTn id="25" presetID="22" presetClass="entr" presetSubtype="4" fill="hold" grpId="0" nodeType="afterEffect">
+                                  <p:stCondLst>
+                                    <p:cond delay="0"/>
+                                  </p:stCondLst>
+                                  <p:childTnLst>
+                                    <p:set>
+                                      <p:cBhvr>
+                                        <p:cTn id="26" dur="1" fill="hold">
+                                          <p:stCondLst>
+                                            <p:cond delay="0"/>
+                                          </p:stCondLst>
+                                        </p:cTn>
+                                        <p:tgtEl>
+                                          <p:spTgt spid="8"/>
+                                        </p:tgtEl>
+                                        <p:attrNameLst>
+                                          <p:attrName>style.visibility</p:attrName>
+                                        </p:attrNameLst>
+                                      </p:cBhvr>
+                                      <p:to>
+                                        <p:strVal val="visible"/>
+                                      </p:to>
+                                    </p:set>
+                                    <p:animEffect transition="in" filter="wipe(down)">
+                                      <p:cBhvr>
+                                        <p:cTn id="27" dur="500"/>
+                                        <p:tgtEl>
+                                          <p:spTgt spid="8"/>
+                                        </p:tgtEl>
+                                      </p:cBhvr>
+                                    </p:animEffect>
+                                  </p:childTnLst>
+                                </p:cTn>
+                              </p:par>
+                            </p:childTnLst>
+                          </p:cTn>
+                        </p:par>
+                        <p:par>
+                          <p:cTn id="28" fill="hold">
+                            <p:stCondLst>
+                              <p:cond delay="3000"/>
+                            </p:stCondLst>
+                            <p:childTnLst>
+                              <p:par>
+                                <p:cTn id="29" presetID="22" presetClass="entr" presetSubtype="8" fill="hold" nodeType="afterEffect">
+                                  <p:stCondLst>
+                                    <p:cond delay="0"/>
+                                  </p:stCondLst>
+                                  <p:childTnLst>
+                                    <p:set>
+                                      <p:cBhvr>
+                                        <p:cTn id="30" dur="1" fill="hold">
+                                          <p:stCondLst>
+                                            <p:cond delay="0"/>
+                                          </p:stCondLst>
+                                        </p:cTn>
+                                        <p:tgtEl>
+                                          <p:spTgt spid="11"/>
+                                        </p:tgtEl>
+                                        <p:attrNameLst>
+                                          <p:attrName>style.visibility</p:attrName>
+                                        </p:attrNameLst>
+                                      </p:cBhvr>
+                                      <p:to>
+                                        <p:strVal val="visible"/>
+                                      </p:to>
+                                    </p:set>
+                                    <p:animEffect transition="in" filter="wipe(left)">
+                                      <p:cBhvr>
+                                        <p:cTn id="31" dur="500"/>
+                                        <p:tgtEl>
+                                          <p:spTgt spid="11"/>
+                                        </p:tgtEl>
+                                      </p:cBhvr>
+                                    </p:animEffect>
+                                  </p:childTnLst>
+                                </p:cTn>
+                              </p:par>
+                            </p:childTnLst>
+                          </p:cTn>
+                        </p:par>
+                        <p:par>
+                          <p:cTn id="32" fill="hold">
+                            <p:stCondLst>
+                              <p:cond delay="3500"/>
+                            </p:stCondLst>
+                            <p:childTnLst>
+                              <p:par>
+                                <p:cTn id="33" presetID="22" presetClass="entr" presetSubtype="4" fill="hold" grpId="0" nodeType="afterEffect">
+                                  <p:stCondLst>
+                                    <p:cond delay="0"/>
+                                  </p:stCondLst>
+                                  <p:childTnLst>
+                                    <p:set>
+                                      <p:cBhvr>
+                                        <p:cTn id="34" dur="1" fill="hold">
+                                          <p:stCondLst>
+                                            <p:cond delay="0"/>
+                                          </p:stCondLst>
+                                        </p:cTn>
+                                        <p:tgtEl>
+                                          <p:spTgt spid="14"/>
+                                        </p:tgtEl>
+                                        <p:attrNameLst>
+                                          <p:attrName>style.visibility</p:attrName>
+                                        </p:attrNameLst>
+                                      </p:cBhvr>
+                                      <p:to>
+                                        <p:strVal val="visible"/>
+                                      </p:to>
+                                    </p:set>
+                                    <p:animEffect transition="in" filter="wipe(down)">
+                                      <p:cBhvr>
+                                        <p:cTn id="35" dur="500"/>
+                                        <p:tgtEl>
+                                          <p:spTgt spid="14"/>
+                                        </p:tgtEl>
+                                      </p:cBhvr>
+                                    </p:animEffect>
+                                  </p:childTnLst>
+                                </p:cTn>
+                              </p:par>
+                            </p:childTnLst>
+                          </p:cTn>
+                        </p:par>
+                        <p:par>
+                          <p:cTn id="36" fill="hold">
+                            <p:stCondLst>
+                              <p:cond delay="4000"/>
+                            </p:stCondLst>
+                            <p:childTnLst>
+                              <p:par>
+                                <p:cTn id="37" presetID="22" presetClass="entr" presetSubtype="4" fill="hold" grpId="0" nodeType="afterEffect">
+                                  <p:stCondLst>
+                                    <p:cond delay="0"/>
+                                  </p:stCondLst>
+                                  <p:childTnLst>
+                                    <p:set>
+                                      <p:cBhvr>
+                                        <p:cTn id="38" dur="1" fill="hold">
+                                          <p:stCondLst>
+                                            <p:cond delay="0"/>
+                                          </p:stCondLst>
+                                        </p:cTn>
+                                        <p:tgtEl>
+                                          <p:spTgt spid="7"/>
+                                        </p:tgtEl>
+                                        <p:attrNameLst>
+                                          <p:attrName>style.visibility</p:attrName>
+                                        </p:attrNameLst>
+                                      </p:cBhvr>
+                                      <p:to>
+                                        <p:strVal val="visible"/>
+                                      </p:to>
+                                    </p:set>
+                                    <p:animEffect transition="in" filter="wipe(down)">
+                                      <p:cBhvr>
+                                        <p:cTn id="39" dur="500"/>
+                                        <p:tgtEl>
+                                          <p:spTgt spid="7"/>
+                                        </p:tgtEl>
+                                      </p:cBhvr>
+                                    </p:animEffect>
+                                  </p:childTnLst>
+                                </p:cTn>
+                              </p:par>
+                            </p:childTnLst>
+                          </p:cTn>
+                        </p:par>
+                        <p:par>
+                          <p:cTn id="40" fill="hold">
+                            <p:stCondLst>
+                              <p:cond delay="4500"/>
+                            </p:stCondLst>
+                            <p:childTnLst>
+                              <p:par>
+                                <p:cTn id="41" presetID="22" presetClass="entr" presetSubtype="8" fill="hold" nodeType="afterEffect">
+                                  <p:stCondLst>
+                                    <p:cond delay="0"/>
+                                  </p:stCondLst>
+                                  <p:childTnLst>
+                                    <p:set>
+                                      <p:cBhvr>
+                                        <p:cTn id="42" dur="1" fill="hold">
+                                          <p:stCondLst>
+                                            <p:cond delay="0"/>
+                                          </p:stCondLst>
+                                        </p:cTn>
+                                        <p:tgtEl>
+                                          <p:spTgt spid="12"/>
+                                        </p:tgtEl>
+                                        <p:attrNameLst>
+                                          <p:attrName>style.visibility</p:attrName>
+                                        </p:attrNameLst>
+                                      </p:cBhvr>
+                                      <p:to>
+                                        <p:strVal val="visible"/>
+                                      </p:to>
+                                    </p:set>
+                                    <p:animEffect transition="in" filter="wipe(left)">
+                                      <p:cBhvr>
+                                        <p:cTn id="43" dur="500"/>
+                                        <p:tgtEl>
+                                          <p:spTgt spid="12"/>
+                                        </p:tgtEl>
+                                      </p:cBhvr>
+                                    </p:animEffect>
+                                  </p:childTnLst>
+                                </p:cTn>
+                              </p:par>
+                            </p:childTnLst>
+                          </p:cTn>
+                        </p:par>
+                        <p:par>
+                          <p:cTn id="44" fill="hold">
+                            <p:stCondLst>
+                              <p:cond delay="5000"/>
+                            </p:stCondLst>
+                            <p:childTnLst>
+                              <p:par>
+                                <p:cTn id="45" presetID="22" presetClass="entr" presetSubtype="4" fill="hold" grpId="0" nodeType="afterEffect">
+                                  <p:stCondLst>
+                                    <p:cond delay="0"/>
+                                  </p:stCondLst>
+                                  <p:childTnLst>
+                                    <p:set>
+                                      <p:cBhvr>
+                                        <p:cTn id="46" dur="1" fill="hold">
+                                          <p:stCondLst>
+                                            <p:cond delay="0"/>
+                                          </p:stCondLst>
+                                        </p:cTn>
+                                        <p:tgtEl>
+                                          <p:spTgt spid="15"/>
+                                        </p:tgtEl>
+                                        <p:attrNameLst>
+                                          <p:attrName>style.visibility</p:attrName>
+                                        </p:attrNameLst>
+                                      </p:cBhvr>
+                                      <p:to>
+                                        <p:strVal val="visible"/>
+                                      </p:to>
+                                    </p:set>
+                                    <p:animEffect transition="in" filter="wipe(down)">
+                                      <p:cBhvr>
+                                        <p:cTn id="47" dur="500"/>
+                                        <p:tgtEl>
+                                          <p:spTgt spid="15"/>
+                                        </p:tgtEl>
+                                      </p:cBhvr>
+                                    </p:animEffect>
+                                  </p:childTnLst>
+                                </p:cTn>
+                              </p:par>
+                            </p:childTnLst>
+                          </p:cTn>
+                        </p:par>
+                        <p:par>
+                          <p:cTn id="48" fill="hold">
+                            <p:stCondLst>
+                              <p:cond delay="5500"/>
+                            </p:stCondLst>
+                            <p:childTnLst>
+                              <p:par>
+                                <p:cTn id="49" presetID="22" presetClass="entr" presetSubtype="8" fill="hold" nodeType="afterEffect">
+                                  <p:stCondLst>
+                                    <p:cond delay="0"/>
+                                  </p:stCondLst>
+                                  <p:childTnLst>
+                                    <p:set>
+                                      <p:cBhvr>
+                                        <p:cTn id="50" dur="1" fill="hold">
+                                          <p:stCondLst>
+                                            <p:cond delay="0"/>
+                                          </p:stCondLst>
+                                        </p:cTn>
+                                        <p:tgtEl>
+                                          <p:spTgt spid="9"/>
+                                        </p:tgtEl>
+                                        <p:attrNameLst>
+                                          <p:attrName>style.visibility</p:attrName>
+                                        </p:attrNameLst>
+                                      </p:cBhvr>
+                                      <p:to>
+                                        <p:strVal val="visible"/>
+                                      </p:to>
+                                    </p:set>
+                                    <p:animEffect transition="in" filter="wipe(left)">
+                                      <p:cBhvr>
+                                        <p:cTn id="51" dur="500"/>
+                                        <p:tgtEl>
+                                          <p:spTgt spid="9"/>
+                                        </p:tgtEl>
+                                      </p:cBhvr>
+                                    </p:animEffect>
+                                  </p:childTnLst>
+                                </p:cTn>
+                              </p:par>
+                            </p:childTnLst>
+                          </p:cTn>
+                        </p:par>
+                        <p:par>
+                          <p:cTn id="52" fill="hold">
+                            <p:stCondLst>
+                              <p:cond delay="6000"/>
+                            </p:stCondLst>
+                            <p:childTnLst>
+                              <p:par>
+                                <p:cTn id="53" presetID="22" presetClass="entr" presetSubtype="8" fill="hold" grpId="0" nodeType="afterEffect">
+                                  <p:stCondLst>
+                                    <p:cond delay="0"/>
+                                  </p:stCondLst>
+                                  <p:childTnLst>
+                                    <p:set>
+                                      <p:cBhvr>
+                                        <p:cTn id="54" dur="1" fill="hold">
+                                          <p:stCondLst>
+                                            <p:cond delay="0"/>
+                                          </p:stCondLst>
+                                        </p:cTn>
+                                        <p:tgtEl>
+                                          <p:spTgt spid="3"/>
+                                        </p:tgtEl>
+                                        <p:attrNameLst>
+                                          <p:attrName>style.visibility</p:attrName>
+                                        </p:attrNameLst>
+                                      </p:cBhvr>
+                                      <p:to>
+                                        <p:strVal val="visible"/>
+                                      </p:to>
+                                    </p:set>
+                                    <p:animEffect transition="in" filter="wipe(left)">
+                                      <p:cBhvr>
+                                        <p:cTn id="55" dur="500"/>
+                                        <p:tgtEl>
+                                          <p:spTgt spid="3"/>
+                                        </p:tgtEl>
+                                      </p:cBhvr>
+                                    </p:animEffect>
+                                  </p:childTnLst>
+                                </p:cTn>
+                              </p:par>
+                            </p:childTnLst>
+                          </p:cTn>
+                        </p:par>
+                      </p:childTnLst>
+                    </p:cTn>
+                  </p:par>
+                </p:childTnLst>
+              </p:cTn>
+              <p:prevCondLst>
+                <p:cond evt="onPrev" delay="0">
+                  <p:tgtEl>
+                    <p:sldTgt/>
+                  </p:tgtEl>
+                </p:cond>
+              </p:prevCondLst>
+              <p:nextCondLst>
+                <p:cond evt="onNext" delay="0">
+                  <p:tgtEl>
+                    <p:sldTgt/>
+                  </p:tgtEl>
+                </p:cond>
+              </p:nextCondLst>
+            </p:seq>
+          </p:childTnLst>
+        </p:cTn>
+      </p:par>
+    </p:tnLst>
+    <p:bldLst>
+      <p:bldP spid="4" grpId="0"/>
+      <p:bldP spid="6" grpId="0" animBg="1"/>
+      <p:bldP spid="7" grpId="0" animBg="1"/>
+      <p:bldP spid="8" grpId="0" animBg="1"/>
+      <p:bldP spid="13" grpId="0"/>
+      <p:bldP spid="14" grpId="0"/>
+      <p:bldP spid="15" grpId="0"/>
+      <p:bldP spid="16" grpId="0"/>
+      <p:bldP spid="3" grpId="0"/>
+    </p:bldLst>
+  </p:timing>
 </p:sld>
 </file>
 
@@ -15767,6 +17238,140 @@
   <p:clrMapOvr>
     <a:masterClrMapping/>
   </p:clrMapOvr>
+  <p:timing>
+    <p:tnLst>
+      <p:par>
+        <p:cTn id="1" dur="indefinite" restart="never" nodeType="tmRoot">
+          <p:childTnLst>
+            <p:seq concurrent="1" nextAc="seek">
+              <p:cTn id="2" dur="indefinite" nodeType="mainSeq">
+                <p:childTnLst>
+                  <p:par>
+                    <p:cTn id="3" fill="hold">
+                      <p:stCondLst>
+                        <p:cond delay="indefinite"/>
+                        <p:cond evt="onBegin" delay="0">
+                          <p:tn val="2"/>
+                        </p:cond>
+                      </p:stCondLst>
+                      <p:childTnLst>
+                        <p:par>
+                          <p:cTn id="4" fill="hold">
+                            <p:stCondLst>
+                              <p:cond delay="0"/>
+                            </p:stCondLst>
+                            <p:childTnLst>
+                              <p:par>
+                                <p:cTn id="5" presetID="22" presetClass="entr" presetSubtype="8" fill="hold" grpId="0" nodeType="withEffect">
+                                  <p:stCondLst>
+                                    <p:cond delay="0"/>
+                                  </p:stCondLst>
+                                  <p:childTnLst>
+                                    <p:set>
+                                      <p:cBhvr>
+                                        <p:cTn id="6" dur="1" fill="hold">
+                                          <p:stCondLst>
+                                            <p:cond delay="0"/>
+                                          </p:stCondLst>
+                                        </p:cTn>
+                                        <p:tgtEl>
+                                          <p:spTgt spid="3"/>
+                                        </p:tgtEl>
+                                        <p:attrNameLst>
+                                          <p:attrName>style.visibility</p:attrName>
+                                        </p:attrNameLst>
+                                      </p:cBhvr>
+                                      <p:to>
+                                        <p:strVal val="visible"/>
+                                      </p:to>
+                                    </p:set>
+                                    <p:animEffect transition="in" filter="wipe(left)">
+                                      <p:cBhvr>
+                                        <p:cTn id="7" dur="500"/>
+                                        <p:tgtEl>
+                                          <p:spTgt spid="3"/>
+                                        </p:tgtEl>
+                                      </p:cBhvr>
+                                    </p:animEffect>
+                                  </p:childTnLst>
+                                </p:cTn>
+                              </p:par>
+                            </p:childTnLst>
+                          </p:cTn>
+                        </p:par>
+                        <p:par>
+                          <p:cTn id="8" fill="hold">
+                            <p:stCondLst>
+                              <p:cond delay="500"/>
+                            </p:stCondLst>
+                            <p:childTnLst>
+                              <p:par>
+                                <p:cTn id="9" presetID="22" presetClass="entr" presetSubtype="8" fill="hold" grpId="0" nodeType="afterEffect">
+                                  <p:stCondLst>
+                                    <p:cond delay="0"/>
+                                  </p:stCondLst>
+                                  <p:childTnLst>
+                                    <p:set>
+                                      <p:cBhvr>
+                                        <p:cTn id="10" dur="1" fill="hold">
+                                          <p:stCondLst>
+                                            <p:cond delay="0"/>
+                                          </p:stCondLst>
+                                        </p:cTn>
+                                        <p:tgtEl>
+                                          <p:spTgt spid="5"/>
+                                        </p:tgtEl>
+                                        <p:attrNameLst>
+                                          <p:attrName>style.visibility</p:attrName>
+                                        </p:attrNameLst>
+                                      </p:cBhvr>
+                                      <p:to>
+                                        <p:strVal val="visible"/>
+                                      </p:to>
+                                    </p:set>
+                                    <p:animEffect transition="in" filter="wipe(left)">
+                                      <p:cBhvr>
+                                        <p:cTn id="11" dur="500"/>
+                                        <p:tgtEl>
+                                          <p:spTgt spid="5"/>
+                                        </p:tgtEl>
+                                      </p:cBhvr>
+                                    </p:animEffect>
+                                  </p:childTnLst>
+                                </p:cTn>
+                              </p:par>
+                            </p:childTnLst>
+                          </p:cTn>
+                        </p:par>
+                      </p:childTnLst>
+                    </p:cTn>
+                  </p:par>
+                </p:childTnLst>
+              </p:cTn>
+              <p:prevCondLst>
+                <p:cond evt="onPrev" delay="0">
+                  <p:tgtEl>
+                    <p:sldTgt/>
+                  </p:tgtEl>
+                </p:cond>
+              </p:prevCondLst>
+              <p:nextCondLst>
+                <p:cond evt="onNext" delay="0">
+                  <p:tgtEl>
+                    <p:sldTgt/>
+                  </p:tgtEl>
+                </p:cond>
+              </p:nextCondLst>
+            </p:seq>
+          </p:childTnLst>
+        </p:cTn>
+      </p:par>
+    </p:tnLst>
+    <p:bldLst>
+      <p:bldP spid="3" grpId="0"/>
+      <p:bldP spid="5" grpId="0"/>
+    </p:bldLst>
+  </p:timing>
 </p:sld>
 </file>
 
@@ -16464,6 +18069,230 @@
   <p:clrMapOvr>
     <a:masterClrMapping/>
   </p:clrMapOvr>
+  <p:timing>
+    <p:tnLst>
+      <p:par>
+        <p:cTn id="1" dur="indefinite" restart="never" nodeType="tmRoot">
+          <p:childTnLst>
+            <p:seq concurrent="1" nextAc="seek">
+              <p:cTn id="2" dur="indefinite" nodeType="mainSeq">
+                <p:childTnLst>
+                  <p:par>
+                    <p:cTn id="3" fill="hold">
+                      <p:stCondLst>
+                        <p:cond delay="indefinite"/>
+                        <p:cond evt="onBegin" delay="0">
+                          <p:tn val="2"/>
+                        </p:cond>
+                      </p:stCondLst>
+                      <p:childTnLst>
+                        <p:par>
+                          <p:cTn id="4" fill="hold">
+                            <p:stCondLst>
+                              <p:cond delay="0"/>
+                            </p:stCondLst>
+                            <p:childTnLst>
+                              <p:par>
+                                <p:cTn id="5" presetID="22" presetClass="entr" presetSubtype="8" fill="hold" grpId="0" nodeType="withEffect">
+                                  <p:stCondLst>
+                                    <p:cond delay="0"/>
+                                  </p:stCondLst>
+                                  <p:childTnLst>
+                                    <p:set>
+                                      <p:cBhvr>
+                                        <p:cTn id="6" dur="1" fill="hold">
+                                          <p:stCondLst>
+                                            <p:cond delay="0"/>
+                                          </p:stCondLst>
+                                        </p:cTn>
+                                        <p:tgtEl>
+                                          <p:spTgt spid="10"/>
+                                        </p:tgtEl>
+                                        <p:attrNameLst>
+                                          <p:attrName>style.visibility</p:attrName>
+                                        </p:attrNameLst>
+                                      </p:cBhvr>
+                                      <p:to>
+                                        <p:strVal val="visible"/>
+                                      </p:to>
+                                    </p:set>
+                                    <p:animEffect transition="in" filter="wipe(left)">
+                                      <p:cBhvr>
+                                        <p:cTn id="7" dur="500"/>
+                                        <p:tgtEl>
+                                          <p:spTgt spid="10"/>
+                                        </p:tgtEl>
+                                      </p:cBhvr>
+                                    </p:animEffect>
+                                  </p:childTnLst>
+                                </p:cTn>
+                              </p:par>
+                            </p:childTnLst>
+                          </p:cTn>
+                        </p:par>
+                        <p:par>
+                          <p:cTn id="8" fill="hold">
+                            <p:stCondLst>
+                              <p:cond delay="500"/>
+                            </p:stCondLst>
+                            <p:childTnLst>
+                              <p:par>
+                                <p:cTn id="9" presetID="22" presetClass="entr" presetSubtype="8" fill="hold" grpId="0" nodeType="afterEffect">
+                                  <p:stCondLst>
+                                    <p:cond delay="0"/>
+                                  </p:stCondLst>
+                                  <p:childTnLst>
+                                    <p:set>
+                                      <p:cBhvr>
+                                        <p:cTn id="10" dur="1" fill="hold">
+                                          <p:stCondLst>
+                                            <p:cond delay="0"/>
+                                          </p:stCondLst>
+                                        </p:cTn>
+                                        <p:tgtEl>
+                                          <p:spTgt spid="7"/>
+                                        </p:tgtEl>
+                                        <p:attrNameLst>
+                                          <p:attrName>style.visibility</p:attrName>
+                                        </p:attrNameLst>
+                                      </p:cBhvr>
+                                      <p:to>
+                                        <p:strVal val="visible"/>
+                                      </p:to>
+                                    </p:set>
+                                    <p:animEffect transition="in" filter="wipe(left)">
+                                      <p:cBhvr>
+                                        <p:cTn id="11" dur="500"/>
+                                        <p:tgtEl>
+                                          <p:spTgt spid="7"/>
+                                        </p:tgtEl>
+                                      </p:cBhvr>
+                                    </p:animEffect>
+                                  </p:childTnLst>
+                                </p:cTn>
+                              </p:par>
+                            </p:childTnLst>
+                          </p:cTn>
+                        </p:par>
+                        <p:par>
+                          <p:cTn id="12" fill="hold">
+                            <p:stCondLst>
+                              <p:cond delay="1000"/>
+                            </p:stCondLst>
+                            <p:childTnLst>
+                              <p:par>
+                                <p:cTn id="13" presetID="22" presetClass="entr" presetSubtype="8" fill="hold" grpId="0" nodeType="afterEffect">
+                                  <p:stCondLst>
+                                    <p:cond delay="0"/>
+                                  </p:stCondLst>
+                                  <p:childTnLst>
+                                    <p:set>
+                                      <p:cBhvr>
+                                        <p:cTn id="14" dur="1" fill="hold">
+                                          <p:stCondLst>
+                                            <p:cond delay="0"/>
+                                          </p:stCondLst>
+                                        </p:cTn>
+                                        <p:tgtEl>
+                                          <p:spTgt spid="3"/>
+                                        </p:tgtEl>
+                                        <p:attrNameLst>
+                                          <p:attrName>style.visibility</p:attrName>
+                                        </p:attrNameLst>
+                                      </p:cBhvr>
+                                      <p:to>
+                                        <p:strVal val="visible"/>
+                                      </p:to>
+                                    </p:set>
+                                    <p:animEffect transition="in" filter="wipe(left)">
+                                      <p:cBhvr>
+                                        <p:cTn id="15" dur="500"/>
+                                        <p:tgtEl>
+                                          <p:spTgt spid="3"/>
+                                        </p:tgtEl>
+                                      </p:cBhvr>
+                                    </p:animEffect>
+                                  </p:childTnLst>
+                                </p:cTn>
+                              </p:par>
+                            </p:childTnLst>
+                          </p:cTn>
+                        </p:par>
+                        <p:par>
+                          <p:cTn id="16" fill="hold">
+                            <p:stCondLst>
+                              <p:cond delay="1500"/>
+                            </p:stCondLst>
+                            <p:childTnLst>
+                              <p:par>
+                                <p:cTn id="17" presetID="22" presetClass="entr" presetSubtype="8" fill="hold" grpId="0" nodeType="afterEffect">
+                                  <p:stCondLst>
+                                    <p:cond delay="0"/>
+                                  </p:stCondLst>
+                                  <p:childTnLst>
+                                    <p:set>
+                                      <p:cBhvr>
+                                        <p:cTn id="18" dur="1" fill="hold">
+                                          <p:stCondLst>
+                                            <p:cond delay="0"/>
+                                          </p:stCondLst>
+                                        </p:cTn>
+                                        <p:tgtEl>
+                                          <p:spTgt spid="4"/>
+                                        </p:tgtEl>
+                                        <p:attrNameLst>
+                                          <p:attrName>style.visibility</p:attrName>
+                                        </p:attrNameLst>
+                                      </p:cBhvr>
+                                      <p:to>
+                                        <p:strVal val="visible"/>
+                                      </p:to>
+                                    </p:set>
+                                    <p:animEffect transition="in" filter="wipe(left)">
+                                      <p:cBhvr>
+                                        <p:cTn id="19" dur="500"/>
+                                        <p:tgtEl>
+                                          <p:spTgt spid="4"/>
+                                        </p:tgtEl>
+                                      </p:cBhvr>
+                                    </p:animEffect>
+                                  </p:childTnLst>
+                                </p:cTn>
+                              </p:par>
+                            </p:childTnLst>
+                          </p:cTn>
+                        </p:par>
+                      </p:childTnLst>
+                    </p:cTn>
+                  </p:par>
+                </p:childTnLst>
+              </p:cTn>
+              <p:prevCondLst>
+                <p:cond evt="onPrev" delay="0">
+                  <p:tgtEl>
+                    <p:sldTgt/>
+                  </p:tgtEl>
+                </p:cond>
+              </p:prevCondLst>
+              <p:nextCondLst>
+                <p:cond evt="onNext" delay="0">
+                  <p:tgtEl>
+                    <p:sldTgt/>
+                  </p:tgtEl>
+                </p:cond>
+              </p:nextCondLst>
+            </p:seq>
+          </p:childTnLst>
+        </p:cTn>
+      </p:par>
+    </p:tnLst>
+    <p:bldLst>
+      <p:bldP spid="7" grpId="0"/>
+      <p:bldP spid="10" grpId="0"/>
+      <p:bldP spid="3" grpId="0"/>
+      <p:bldP spid="4" grpId="0"/>
+    </p:bldLst>
+  </p:timing>
 </p:sld>
 </file>
 
@@ -17334,6 +19163,230 @@
   <p:clrMapOvr>
     <a:masterClrMapping/>
   </p:clrMapOvr>
+  <p:timing>
+    <p:tnLst>
+      <p:par>
+        <p:cTn id="1" dur="indefinite" restart="never" nodeType="tmRoot">
+          <p:childTnLst>
+            <p:seq concurrent="1" nextAc="seek">
+              <p:cTn id="2" dur="indefinite" nodeType="mainSeq">
+                <p:childTnLst>
+                  <p:par>
+                    <p:cTn id="3" fill="hold">
+                      <p:stCondLst>
+                        <p:cond delay="indefinite"/>
+                        <p:cond evt="onBegin" delay="0">
+                          <p:tn val="2"/>
+                        </p:cond>
+                      </p:stCondLst>
+                      <p:childTnLst>
+                        <p:par>
+                          <p:cTn id="4" fill="hold">
+                            <p:stCondLst>
+                              <p:cond delay="0"/>
+                            </p:stCondLst>
+                            <p:childTnLst>
+                              <p:par>
+                                <p:cTn id="5" presetID="22" presetClass="entr" presetSubtype="8" fill="hold" grpId="0" nodeType="withEffect">
+                                  <p:stCondLst>
+                                    <p:cond delay="0"/>
+                                  </p:stCondLst>
+                                  <p:childTnLst>
+                                    <p:set>
+                                      <p:cBhvr>
+                                        <p:cTn id="6" dur="1" fill="hold">
+                                          <p:stCondLst>
+                                            <p:cond delay="0"/>
+                                          </p:stCondLst>
+                                        </p:cTn>
+                                        <p:tgtEl>
+                                          <p:spTgt spid="7"/>
+                                        </p:tgtEl>
+                                        <p:attrNameLst>
+                                          <p:attrName>style.visibility</p:attrName>
+                                        </p:attrNameLst>
+                                      </p:cBhvr>
+                                      <p:to>
+                                        <p:strVal val="visible"/>
+                                      </p:to>
+                                    </p:set>
+                                    <p:animEffect transition="in" filter="wipe(left)">
+                                      <p:cBhvr>
+                                        <p:cTn id="7" dur="500"/>
+                                        <p:tgtEl>
+                                          <p:spTgt spid="7"/>
+                                        </p:tgtEl>
+                                      </p:cBhvr>
+                                    </p:animEffect>
+                                  </p:childTnLst>
+                                </p:cTn>
+                              </p:par>
+                            </p:childTnLst>
+                          </p:cTn>
+                        </p:par>
+                        <p:par>
+                          <p:cTn id="8" fill="hold">
+                            <p:stCondLst>
+                              <p:cond delay="500"/>
+                            </p:stCondLst>
+                            <p:childTnLst>
+                              <p:par>
+                                <p:cTn id="9" presetID="22" presetClass="entr" presetSubtype="8" fill="hold" grpId="0" nodeType="afterEffect">
+                                  <p:stCondLst>
+                                    <p:cond delay="0"/>
+                                  </p:stCondLst>
+                                  <p:childTnLst>
+                                    <p:set>
+                                      <p:cBhvr>
+                                        <p:cTn id="10" dur="1" fill="hold">
+                                          <p:stCondLst>
+                                            <p:cond delay="0"/>
+                                          </p:stCondLst>
+                                        </p:cTn>
+                                        <p:tgtEl>
+                                          <p:spTgt spid="5"/>
+                                        </p:tgtEl>
+                                        <p:attrNameLst>
+                                          <p:attrName>style.visibility</p:attrName>
+                                        </p:attrNameLst>
+                                      </p:cBhvr>
+                                      <p:to>
+                                        <p:strVal val="visible"/>
+                                      </p:to>
+                                    </p:set>
+                                    <p:animEffect transition="in" filter="wipe(left)">
+                                      <p:cBhvr>
+                                        <p:cTn id="11" dur="500"/>
+                                        <p:tgtEl>
+                                          <p:spTgt spid="5"/>
+                                        </p:tgtEl>
+                                      </p:cBhvr>
+                                    </p:animEffect>
+                                  </p:childTnLst>
+                                </p:cTn>
+                              </p:par>
+                            </p:childTnLst>
+                          </p:cTn>
+                        </p:par>
+                        <p:par>
+                          <p:cTn id="12" fill="hold">
+                            <p:stCondLst>
+                              <p:cond delay="1000"/>
+                            </p:stCondLst>
+                            <p:childTnLst>
+                              <p:par>
+                                <p:cTn id="13" presetID="22" presetClass="entr" presetSubtype="8" fill="hold" grpId="0" nodeType="afterEffect">
+                                  <p:stCondLst>
+                                    <p:cond delay="0"/>
+                                  </p:stCondLst>
+                                  <p:childTnLst>
+                                    <p:set>
+                                      <p:cBhvr>
+                                        <p:cTn id="14" dur="1" fill="hold">
+                                          <p:stCondLst>
+                                            <p:cond delay="0"/>
+                                          </p:stCondLst>
+                                        </p:cTn>
+                                        <p:tgtEl>
+                                          <p:spTgt spid="4"/>
+                                        </p:tgtEl>
+                                        <p:attrNameLst>
+                                          <p:attrName>style.visibility</p:attrName>
+                                        </p:attrNameLst>
+                                      </p:cBhvr>
+                                      <p:to>
+                                        <p:strVal val="visible"/>
+                                      </p:to>
+                                    </p:set>
+                                    <p:animEffect transition="in" filter="wipe(left)">
+                                      <p:cBhvr>
+                                        <p:cTn id="15" dur="500"/>
+                                        <p:tgtEl>
+                                          <p:spTgt spid="4"/>
+                                        </p:tgtEl>
+                                      </p:cBhvr>
+                                    </p:animEffect>
+                                  </p:childTnLst>
+                                </p:cTn>
+                              </p:par>
+                            </p:childTnLst>
+                          </p:cTn>
+                        </p:par>
+                        <p:par>
+                          <p:cTn id="16" fill="hold">
+                            <p:stCondLst>
+                              <p:cond delay="1500"/>
+                            </p:stCondLst>
+                            <p:childTnLst>
+                              <p:par>
+                                <p:cTn id="17" presetID="22" presetClass="entr" presetSubtype="8" fill="hold" grpId="0" nodeType="afterEffect">
+                                  <p:stCondLst>
+                                    <p:cond delay="0"/>
+                                  </p:stCondLst>
+                                  <p:childTnLst>
+                                    <p:set>
+                                      <p:cBhvr>
+                                        <p:cTn id="18" dur="1" fill="hold">
+                                          <p:stCondLst>
+                                            <p:cond delay="0"/>
+                                          </p:stCondLst>
+                                        </p:cTn>
+                                        <p:tgtEl>
+                                          <p:spTgt spid="6"/>
+                                        </p:tgtEl>
+                                        <p:attrNameLst>
+                                          <p:attrName>style.visibility</p:attrName>
+                                        </p:attrNameLst>
+                                      </p:cBhvr>
+                                      <p:to>
+                                        <p:strVal val="visible"/>
+                                      </p:to>
+                                    </p:set>
+                                    <p:animEffect transition="in" filter="wipe(left)">
+                                      <p:cBhvr>
+                                        <p:cTn id="19" dur="500"/>
+                                        <p:tgtEl>
+                                          <p:spTgt spid="6"/>
+                                        </p:tgtEl>
+                                      </p:cBhvr>
+                                    </p:animEffect>
+                                  </p:childTnLst>
+                                </p:cTn>
+                              </p:par>
+                            </p:childTnLst>
+                          </p:cTn>
+                        </p:par>
+                      </p:childTnLst>
+                    </p:cTn>
+                  </p:par>
+                </p:childTnLst>
+              </p:cTn>
+              <p:prevCondLst>
+                <p:cond evt="onPrev" delay="0">
+                  <p:tgtEl>
+                    <p:sldTgt/>
+                  </p:tgtEl>
+                </p:cond>
+              </p:prevCondLst>
+              <p:nextCondLst>
+                <p:cond evt="onNext" delay="0">
+                  <p:tgtEl>
+                    <p:sldTgt/>
+                  </p:tgtEl>
+                </p:cond>
+              </p:nextCondLst>
+            </p:seq>
+          </p:childTnLst>
+        </p:cTn>
+      </p:par>
+    </p:tnLst>
+    <p:bldLst>
+      <p:bldP spid="7" grpId="0"/>
+      <p:bldP spid="4" grpId="0"/>
+      <p:bldP spid="5" grpId="0"/>
+      <p:bldP spid="6" grpId="0"/>
+    </p:bldLst>
+  </p:timing>
 </p:sld>
 </file>
 
@@ -18097,10 +20150,1719 @@
   <p:clrMapOvr>
     <a:masterClrMapping/>
   </p:clrMapOvr>
+  <p:timing>
+    <p:tnLst>
+      <p:par>
+        <p:cTn id="1" dur="indefinite" restart="never" nodeType="tmRoot">
+          <p:childTnLst>
+            <p:seq concurrent="1" nextAc="seek">
+              <p:cTn id="2" dur="indefinite" nodeType="mainSeq">
+                <p:childTnLst>
+                  <p:par>
+                    <p:cTn id="3" fill="hold">
+                      <p:stCondLst>
+                        <p:cond delay="indefinite"/>
+                        <p:cond evt="onBegin" delay="0">
+                          <p:tn val="2"/>
+                        </p:cond>
+                      </p:stCondLst>
+                      <p:childTnLst>
+                        <p:par>
+                          <p:cTn id="4" fill="hold">
+                            <p:stCondLst>
+                              <p:cond delay="0"/>
+                            </p:stCondLst>
+                            <p:childTnLst>
+                              <p:par>
+                                <p:cTn id="5" presetID="22" presetClass="entr" presetSubtype="8" fill="hold" grpId="0" nodeType="withEffect">
+                                  <p:stCondLst>
+                                    <p:cond delay="0"/>
+                                  </p:stCondLst>
+                                  <p:childTnLst>
+                                    <p:set>
+                                      <p:cBhvr>
+                                        <p:cTn id="6" dur="1" fill="hold">
+                                          <p:stCondLst>
+                                            <p:cond delay="0"/>
+                                          </p:stCondLst>
+                                        </p:cTn>
+                                        <p:tgtEl>
+                                          <p:spTgt spid="6"/>
+                                        </p:tgtEl>
+                                        <p:attrNameLst>
+                                          <p:attrName>style.visibility</p:attrName>
+                                        </p:attrNameLst>
+                                      </p:cBhvr>
+                                      <p:to>
+                                        <p:strVal val="visible"/>
+                                      </p:to>
+                                    </p:set>
+                                    <p:animEffect transition="in" filter="wipe(left)">
+                                      <p:cBhvr>
+                                        <p:cTn id="7" dur="500"/>
+                                        <p:tgtEl>
+                                          <p:spTgt spid="6"/>
+                                        </p:tgtEl>
+                                      </p:cBhvr>
+                                    </p:animEffect>
+                                  </p:childTnLst>
+                                </p:cTn>
+                              </p:par>
+                            </p:childTnLst>
+                          </p:cTn>
+                        </p:par>
+                        <p:par>
+                          <p:cTn id="8" fill="hold">
+                            <p:stCondLst>
+                              <p:cond delay="500"/>
+                            </p:stCondLst>
+                            <p:childTnLst>
+                              <p:par>
+                                <p:cTn id="9" presetID="22" presetClass="entr" presetSubtype="8" fill="hold" grpId="0" nodeType="afterEffect">
+                                  <p:stCondLst>
+                                    <p:cond delay="0"/>
+                                  </p:stCondLst>
+                                  <p:childTnLst>
+                                    <p:set>
+                                      <p:cBhvr>
+                                        <p:cTn id="10" dur="1" fill="hold">
+                                          <p:stCondLst>
+                                            <p:cond delay="0"/>
+                                          </p:stCondLst>
+                                        </p:cTn>
+                                        <p:tgtEl>
+                                          <p:spTgt spid="3"/>
+                                        </p:tgtEl>
+                                        <p:attrNameLst>
+                                          <p:attrName>style.visibility</p:attrName>
+                                        </p:attrNameLst>
+                                      </p:cBhvr>
+                                      <p:to>
+                                        <p:strVal val="visible"/>
+                                      </p:to>
+                                    </p:set>
+                                    <p:animEffect transition="in" filter="wipe(left)">
+                                      <p:cBhvr>
+                                        <p:cTn id="11" dur="500"/>
+                                        <p:tgtEl>
+                                          <p:spTgt spid="3"/>
+                                        </p:tgtEl>
+                                      </p:cBhvr>
+                                    </p:animEffect>
+                                  </p:childTnLst>
+                                </p:cTn>
+                              </p:par>
+                            </p:childTnLst>
+                          </p:cTn>
+                        </p:par>
+                        <p:par>
+                          <p:cTn id="12" fill="hold">
+                            <p:stCondLst>
+                              <p:cond delay="1000"/>
+                            </p:stCondLst>
+                            <p:childTnLst>
+                              <p:par>
+                                <p:cTn id="13" presetID="22" presetClass="entr" presetSubtype="8" fill="hold" grpId="0" nodeType="afterEffect">
+                                  <p:stCondLst>
+                                    <p:cond delay="0"/>
+                                  </p:stCondLst>
+                                  <p:childTnLst>
+                                    <p:set>
+                                      <p:cBhvr>
+                                        <p:cTn id="14" dur="1" fill="hold">
+                                          <p:stCondLst>
+                                            <p:cond delay="0"/>
+                                          </p:stCondLst>
+                                        </p:cTn>
+                                        <p:tgtEl>
+                                          <p:spTgt spid="4"/>
+                                        </p:tgtEl>
+                                        <p:attrNameLst>
+                                          <p:attrName>style.visibility</p:attrName>
+                                        </p:attrNameLst>
+                                      </p:cBhvr>
+                                      <p:to>
+                                        <p:strVal val="visible"/>
+                                      </p:to>
+                                    </p:set>
+                                    <p:animEffect transition="in" filter="wipe(left)">
+                                      <p:cBhvr>
+                                        <p:cTn id="15" dur="500"/>
+                                        <p:tgtEl>
+                                          <p:spTgt spid="4"/>
+                                        </p:tgtEl>
+                                      </p:cBhvr>
+                                    </p:animEffect>
+                                  </p:childTnLst>
+                                </p:cTn>
+                              </p:par>
+                            </p:childTnLst>
+                          </p:cTn>
+                        </p:par>
+                        <p:par>
+                          <p:cTn id="16" fill="hold">
+                            <p:stCondLst>
+                              <p:cond delay="1500"/>
+                            </p:stCondLst>
+                            <p:childTnLst>
+                              <p:par>
+                                <p:cTn id="17" presetID="22" presetClass="entr" presetSubtype="8" fill="hold" grpId="0" nodeType="afterEffect">
+                                  <p:stCondLst>
+                                    <p:cond delay="0"/>
+                                  </p:stCondLst>
+                                  <p:childTnLst>
+                                    <p:set>
+                                      <p:cBhvr>
+                                        <p:cTn id="18" dur="1" fill="hold">
+                                          <p:stCondLst>
+                                            <p:cond delay="0"/>
+                                          </p:stCondLst>
+                                        </p:cTn>
+                                        <p:tgtEl>
+                                          <p:spTgt spid="8"/>
+                                        </p:tgtEl>
+                                        <p:attrNameLst>
+                                          <p:attrName>style.visibility</p:attrName>
+                                        </p:attrNameLst>
+                                      </p:cBhvr>
+                                      <p:to>
+                                        <p:strVal val="visible"/>
+                                      </p:to>
+                                    </p:set>
+                                    <p:animEffect transition="in" filter="wipe(left)">
+                                      <p:cBhvr>
+                                        <p:cTn id="19" dur="500"/>
+                                        <p:tgtEl>
+                                          <p:spTgt spid="8"/>
+                                        </p:tgtEl>
+                                      </p:cBhvr>
+                                    </p:animEffect>
+                                  </p:childTnLst>
+                                </p:cTn>
+                              </p:par>
+                            </p:childTnLst>
+                          </p:cTn>
+                        </p:par>
+                      </p:childTnLst>
+                    </p:cTn>
+                  </p:par>
+                </p:childTnLst>
+              </p:cTn>
+              <p:prevCondLst>
+                <p:cond evt="onPrev" delay="0">
+                  <p:tgtEl>
+                    <p:sldTgt/>
+                  </p:tgtEl>
+                </p:cond>
+              </p:prevCondLst>
+              <p:nextCondLst>
+                <p:cond evt="onNext" delay="0">
+                  <p:tgtEl>
+                    <p:sldTgt/>
+                  </p:tgtEl>
+                </p:cond>
+              </p:nextCondLst>
+            </p:seq>
+          </p:childTnLst>
+        </p:cTn>
+      </p:par>
+    </p:tnLst>
+    <p:bldLst>
+      <p:bldP spid="6" grpId="0"/>
+      <p:bldP spid="3" grpId="0"/>
+      <p:bldP spid="8" grpId="0"/>
+      <p:bldP spid="4" grpId="0"/>
+    </p:bldLst>
+  </p:timing>
 </p:sld>
 </file>
 
 <file path=ppt/slides/slide28.xml><?xml version="1.0" encoding="utf-8"?>
+<p:sld xmlns:a="http://schemas.openxmlformats.org/drawingml/2006/main" xmlns:r="http://schemas.openxmlformats.org/officeDocument/2006/relationships" xmlns:p="http://schemas.openxmlformats.org/presentationml/2006/main">
+  <p:cSld>
+    <p:spTree>
+      <p:nvGrpSpPr>
+        <p:cNvPr id="1" name="">
+          <a:extLst>
+            <a:ext uri="{FF2B5EF4-FFF2-40B4-BE49-F238E27FC236}">
+              <a16:creationId xmlns:a16="http://schemas.microsoft.com/office/drawing/2014/main" id="{80A69E1A-A6D1-CDB7-05AC-6759C054E262}"/>
+            </a:ext>
+          </a:extLst>
+        </p:cNvPr>
+        <p:cNvGrpSpPr/>
+        <p:nvPr/>
+      </p:nvGrpSpPr>
+      <p:grpSpPr>
+        <a:xfrm>
+          <a:off x="0" y="0"/>
+          <a:ext cx="0" cy="0"/>
+          <a:chOff x="0" y="0"/>
+          <a:chExt cx="0" cy="0"/>
+        </a:xfrm>
+      </p:grpSpPr>
+      <p:sp>
+        <p:nvSpPr>
+          <p:cNvPr id="2" name="TextBox 1">
+            <a:extLst>
+              <a:ext uri="{FF2B5EF4-FFF2-40B4-BE49-F238E27FC236}">
+                <a16:creationId xmlns:a16="http://schemas.microsoft.com/office/drawing/2014/main" id="{121F26FD-76DB-0767-DB60-52F34FAFCD88}"/>
+              </a:ext>
+            </a:extLst>
+          </p:cNvPr>
+          <p:cNvSpPr txBox="1"/>
+          <p:nvPr/>
+        </p:nvSpPr>
+        <p:spPr>
+          <a:xfrm>
+            <a:off x="10992196" y="0"/>
+            <a:ext cx="1199804" cy="369332"/>
+          </a:xfrm>
+          <a:prstGeom prst="rect">
+            <a:avLst/>
+          </a:prstGeom>
+          <a:noFill/>
+        </p:spPr>
+        <p:txBody>
+          <a:bodyPr wrap="square">
+            <a:spAutoFit/>
+          </a:bodyPr>
+          <a:lstStyle/>
+          <a:p>
+            <a:r>
+              <a:rPr lang="en-US" dirty="0">
+                <a:latin typeface="Berlin Sans FB" panose="020E0602020502020306" pitchFamily="34" charset="0"/>
+              </a:rPr>
+              <a:t>Buda Tech</a:t>
+            </a:r>
+          </a:p>
+        </p:txBody>
+      </p:sp>
+      <p:sp>
+        <p:nvSpPr>
+          <p:cNvPr id="6" name="Rectangle 5">
+            <a:extLst>
+              <a:ext uri="{FF2B5EF4-FFF2-40B4-BE49-F238E27FC236}">
+                <a16:creationId xmlns:a16="http://schemas.microsoft.com/office/drawing/2014/main" id="{AE943998-D983-2B39-675E-5254D5E63C4A}"/>
+              </a:ext>
+            </a:extLst>
+          </p:cNvPr>
+          <p:cNvSpPr/>
+          <p:nvPr/>
+        </p:nvSpPr>
+        <p:spPr>
+          <a:xfrm>
+            <a:off x="3711389" y="955614"/>
+            <a:ext cx="914400" cy="914400"/>
+          </a:xfrm>
+          <a:prstGeom prst="rect">
+            <a:avLst/>
+          </a:prstGeom>
+          <a:solidFill>
+            <a:srgbClr val="FF0000"/>
+          </a:solidFill>
+          <a:ln w="28575">
+            <a:solidFill>
+              <a:srgbClr val="FF0000"/>
+            </a:solidFill>
+          </a:ln>
+        </p:spPr>
+        <p:style>
+          <a:lnRef idx="2">
+            <a:schemeClr val="accent1">
+              <a:shade val="15000"/>
+            </a:schemeClr>
+          </a:lnRef>
+          <a:fillRef idx="1">
+            <a:schemeClr val="accent1"/>
+          </a:fillRef>
+          <a:effectRef idx="0">
+            <a:schemeClr val="accent1"/>
+          </a:effectRef>
+          <a:fontRef idx="minor">
+            <a:schemeClr val="lt1"/>
+          </a:fontRef>
+        </p:style>
+        <p:txBody>
+          <a:bodyPr rtlCol="0" anchor="ctr"/>
+          <a:lstStyle/>
+          <a:p>
+            <a:pPr algn="ctr"/>
+            <a:endParaRPr lang="en-US"/>
+          </a:p>
+        </p:txBody>
+      </p:sp>
+      <p:sp>
+        <p:nvSpPr>
+          <p:cNvPr id="7" name="Rectangle 6">
+            <a:extLst>
+              <a:ext uri="{FF2B5EF4-FFF2-40B4-BE49-F238E27FC236}">
+                <a16:creationId xmlns:a16="http://schemas.microsoft.com/office/drawing/2014/main" id="{C2CC4213-E27D-5CD9-AFF3-40A7DE6CF148}"/>
+              </a:ext>
+            </a:extLst>
+          </p:cNvPr>
+          <p:cNvSpPr/>
+          <p:nvPr/>
+        </p:nvSpPr>
+        <p:spPr>
+          <a:xfrm>
+            <a:off x="7803777" y="955614"/>
+            <a:ext cx="914400" cy="914400"/>
+          </a:xfrm>
+          <a:prstGeom prst="rect">
+            <a:avLst/>
+          </a:prstGeom>
+          <a:solidFill>
+            <a:srgbClr val="FF0000"/>
+          </a:solidFill>
+          <a:ln w="28575">
+            <a:solidFill>
+              <a:srgbClr val="FF0000"/>
+            </a:solidFill>
+          </a:ln>
+        </p:spPr>
+        <p:style>
+          <a:lnRef idx="2">
+            <a:schemeClr val="accent1">
+              <a:shade val="15000"/>
+            </a:schemeClr>
+          </a:lnRef>
+          <a:fillRef idx="1">
+            <a:schemeClr val="accent1"/>
+          </a:fillRef>
+          <a:effectRef idx="0">
+            <a:schemeClr val="accent1"/>
+          </a:effectRef>
+          <a:fontRef idx="minor">
+            <a:schemeClr val="lt1"/>
+          </a:fontRef>
+        </p:style>
+        <p:txBody>
+          <a:bodyPr rtlCol="0" anchor="ctr"/>
+          <a:lstStyle/>
+          <a:p>
+            <a:pPr algn="ctr"/>
+            <a:endParaRPr lang="en-US"/>
+          </a:p>
+        </p:txBody>
+      </p:sp>
+      <p:sp>
+        <p:nvSpPr>
+          <p:cNvPr id="8" name="Rectangle 7">
+            <a:extLst>
+              <a:ext uri="{FF2B5EF4-FFF2-40B4-BE49-F238E27FC236}">
+                <a16:creationId xmlns:a16="http://schemas.microsoft.com/office/drawing/2014/main" id="{1EA135F5-12C7-8177-30ED-44C063504140}"/>
+              </a:ext>
+            </a:extLst>
+          </p:cNvPr>
+          <p:cNvSpPr/>
+          <p:nvPr/>
+        </p:nvSpPr>
+        <p:spPr>
+          <a:xfrm>
+            <a:off x="5757583" y="955614"/>
+            <a:ext cx="914400" cy="914400"/>
+          </a:xfrm>
+          <a:prstGeom prst="rect">
+            <a:avLst/>
+          </a:prstGeom>
+          <a:solidFill>
+            <a:srgbClr val="FF0000"/>
+          </a:solidFill>
+          <a:ln w="28575">
+            <a:solidFill>
+              <a:srgbClr val="FF0000"/>
+            </a:solidFill>
+          </a:ln>
+        </p:spPr>
+        <p:style>
+          <a:lnRef idx="2">
+            <a:schemeClr val="accent1">
+              <a:shade val="15000"/>
+            </a:schemeClr>
+          </a:lnRef>
+          <a:fillRef idx="1">
+            <a:schemeClr val="accent1"/>
+          </a:fillRef>
+          <a:effectRef idx="0">
+            <a:schemeClr val="accent1"/>
+          </a:effectRef>
+          <a:fontRef idx="minor">
+            <a:schemeClr val="lt1"/>
+          </a:fontRef>
+        </p:style>
+        <p:txBody>
+          <a:bodyPr rtlCol="0" anchor="ctr"/>
+          <a:lstStyle/>
+          <a:p>
+            <a:pPr algn="ctr"/>
+            <a:endParaRPr lang="en-US"/>
+          </a:p>
+        </p:txBody>
+      </p:sp>
+      <p:cxnSp>
+        <p:nvCxnSpPr>
+          <p:cNvPr id="9" name="Straight Arrow Connector 8">
+            <a:extLst>
+              <a:ext uri="{FF2B5EF4-FFF2-40B4-BE49-F238E27FC236}">
+                <a16:creationId xmlns:a16="http://schemas.microsoft.com/office/drawing/2014/main" id="{8FDB617A-2248-4283-BA79-B8C949D9F492}"/>
+              </a:ext>
+            </a:extLst>
+          </p:cNvPr>
+          <p:cNvCxnSpPr>
+            <a:cxnSpLocks/>
+          </p:cNvCxnSpPr>
+          <p:nvPr/>
+        </p:nvCxnSpPr>
+        <p:spPr>
+          <a:xfrm>
+            <a:off x="8718177" y="1426261"/>
+            <a:ext cx="1730188" cy="0"/>
+          </a:xfrm>
+          <a:prstGeom prst="straightConnector1">
+            <a:avLst/>
+          </a:prstGeom>
+          <a:ln w="57150">
+            <a:solidFill>
+              <a:srgbClr val="FF0000"/>
+            </a:solidFill>
+            <a:tailEnd type="triangle"/>
+          </a:ln>
+        </p:spPr>
+        <p:style>
+          <a:lnRef idx="1">
+            <a:schemeClr val="accent2"/>
+          </a:lnRef>
+          <a:fillRef idx="0">
+            <a:schemeClr val="accent2"/>
+          </a:fillRef>
+          <a:effectRef idx="0">
+            <a:schemeClr val="accent2"/>
+          </a:effectRef>
+          <a:fontRef idx="minor">
+            <a:schemeClr val="tx1"/>
+          </a:fontRef>
+        </p:style>
+      </p:cxnSp>
+      <p:cxnSp>
+        <p:nvCxnSpPr>
+          <p:cNvPr id="10" name="Straight Arrow Connector 9">
+            <a:extLst>
+              <a:ext uri="{FF2B5EF4-FFF2-40B4-BE49-F238E27FC236}">
+                <a16:creationId xmlns:a16="http://schemas.microsoft.com/office/drawing/2014/main" id="{8DEFA069-CC21-2E77-C840-BDF80F71FC06}"/>
+              </a:ext>
+            </a:extLst>
+          </p:cNvPr>
+          <p:cNvCxnSpPr>
+            <a:cxnSpLocks/>
+          </p:cNvCxnSpPr>
+          <p:nvPr/>
+        </p:nvCxnSpPr>
+        <p:spPr>
+          <a:xfrm>
+            <a:off x="1981201" y="1426261"/>
+            <a:ext cx="1730188" cy="0"/>
+          </a:xfrm>
+          <a:prstGeom prst="straightConnector1">
+            <a:avLst/>
+          </a:prstGeom>
+          <a:ln w="57150">
+            <a:solidFill>
+              <a:srgbClr val="FF0000"/>
+            </a:solidFill>
+            <a:tailEnd type="triangle"/>
+          </a:ln>
+        </p:spPr>
+        <p:style>
+          <a:lnRef idx="1">
+            <a:schemeClr val="accent2"/>
+          </a:lnRef>
+          <a:fillRef idx="0">
+            <a:schemeClr val="accent2"/>
+          </a:fillRef>
+          <a:effectRef idx="0">
+            <a:schemeClr val="accent2"/>
+          </a:effectRef>
+          <a:fontRef idx="minor">
+            <a:schemeClr val="tx1"/>
+          </a:fontRef>
+        </p:style>
+      </p:cxnSp>
+      <p:cxnSp>
+        <p:nvCxnSpPr>
+          <p:cNvPr id="11" name="Straight Arrow Connector 10">
+            <a:extLst>
+              <a:ext uri="{FF2B5EF4-FFF2-40B4-BE49-F238E27FC236}">
+                <a16:creationId xmlns:a16="http://schemas.microsoft.com/office/drawing/2014/main" id="{F5B2A338-A939-2C4C-B71E-F46ED1156E07}"/>
+              </a:ext>
+            </a:extLst>
+          </p:cNvPr>
+          <p:cNvCxnSpPr>
+            <a:cxnSpLocks/>
+          </p:cNvCxnSpPr>
+          <p:nvPr/>
+        </p:nvCxnSpPr>
+        <p:spPr>
+          <a:xfrm>
+            <a:off x="4365812" y="1390402"/>
+            <a:ext cx="1730188" cy="0"/>
+          </a:xfrm>
+          <a:prstGeom prst="straightConnector1">
+            <a:avLst/>
+          </a:prstGeom>
+          <a:ln w="57150">
+            <a:solidFill>
+              <a:srgbClr val="FF0000"/>
+            </a:solidFill>
+            <a:tailEnd type="triangle"/>
+          </a:ln>
+        </p:spPr>
+        <p:style>
+          <a:lnRef idx="1">
+            <a:schemeClr val="accent2"/>
+          </a:lnRef>
+          <a:fillRef idx="0">
+            <a:schemeClr val="accent2"/>
+          </a:fillRef>
+          <a:effectRef idx="0">
+            <a:schemeClr val="accent2"/>
+          </a:effectRef>
+          <a:fontRef idx="minor">
+            <a:schemeClr val="tx1"/>
+          </a:fontRef>
+        </p:style>
+      </p:cxnSp>
+      <p:cxnSp>
+        <p:nvCxnSpPr>
+          <p:cNvPr id="12" name="Straight Arrow Connector 11">
+            <a:extLst>
+              <a:ext uri="{FF2B5EF4-FFF2-40B4-BE49-F238E27FC236}">
+                <a16:creationId xmlns:a16="http://schemas.microsoft.com/office/drawing/2014/main" id="{F290EE0D-E1AE-8E09-42C8-CA5A451A5995}"/>
+              </a:ext>
+            </a:extLst>
+          </p:cNvPr>
+          <p:cNvCxnSpPr>
+            <a:cxnSpLocks/>
+          </p:cNvCxnSpPr>
+          <p:nvPr/>
+        </p:nvCxnSpPr>
+        <p:spPr>
+          <a:xfrm>
+            <a:off x="6671983" y="1399366"/>
+            <a:ext cx="1730188" cy="0"/>
+          </a:xfrm>
+          <a:prstGeom prst="straightConnector1">
+            <a:avLst/>
+          </a:prstGeom>
+          <a:ln w="57150">
+            <a:solidFill>
+              <a:srgbClr val="FF0000"/>
+            </a:solidFill>
+            <a:tailEnd type="triangle"/>
+          </a:ln>
+        </p:spPr>
+        <p:style>
+          <a:lnRef idx="1">
+            <a:schemeClr val="accent2"/>
+          </a:lnRef>
+          <a:fillRef idx="0">
+            <a:schemeClr val="accent2"/>
+          </a:fillRef>
+          <a:effectRef idx="0">
+            <a:schemeClr val="accent2"/>
+          </a:effectRef>
+          <a:fontRef idx="minor">
+            <a:schemeClr val="tx1"/>
+          </a:fontRef>
+        </p:style>
+      </p:cxnSp>
+      <p:sp>
+        <p:nvSpPr>
+          <p:cNvPr id="13" name="TextBox 12">
+            <a:extLst>
+              <a:ext uri="{FF2B5EF4-FFF2-40B4-BE49-F238E27FC236}">
+                <a16:creationId xmlns:a16="http://schemas.microsoft.com/office/drawing/2014/main" id="{5687DE45-5B3D-73F4-92D2-5C93434142C9}"/>
+              </a:ext>
+            </a:extLst>
+          </p:cNvPr>
+          <p:cNvSpPr txBox="1"/>
+          <p:nvPr/>
+        </p:nvSpPr>
+        <p:spPr>
+          <a:xfrm>
+            <a:off x="3509683" y="1861050"/>
+            <a:ext cx="1308845" cy="646331"/>
+          </a:xfrm>
+          <a:prstGeom prst="rect">
+            <a:avLst/>
+          </a:prstGeom>
+          <a:noFill/>
+        </p:spPr>
+        <p:txBody>
+          <a:bodyPr wrap="square" rtlCol="0">
+            <a:spAutoFit/>
+          </a:bodyPr>
+          <a:lstStyle/>
+          <a:p>
+            <a:r>
+              <a:rPr lang="en-US" sz="3600" dirty="0">
+                <a:latin typeface="Cambria" panose="02040503050406030204" pitchFamily="18" charset="0"/>
+                <a:ea typeface="Cambria" panose="02040503050406030204" pitchFamily="18" charset="0"/>
+              </a:rPr>
+              <a:t>G1=5</a:t>
+            </a:r>
+          </a:p>
+        </p:txBody>
+      </p:sp>
+      <p:sp>
+        <p:nvSpPr>
+          <p:cNvPr id="14" name="TextBox 13">
+            <a:extLst>
+              <a:ext uri="{FF2B5EF4-FFF2-40B4-BE49-F238E27FC236}">
+                <a16:creationId xmlns:a16="http://schemas.microsoft.com/office/drawing/2014/main" id="{BA23B706-4814-0D80-9D4F-F08DF22DAC15}"/>
+              </a:ext>
+            </a:extLst>
+          </p:cNvPr>
+          <p:cNvSpPr txBox="1"/>
+          <p:nvPr/>
+        </p:nvSpPr>
+        <p:spPr>
+          <a:xfrm>
+            <a:off x="5753100" y="1865532"/>
+            <a:ext cx="1544172" cy="646331"/>
+          </a:xfrm>
+          <a:prstGeom prst="rect">
+            <a:avLst/>
+          </a:prstGeom>
+          <a:noFill/>
+        </p:spPr>
+        <p:txBody>
+          <a:bodyPr wrap="square" rtlCol="0">
+            <a:spAutoFit/>
+          </a:bodyPr>
+          <a:lstStyle/>
+          <a:p>
+            <a:r>
+              <a:rPr lang="en-US" sz="3600" dirty="0">
+                <a:latin typeface="Cambria" panose="02040503050406030204" pitchFamily="18" charset="0"/>
+                <a:ea typeface="Cambria" panose="02040503050406030204" pitchFamily="18" charset="0"/>
+              </a:rPr>
+              <a:t>G2=2</a:t>
+            </a:r>
+          </a:p>
+        </p:txBody>
+      </p:sp>
+      <p:sp>
+        <p:nvSpPr>
+          <p:cNvPr id="15" name="TextBox 14">
+            <a:extLst>
+              <a:ext uri="{FF2B5EF4-FFF2-40B4-BE49-F238E27FC236}">
+                <a16:creationId xmlns:a16="http://schemas.microsoft.com/office/drawing/2014/main" id="{27877252-C3E4-94EF-19C9-AF3EAE92F6D1}"/>
+              </a:ext>
+            </a:extLst>
+          </p:cNvPr>
+          <p:cNvSpPr txBox="1"/>
+          <p:nvPr/>
+        </p:nvSpPr>
+        <p:spPr>
+          <a:xfrm>
+            <a:off x="7844118" y="1843119"/>
+            <a:ext cx="1730188" cy="646331"/>
+          </a:xfrm>
+          <a:prstGeom prst="rect">
+            <a:avLst/>
+          </a:prstGeom>
+          <a:noFill/>
+        </p:spPr>
+        <p:txBody>
+          <a:bodyPr wrap="square" rtlCol="0">
+            <a:spAutoFit/>
+          </a:bodyPr>
+          <a:lstStyle/>
+          <a:p>
+            <a:r>
+              <a:rPr lang="en-US" sz="3600" dirty="0">
+                <a:latin typeface="Cambria" panose="02040503050406030204" pitchFamily="18" charset="0"/>
+                <a:ea typeface="Cambria" panose="02040503050406030204" pitchFamily="18" charset="0"/>
+              </a:rPr>
+              <a:t>G3=17</a:t>
+            </a:r>
+          </a:p>
+        </p:txBody>
+      </p:sp>
+      <p:sp>
+        <p:nvSpPr>
+          <p:cNvPr id="16" name="TextBox 15">
+            <a:extLst>
+              <a:ext uri="{FF2B5EF4-FFF2-40B4-BE49-F238E27FC236}">
+                <a16:creationId xmlns:a16="http://schemas.microsoft.com/office/drawing/2014/main" id="{1D60FB03-BFE0-1867-68C4-1209906784A2}"/>
+              </a:ext>
+            </a:extLst>
+          </p:cNvPr>
+          <p:cNvSpPr txBox="1"/>
+          <p:nvPr/>
+        </p:nvSpPr>
+        <p:spPr>
+          <a:xfrm>
+            <a:off x="766482" y="779930"/>
+            <a:ext cx="3402107" cy="646331"/>
+          </a:xfrm>
+          <a:prstGeom prst="rect">
+            <a:avLst/>
+          </a:prstGeom>
+          <a:noFill/>
+        </p:spPr>
+        <p:txBody>
+          <a:bodyPr wrap="square" rtlCol="0">
+            <a:spAutoFit/>
+          </a:bodyPr>
+          <a:lstStyle/>
+          <a:p>
+            <a:r>
+              <a:rPr lang="en-US" sz="3600" dirty="0">
+                <a:latin typeface="Cambria" panose="02040503050406030204" pitchFamily="18" charset="0"/>
+                <a:ea typeface="Cambria" panose="02040503050406030204" pitchFamily="18" charset="0"/>
+              </a:rPr>
+              <a:t>Pin= 40mW</a:t>
+            </a:r>
+          </a:p>
+        </p:txBody>
+      </p:sp>
+      <p:sp>
+        <p:nvSpPr>
+          <p:cNvPr id="3" name="TextBox 2">
+            <a:extLst>
+              <a:ext uri="{FF2B5EF4-FFF2-40B4-BE49-F238E27FC236}">
+                <a16:creationId xmlns:a16="http://schemas.microsoft.com/office/drawing/2014/main" id="{3EE0598F-DE71-C090-6CE1-B047B543A3CC}"/>
+              </a:ext>
+            </a:extLst>
+          </p:cNvPr>
+          <p:cNvSpPr txBox="1"/>
+          <p:nvPr/>
+        </p:nvSpPr>
+        <p:spPr>
+          <a:xfrm>
+            <a:off x="723074" y="2942169"/>
+            <a:ext cx="10745852" cy="646331"/>
+          </a:xfrm>
+          <a:prstGeom prst="rect">
+            <a:avLst/>
+          </a:prstGeom>
+          <a:noFill/>
+        </p:spPr>
+        <p:txBody>
+          <a:bodyPr wrap="square" rtlCol="0">
+            <a:spAutoFit/>
+          </a:bodyPr>
+          <a:lstStyle/>
+          <a:p>
+            <a:r>
+              <a:rPr lang="en-US" sz="3600" dirty="0">
+                <a:latin typeface="Cambria" panose="02040503050406030204" pitchFamily="18" charset="0"/>
+                <a:ea typeface="Cambria" panose="02040503050406030204" pitchFamily="18" charset="0"/>
+              </a:rPr>
+              <a:t>Total gain = G1 x G2 x G3</a:t>
+            </a:r>
+          </a:p>
+        </p:txBody>
+      </p:sp>
+      <p:sp>
+        <p:nvSpPr>
+          <p:cNvPr id="5" name="TextBox 4">
+            <a:extLst>
+              <a:ext uri="{FF2B5EF4-FFF2-40B4-BE49-F238E27FC236}">
+                <a16:creationId xmlns:a16="http://schemas.microsoft.com/office/drawing/2014/main" id="{0D5BCAF5-CBFF-5375-3F5F-1079A924DD81}"/>
+              </a:ext>
+            </a:extLst>
+          </p:cNvPr>
+          <p:cNvSpPr txBox="1"/>
+          <p:nvPr/>
+        </p:nvSpPr>
+        <p:spPr>
+          <a:xfrm>
+            <a:off x="723074" y="3695640"/>
+            <a:ext cx="10745852" cy="646331"/>
+          </a:xfrm>
+          <a:prstGeom prst="rect">
+            <a:avLst/>
+          </a:prstGeom>
+          <a:noFill/>
+        </p:spPr>
+        <p:txBody>
+          <a:bodyPr wrap="square" rtlCol="0">
+            <a:spAutoFit/>
+          </a:bodyPr>
+          <a:lstStyle/>
+          <a:p>
+            <a:r>
+              <a:rPr lang="en-US" sz="3600" dirty="0">
+                <a:latin typeface="Cambria" panose="02040503050406030204" pitchFamily="18" charset="0"/>
+                <a:ea typeface="Cambria" panose="02040503050406030204" pitchFamily="18" charset="0"/>
+              </a:rPr>
+              <a:t>Total gain = 5 x 2 x 17 =170</a:t>
+            </a:r>
+          </a:p>
+        </p:txBody>
+      </p:sp>
+      <mc:AlternateContent xmlns:mc="http://schemas.openxmlformats.org/markup-compatibility/2006" xmlns:a14="http://schemas.microsoft.com/office/drawing/2010/main">
+        <mc:Choice Requires="a14">
+          <p:sp>
+            <p:nvSpPr>
+              <p:cNvPr id="4" name="TextBox 3">
+                <a:extLst>
+                  <a:ext uri="{FF2B5EF4-FFF2-40B4-BE49-F238E27FC236}">
+                    <a16:creationId xmlns:a16="http://schemas.microsoft.com/office/drawing/2014/main" id="{9EA341D3-14C1-6819-4EE0-B95933D88D52}"/>
+                  </a:ext>
+                </a:extLst>
+              </p:cNvPr>
+              <p:cNvSpPr txBox="1"/>
+              <p:nvPr/>
+            </p:nvSpPr>
+            <p:spPr>
+              <a:xfrm>
+                <a:off x="7297272" y="3376955"/>
+                <a:ext cx="6118412" cy="879087"/>
+              </a:xfrm>
+              <a:prstGeom prst="rect">
+                <a:avLst/>
+              </a:prstGeom>
+              <a:noFill/>
+            </p:spPr>
+            <p:txBody>
+              <a:bodyPr wrap="square">
+                <a:spAutoFit/>
+              </a:bodyPr>
+              <a:lstStyle/>
+              <a:p>
+                <a14:m>
+                  <m:oMath xmlns:m="http://schemas.openxmlformats.org/officeDocument/2006/math">
+                    <m:f>
+                      <m:fPr>
+                        <m:ctrlPr>
+                          <a:rPr lang="en-US" sz="3600" i="1" smtClean="0">
+                            <a:latin typeface="Cambria Math" panose="02040503050406030204" pitchFamily="18" charset="0"/>
+                          </a:rPr>
+                        </m:ctrlPr>
+                      </m:fPr>
+                      <m:num>
+                        <m:r>
+                          <a:rPr lang="en-US" sz="3600" i="1">
+                            <a:latin typeface="Cambria Math" panose="02040503050406030204" pitchFamily="18" charset="0"/>
+                          </a:rPr>
+                          <m:t>𝑃</m:t>
+                        </m:r>
+                        <m:r>
+                          <a:rPr lang="en-US" sz="3600" b="0" i="1" smtClean="0">
+                            <a:latin typeface="Cambria Math" panose="02040503050406030204" pitchFamily="18" charset="0"/>
+                          </a:rPr>
+                          <m:t>𝑜𝑢𝑡</m:t>
+                        </m:r>
+                      </m:num>
+                      <m:den>
+                        <m:r>
+                          <a:rPr lang="en-US" sz="3600" b="0" i="1" smtClean="0">
+                            <a:latin typeface="Cambria Math" panose="02040503050406030204" pitchFamily="18" charset="0"/>
+                          </a:rPr>
+                          <m:t>𝑃</m:t>
+                        </m:r>
+                        <m:r>
+                          <a:rPr lang="en-US" sz="3600" b="0" i="1" smtClean="0">
+                            <a:latin typeface="Cambria Math" panose="02040503050406030204" pitchFamily="18" charset="0"/>
+                          </a:rPr>
+                          <m:t>.</m:t>
+                        </m:r>
+                        <m:r>
+                          <a:rPr lang="en-US" sz="3600" b="0" i="1" smtClean="0">
+                            <a:latin typeface="Cambria Math" panose="02040503050406030204" pitchFamily="18" charset="0"/>
+                          </a:rPr>
+                          <m:t>𝑖𝑛</m:t>
+                        </m:r>
+                      </m:den>
+                    </m:f>
+                  </m:oMath>
+                </a14:m>
+                <a:r>
+                  <a:rPr lang="en-US" sz="3600" dirty="0">
+                    <a:latin typeface="Cambria" panose="02040503050406030204" pitchFamily="18" charset="0"/>
+                    <a:ea typeface="Cambria" panose="02040503050406030204" pitchFamily="18" charset="0"/>
+                  </a:rPr>
+                  <a:t> = </a:t>
+                </a:r>
+                <a14:m>
+                  <m:oMath xmlns:m="http://schemas.openxmlformats.org/officeDocument/2006/math">
+                    <m:r>
+                      <a:rPr lang="en-US" sz="3600" b="0" i="1" smtClean="0">
+                        <a:latin typeface="Cambria Math" panose="02040503050406030204" pitchFamily="18" charset="0"/>
+                        <a:ea typeface="Cambria" panose="02040503050406030204" pitchFamily="18" charset="0"/>
+                      </a:rPr>
+                      <m:t>𝐺𝑎𝑖𝑛</m:t>
+                    </m:r>
+                  </m:oMath>
+                </a14:m>
+                <a:endParaRPr lang="en-US" sz="3600" dirty="0">
+                  <a:latin typeface="Cambria" panose="02040503050406030204" pitchFamily="18" charset="0"/>
+                  <a:ea typeface="Cambria" panose="02040503050406030204" pitchFamily="18" charset="0"/>
+                </a:endParaRPr>
+              </a:p>
+            </p:txBody>
+          </p:sp>
+        </mc:Choice>
+        <mc:Fallback xmlns="">
+          <p:sp>
+            <p:nvSpPr>
+              <p:cNvPr id="4" name="TextBox 3">
+                <a:extLst>
+                  <a:ext uri="{FF2B5EF4-FFF2-40B4-BE49-F238E27FC236}">
+                    <a16:creationId xmlns:a16="http://schemas.microsoft.com/office/drawing/2014/main" id="{9EA341D3-14C1-6819-4EE0-B95933D88D52}"/>
+                  </a:ext>
+                </a:extLst>
+              </p:cNvPr>
+              <p:cNvSpPr txBox="1">
+                <a:spLocks noRot="1" noChangeAspect="1" noMove="1" noResize="1" noEditPoints="1" noAdjustHandles="1" noChangeArrowheads="1" noChangeShapeType="1" noTextEdit="1"/>
+              </p:cNvSpPr>
+              <p:nvPr/>
+            </p:nvSpPr>
+            <p:spPr>
+              <a:xfrm>
+                <a:off x="7297272" y="3376955"/>
+                <a:ext cx="6118412" cy="879087"/>
+              </a:xfrm>
+              <a:prstGeom prst="rect">
+                <a:avLst/>
+              </a:prstGeom>
+              <a:blipFill>
+                <a:blip r:embed="rId2"/>
+                <a:stretch>
+                  <a:fillRect b="-11111"/>
+                </a:stretch>
+              </a:blipFill>
+            </p:spPr>
+            <p:txBody>
+              <a:bodyPr/>
+              <a:lstStyle/>
+              <a:p>
+                <a:r>
+                  <a:rPr lang="en-US">
+                    <a:noFill/>
+                  </a:rPr>
+                  <a:t> </a:t>
+                </a:r>
+              </a:p>
+            </p:txBody>
+          </p:sp>
+        </mc:Fallback>
+      </mc:AlternateContent>
+      <mc:AlternateContent xmlns:mc="http://schemas.openxmlformats.org/markup-compatibility/2006" xmlns:a14="http://schemas.microsoft.com/office/drawing/2010/main">
+        <mc:Choice Requires="a14">
+          <p:sp>
+            <p:nvSpPr>
+              <p:cNvPr id="17" name="TextBox 16">
+                <a:extLst>
+                  <a:ext uri="{FF2B5EF4-FFF2-40B4-BE49-F238E27FC236}">
+                    <a16:creationId xmlns:a16="http://schemas.microsoft.com/office/drawing/2014/main" id="{DE616BB5-3A6D-058D-7B84-B1A07492A8C8}"/>
+                  </a:ext>
+                </a:extLst>
+              </p:cNvPr>
+              <p:cNvSpPr txBox="1"/>
+              <p:nvPr/>
+            </p:nvSpPr>
+            <p:spPr>
+              <a:xfrm>
+                <a:off x="2693894" y="4549033"/>
+                <a:ext cx="6118412" cy="646331"/>
+              </a:xfrm>
+              <a:prstGeom prst="rect">
+                <a:avLst/>
+              </a:prstGeom>
+              <a:noFill/>
+            </p:spPr>
+            <p:txBody>
+              <a:bodyPr wrap="square">
+                <a:spAutoFit/>
+              </a:bodyPr>
+              <a:lstStyle/>
+              <a:p>
+                <a:pPr/>
+                <a14:m>
+                  <m:oMathPara xmlns:m="http://schemas.openxmlformats.org/officeDocument/2006/math">
+                    <m:oMathParaPr>
+                      <m:jc m:val="centerGroup"/>
+                    </m:oMathParaPr>
+                    <m:oMath xmlns:m="http://schemas.openxmlformats.org/officeDocument/2006/math">
+                      <m:r>
+                        <a:rPr lang="en-US" sz="3600" b="0" i="1" smtClean="0">
+                          <a:latin typeface="Cambria Math" panose="02040503050406030204" pitchFamily="18" charset="0"/>
+                          <a:ea typeface="Cambria" panose="02040503050406030204" pitchFamily="18" charset="0"/>
+                        </a:rPr>
+                        <m:t>𝑃𝑜𝑢𝑡</m:t>
+                      </m:r>
+                      <m:r>
+                        <a:rPr lang="en-US" sz="3600" b="0" i="1" smtClean="0">
+                          <a:latin typeface="Cambria Math" panose="02040503050406030204" pitchFamily="18" charset="0"/>
+                          <a:ea typeface="Cambria" panose="02040503050406030204" pitchFamily="18" charset="0"/>
+                        </a:rPr>
+                        <m:t>=</m:t>
+                      </m:r>
+                      <m:r>
+                        <a:rPr lang="en-US" sz="3600" b="0" i="1" smtClean="0">
+                          <a:latin typeface="Cambria Math" panose="02040503050406030204" pitchFamily="18" charset="0"/>
+                          <a:ea typeface="Cambria" panose="02040503050406030204" pitchFamily="18" charset="0"/>
+                        </a:rPr>
+                        <m:t>𝐺𝑎𝑖𝑛</m:t>
+                      </m:r>
+                      <m:r>
+                        <a:rPr lang="en-US" sz="3600" b="0" i="1" smtClean="0">
+                          <a:latin typeface="Cambria Math" panose="02040503050406030204" pitchFamily="18" charset="0"/>
+                          <a:ea typeface="Cambria" panose="02040503050406030204" pitchFamily="18" charset="0"/>
+                        </a:rPr>
+                        <m:t> </m:t>
+                      </m:r>
+                      <m:r>
+                        <a:rPr lang="en-US" sz="3600" b="0" i="1" smtClean="0">
+                          <a:latin typeface="Cambria Math" panose="02040503050406030204" pitchFamily="18" charset="0"/>
+                          <a:ea typeface="Cambria" panose="02040503050406030204" pitchFamily="18" charset="0"/>
+                        </a:rPr>
+                        <m:t>𝑥</m:t>
+                      </m:r>
+                      <m:r>
+                        <a:rPr lang="en-US" sz="3600" b="0" i="1" smtClean="0">
+                          <a:latin typeface="Cambria Math" panose="02040503050406030204" pitchFamily="18" charset="0"/>
+                          <a:ea typeface="Cambria" panose="02040503050406030204" pitchFamily="18" charset="0"/>
+                        </a:rPr>
+                        <m:t> </m:t>
+                      </m:r>
+                      <m:r>
+                        <a:rPr lang="en-US" sz="3600" b="0" i="1" smtClean="0">
+                          <a:latin typeface="Cambria Math" panose="02040503050406030204" pitchFamily="18" charset="0"/>
+                          <a:ea typeface="Cambria" panose="02040503050406030204" pitchFamily="18" charset="0"/>
+                        </a:rPr>
+                        <m:t>𝑃𝑖𝑛</m:t>
+                      </m:r>
+                    </m:oMath>
+                  </m:oMathPara>
+                </a14:m>
+                <a:endParaRPr lang="en-US" sz="3600" dirty="0">
+                  <a:latin typeface="Cambria" panose="02040503050406030204" pitchFamily="18" charset="0"/>
+                  <a:ea typeface="Cambria" panose="02040503050406030204" pitchFamily="18" charset="0"/>
+                </a:endParaRPr>
+              </a:p>
+            </p:txBody>
+          </p:sp>
+        </mc:Choice>
+        <mc:Fallback xmlns="">
+          <p:sp>
+            <p:nvSpPr>
+              <p:cNvPr id="17" name="TextBox 16">
+                <a:extLst>
+                  <a:ext uri="{FF2B5EF4-FFF2-40B4-BE49-F238E27FC236}">
+                    <a16:creationId xmlns:a16="http://schemas.microsoft.com/office/drawing/2014/main" id="{DE616BB5-3A6D-058D-7B84-B1A07492A8C8}"/>
+                  </a:ext>
+                </a:extLst>
+              </p:cNvPr>
+              <p:cNvSpPr txBox="1">
+                <a:spLocks noRot="1" noChangeAspect="1" noMove="1" noResize="1" noEditPoints="1" noAdjustHandles="1" noChangeArrowheads="1" noChangeShapeType="1" noTextEdit="1"/>
+              </p:cNvSpPr>
+              <p:nvPr/>
+            </p:nvSpPr>
+            <p:spPr>
+              <a:xfrm>
+                <a:off x="2693894" y="4549033"/>
+                <a:ext cx="6118412" cy="646331"/>
+              </a:xfrm>
+              <a:prstGeom prst="rect">
+                <a:avLst/>
+              </a:prstGeom>
+              <a:blipFill>
+                <a:blip r:embed="rId3"/>
+                <a:stretch>
+                  <a:fillRect/>
+                </a:stretch>
+              </a:blipFill>
+            </p:spPr>
+            <p:txBody>
+              <a:bodyPr/>
+              <a:lstStyle/>
+              <a:p>
+                <a:r>
+                  <a:rPr lang="en-US">
+                    <a:noFill/>
+                  </a:rPr>
+                  <a:t> </a:t>
+                </a:r>
+              </a:p>
+            </p:txBody>
+          </p:sp>
+        </mc:Fallback>
+      </mc:AlternateContent>
+      <mc:AlternateContent xmlns:mc="http://schemas.openxmlformats.org/markup-compatibility/2006" xmlns:a14="http://schemas.microsoft.com/office/drawing/2010/main">
+        <mc:Choice Requires="a14">
+          <p:sp>
+            <p:nvSpPr>
+              <p:cNvPr id="18" name="TextBox 17">
+                <a:extLst>
+                  <a:ext uri="{FF2B5EF4-FFF2-40B4-BE49-F238E27FC236}">
+                    <a16:creationId xmlns:a16="http://schemas.microsoft.com/office/drawing/2014/main" id="{EC4273FD-20C0-7738-84A9-8A525A5E1027}"/>
+                  </a:ext>
+                </a:extLst>
+              </p:cNvPr>
+              <p:cNvSpPr txBox="1"/>
+              <p:nvPr/>
+            </p:nvSpPr>
+            <p:spPr>
+              <a:xfrm>
+                <a:off x="2693894" y="5189871"/>
+                <a:ext cx="6118412" cy="646331"/>
+              </a:xfrm>
+              <a:prstGeom prst="rect">
+                <a:avLst/>
+              </a:prstGeom>
+              <a:noFill/>
+            </p:spPr>
+            <p:txBody>
+              <a:bodyPr wrap="square">
+                <a:spAutoFit/>
+              </a:bodyPr>
+              <a:lstStyle/>
+              <a:p>
+                <a:pPr/>
+                <a14:m>
+                  <m:oMathPara xmlns:m="http://schemas.openxmlformats.org/officeDocument/2006/math">
+                    <m:oMathParaPr>
+                      <m:jc m:val="centerGroup"/>
+                    </m:oMathParaPr>
+                    <m:oMath xmlns:m="http://schemas.openxmlformats.org/officeDocument/2006/math">
+                      <m:r>
+                        <a:rPr lang="en-US" sz="3600" b="0" i="1" smtClean="0">
+                          <a:latin typeface="Cambria Math" panose="02040503050406030204" pitchFamily="18" charset="0"/>
+                          <a:ea typeface="Cambria" panose="02040503050406030204" pitchFamily="18" charset="0"/>
+                        </a:rPr>
+                        <m:t>𝑃𝑜𝑢𝑡</m:t>
+                      </m:r>
+                      <m:r>
+                        <a:rPr lang="en-US" sz="3600" b="0" i="1" smtClean="0">
+                          <a:latin typeface="Cambria Math" panose="02040503050406030204" pitchFamily="18" charset="0"/>
+                          <a:ea typeface="Cambria" panose="02040503050406030204" pitchFamily="18" charset="0"/>
+                        </a:rPr>
+                        <m:t>=170 </m:t>
+                      </m:r>
+                      <m:r>
+                        <a:rPr lang="en-US" sz="3600" b="0" i="1" smtClean="0">
+                          <a:latin typeface="Cambria Math" panose="02040503050406030204" pitchFamily="18" charset="0"/>
+                          <a:ea typeface="Cambria" panose="02040503050406030204" pitchFamily="18" charset="0"/>
+                        </a:rPr>
+                        <m:t>𝑥</m:t>
+                      </m:r>
+                      <m:r>
+                        <a:rPr lang="en-US" sz="3600" b="0" i="1" smtClean="0">
+                          <a:latin typeface="Cambria Math" panose="02040503050406030204" pitchFamily="18" charset="0"/>
+                          <a:ea typeface="Cambria" panose="02040503050406030204" pitchFamily="18" charset="0"/>
+                        </a:rPr>
+                        <m:t> 40</m:t>
+                      </m:r>
+                      <m:r>
+                        <a:rPr lang="en-US" sz="3600" b="0" i="1" smtClean="0">
+                          <a:latin typeface="Cambria Math" panose="02040503050406030204" pitchFamily="18" charset="0"/>
+                          <a:ea typeface="Cambria" panose="02040503050406030204" pitchFamily="18" charset="0"/>
+                        </a:rPr>
+                        <m:t>𝑚𝑊</m:t>
+                      </m:r>
+                    </m:oMath>
+                  </m:oMathPara>
+                </a14:m>
+                <a:endParaRPr lang="en-US" sz="3600" dirty="0">
+                  <a:latin typeface="Cambria" panose="02040503050406030204" pitchFamily="18" charset="0"/>
+                  <a:ea typeface="Cambria" panose="02040503050406030204" pitchFamily="18" charset="0"/>
+                </a:endParaRPr>
+              </a:p>
+            </p:txBody>
+          </p:sp>
+        </mc:Choice>
+        <mc:Fallback xmlns="">
+          <p:sp>
+            <p:nvSpPr>
+              <p:cNvPr id="18" name="TextBox 17">
+                <a:extLst>
+                  <a:ext uri="{FF2B5EF4-FFF2-40B4-BE49-F238E27FC236}">
+                    <a16:creationId xmlns:a16="http://schemas.microsoft.com/office/drawing/2014/main" id="{EC4273FD-20C0-7738-84A9-8A525A5E1027}"/>
+                  </a:ext>
+                </a:extLst>
+              </p:cNvPr>
+              <p:cNvSpPr txBox="1">
+                <a:spLocks noRot="1" noChangeAspect="1" noMove="1" noResize="1" noEditPoints="1" noAdjustHandles="1" noChangeArrowheads="1" noChangeShapeType="1" noTextEdit="1"/>
+              </p:cNvSpPr>
+              <p:nvPr/>
+            </p:nvSpPr>
+            <p:spPr>
+              <a:xfrm>
+                <a:off x="2693894" y="5189871"/>
+                <a:ext cx="6118412" cy="646331"/>
+              </a:xfrm>
+              <a:prstGeom prst="rect">
+                <a:avLst/>
+              </a:prstGeom>
+              <a:blipFill>
+                <a:blip r:embed="rId4"/>
+                <a:stretch>
+                  <a:fillRect/>
+                </a:stretch>
+              </a:blipFill>
+            </p:spPr>
+            <p:txBody>
+              <a:bodyPr/>
+              <a:lstStyle/>
+              <a:p>
+                <a:r>
+                  <a:rPr lang="en-US">
+                    <a:noFill/>
+                  </a:rPr>
+                  <a:t> </a:t>
+                </a:r>
+              </a:p>
+            </p:txBody>
+          </p:sp>
+        </mc:Fallback>
+      </mc:AlternateContent>
+      <mc:AlternateContent xmlns:mc="http://schemas.openxmlformats.org/markup-compatibility/2006" xmlns:a14="http://schemas.microsoft.com/office/drawing/2010/main">
+        <mc:Choice Requires="a14">
+          <p:sp>
+            <p:nvSpPr>
+              <p:cNvPr id="19" name="TextBox 18">
+                <a:extLst>
+                  <a:ext uri="{FF2B5EF4-FFF2-40B4-BE49-F238E27FC236}">
+                    <a16:creationId xmlns:a16="http://schemas.microsoft.com/office/drawing/2014/main" id="{763FB855-A875-213A-7023-0D133D3AAA58}"/>
+                  </a:ext>
+                </a:extLst>
+              </p:cNvPr>
+              <p:cNvSpPr txBox="1"/>
+              <p:nvPr/>
+            </p:nvSpPr>
+            <p:spPr>
+              <a:xfrm>
+                <a:off x="2693894" y="5949792"/>
+                <a:ext cx="6118412" cy="646331"/>
+              </a:xfrm>
+              <a:prstGeom prst="rect">
+                <a:avLst/>
+              </a:prstGeom>
+              <a:noFill/>
+            </p:spPr>
+            <p:txBody>
+              <a:bodyPr wrap="square">
+                <a:spAutoFit/>
+              </a:bodyPr>
+              <a:lstStyle/>
+              <a:p>
+                <a:pPr/>
+                <a14:m>
+                  <m:oMathPara xmlns:m="http://schemas.openxmlformats.org/officeDocument/2006/math">
+                    <m:oMathParaPr>
+                      <m:jc m:val="centerGroup"/>
+                    </m:oMathParaPr>
+                    <m:oMath xmlns:m="http://schemas.openxmlformats.org/officeDocument/2006/math">
+                      <m:r>
+                        <a:rPr lang="en-US" sz="3600" b="0" i="1" smtClean="0">
+                          <a:latin typeface="Cambria Math" panose="02040503050406030204" pitchFamily="18" charset="0"/>
+                          <a:ea typeface="Cambria" panose="02040503050406030204" pitchFamily="18" charset="0"/>
+                        </a:rPr>
+                        <m:t>𝑃𝑜𝑢𝑡</m:t>
+                      </m:r>
+                      <m:r>
+                        <a:rPr lang="en-US" sz="3600" b="0" i="1" smtClean="0">
+                          <a:latin typeface="Cambria Math" panose="02040503050406030204" pitchFamily="18" charset="0"/>
+                          <a:ea typeface="Cambria" panose="02040503050406030204" pitchFamily="18" charset="0"/>
+                        </a:rPr>
+                        <m:t>=6.8</m:t>
+                      </m:r>
+                      <m:r>
+                        <a:rPr lang="en-US" sz="3600" b="0" i="1" smtClean="0">
+                          <a:latin typeface="Cambria Math" panose="02040503050406030204" pitchFamily="18" charset="0"/>
+                          <a:ea typeface="Cambria" panose="02040503050406030204" pitchFamily="18" charset="0"/>
+                        </a:rPr>
+                        <m:t>𝑊</m:t>
+                      </m:r>
+                    </m:oMath>
+                  </m:oMathPara>
+                </a14:m>
+                <a:endParaRPr lang="en-US" sz="3600" dirty="0">
+                  <a:latin typeface="Cambria" panose="02040503050406030204" pitchFamily="18" charset="0"/>
+                  <a:ea typeface="Cambria" panose="02040503050406030204" pitchFamily="18" charset="0"/>
+                </a:endParaRPr>
+              </a:p>
+            </p:txBody>
+          </p:sp>
+        </mc:Choice>
+        <mc:Fallback xmlns="">
+          <p:sp>
+            <p:nvSpPr>
+              <p:cNvPr id="19" name="TextBox 18">
+                <a:extLst>
+                  <a:ext uri="{FF2B5EF4-FFF2-40B4-BE49-F238E27FC236}">
+                    <a16:creationId xmlns:a16="http://schemas.microsoft.com/office/drawing/2014/main" id="{763FB855-A875-213A-7023-0D133D3AAA58}"/>
+                  </a:ext>
+                </a:extLst>
+              </p:cNvPr>
+              <p:cNvSpPr txBox="1">
+                <a:spLocks noRot="1" noChangeAspect="1" noMove="1" noResize="1" noEditPoints="1" noAdjustHandles="1" noChangeArrowheads="1" noChangeShapeType="1" noTextEdit="1"/>
+              </p:cNvSpPr>
+              <p:nvPr/>
+            </p:nvSpPr>
+            <p:spPr>
+              <a:xfrm>
+                <a:off x="2693894" y="5949792"/>
+                <a:ext cx="6118412" cy="646331"/>
+              </a:xfrm>
+              <a:prstGeom prst="rect">
+                <a:avLst/>
+              </a:prstGeom>
+              <a:blipFill>
+                <a:blip r:embed="rId5"/>
+                <a:stretch>
+                  <a:fillRect/>
+                </a:stretch>
+              </a:blipFill>
+            </p:spPr>
+            <p:txBody>
+              <a:bodyPr/>
+              <a:lstStyle/>
+              <a:p>
+                <a:r>
+                  <a:rPr lang="en-US">
+                    <a:noFill/>
+                  </a:rPr>
+                  <a:t> </a:t>
+                </a:r>
+              </a:p>
+            </p:txBody>
+          </p:sp>
+        </mc:Fallback>
+      </mc:AlternateContent>
+    </p:spTree>
+    <p:extLst>
+      <p:ext uri="{BB962C8B-B14F-4D97-AF65-F5344CB8AC3E}">
+        <p14:creationId xmlns:p14="http://schemas.microsoft.com/office/powerpoint/2010/main" val="1840800072"/>
+      </p:ext>
+    </p:extLst>
+  </p:cSld>
+  <p:clrMapOvr>
+    <a:masterClrMapping/>
+  </p:clrMapOvr>
+  <p:timing>
+    <p:tnLst>
+      <p:par>
+        <p:cTn id="1" dur="indefinite" restart="never" nodeType="tmRoot">
+          <p:childTnLst>
+            <p:seq concurrent="1" nextAc="seek">
+              <p:cTn id="2" dur="indefinite" nodeType="mainSeq">
+                <p:childTnLst>
+                  <p:par>
+                    <p:cTn id="3" fill="hold">
+                      <p:stCondLst>
+                        <p:cond delay="indefinite"/>
+                        <p:cond evt="onBegin" delay="0">
+                          <p:tn val="2"/>
+                        </p:cond>
+                      </p:stCondLst>
+                      <p:childTnLst>
+                        <p:par>
+                          <p:cTn id="4" fill="hold">
+                            <p:stCondLst>
+                              <p:cond delay="0"/>
+                            </p:stCondLst>
+                            <p:childTnLst>
+                              <p:par>
+                                <p:cTn id="5" presetID="22" presetClass="entr" presetSubtype="8" fill="hold" grpId="0" nodeType="withEffect">
+                                  <p:stCondLst>
+                                    <p:cond delay="0"/>
+                                  </p:stCondLst>
+                                  <p:childTnLst>
+                                    <p:set>
+                                      <p:cBhvr>
+                                        <p:cTn id="6" dur="1" fill="hold">
+                                          <p:stCondLst>
+                                            <p:cond delay="0"/>
+                                          </p:stCondLst>
+                                        </p:cTn>
+                                        <p:tgtEl>
+                                          <p:spTgt spid="3"/>
+                                        </p:tgtEl>
+                                        <p:attrNameLst>
+                                          <p:attrName>style.visibility</p:attrName>
+                                        </p:attrNameLst>
+                                      </p:cBhvr>
+                                      <p:to>
+                                        <p:strVal val="visible"/>
+                                      </p:to>
+                                    </p:set>
+                                    <p:animEffect transition="in" filter="wipe(left)">
+                                      <p:cBhvr>
+                                        <p:cTn id="7" dur="500"/>
+                                        <p:tgtEl>
+                                          <p:spTgt spid="3"/>
+                                        </p:tgtEl>
+                                      </p:cBhvr>
+                                    </p:animEffect>
+                                  </p:childTnLst>
+                                </p:cTn>
+                              </p:par>
+                            </p:childTnLst>
+                          </p:cTn>
+                        </p:par>
+                        <p:par>
+                          <p:cTn id="8" fill="hold">
+                            <p:stCondLst>
+                              <p:cond delay="500"/>
+                            </p:stCondLst>
+                            <p:childTnLst>
+                              <p:par>
+                                <p:cTn id="9" presetID="22" presetClass="entr" presetSubtype="8" fill="hold" grpId="0" nodeType="afterEffect">
+                                  <p:stCondLst>
+                                    <p:cond delay="0"/>
+                                  </p:stCondLst>
+                                  <p:childTnLst>
+                                    <p:set>
+                                      <p:cBhvr>
+                                        <p:cTn id="10" dur="1" fill="hold">
+                                          <p:stCondLst>
+                                            <p:cond delay="0"/>
+                                          </p:stCondLst>
+                                        </p:cTn>
+                                        <p:tgtEl>
+                                          <p:spTgt spid="5"/>
+                                        </p:tgtEl>
+                                        <p:attrNameLst>
+                                          <p:attrName>style.visibility</p:attrName>
+                                        </p:attrNameLst>
+                                      </p:cBhvr>
+                                      <p:to>
+                                        <p:strVal val="visible"/>
+                                      </p:to>
+                                    </p:set>
+                                    <p:animEffect transition="in" filter="wipe(left)">
+                                      <p:cBhvr>
+                                        <p:cTn id="11" dur="500"/>
+                                        <p:tgtEl>
+                                          <p:spTgt spid="5"/>
+                                        </p:tgtEl>
+                                      </p:cBhvr>
+                                    </p:animEffect>
+                                  </p:childTnLst>
+                                </p:cTn>
+                              </p:par>
+                            </p:childTnLst>
+                          </p:cTn>
+                        </p:par>
+                        <p:par>
+                          <p:cTn id="12" fill="hold">
+                            <p:stCondLst>
+                              <p:cond delay="1000"/>
+                            </p:stCondLst>
+                            <p:childTnLst>
+                              <p:par>
+                                <p:cTn id="13" presetID="22" presetClass="entr" presetSubtype="8" fill="hold" grpId="0" nodeType="afterEffect">
+                                  <p:stCondLst>
+                                    <p:cond delay="0"/>
+                                  </p:stCondLst>
+                                  <p:childTnLst>
+                                    <p:set>
+                                      <p:cBhvr>
+                                        <p:cTn id="14" dur="1" fill="hold">
+                                          <p:stCondLst>
+                                            <p:cond delay="0"/>
+                                          </p:stCondLst>
+                                        </p:cTn>
+                                        <p:tgtEl>
+                                          <p:spTgt spid="4"/>
+                                        </p:tgtEl>
+                                        <p:attrNameLst>
+                                          <p:attrName>style.visibility</p:attrName>
+                                        </p:attrNameLst>
+                                      </p:cBhvr>
+                                      <p:to>
+                                        <p:strVal val="visible"/>
+                                      </p:to>
+                                    </p:set>
+                                    <p:animEffect transition="in" filter="wipe(left)">
+                                      <p:cBhvr>
+                                        <p:cTn id="15" dur="500"/>
+                                        <p:tgtEl>
+                                          <p:spTgt spid="4"/>
+                                        </p:tgtEl>
+                                      </p:cBhvr>
+                                    </p:animEffect>
+                                  </p:childTnLst>
+                                </p:cTn>
+                              </p:par>
+                            </p:childTnLst>
+                          </p:cTn>
+                        </p:par>
+                        <p:par>
+                          <p:cTn id="16" fill="hold">
+                            <p:stCondLst>
+                              <p:cond delay="1500"/>
+                            </p:stCondLst>
+                            <p:childTnLst>
+                              <p:par>
+                                <p:cTn id="17" presetID="22" presetClass="entr" presetSubtype="8" fill="hold" grpId="0" nodeType="afterEffect">
+                                  <p:stCondLst>
+                                    <p:cond delay="0"/>
+                                  </p:stCondLst>
+                                  <p:childTnLst>
+                                    <p:set>
+                                      <p:cBhvr>
+                                        <p:cTn id="18" dur="1" fill="hold">
+                                          <p:stCondLst>
+                                            <p:cond delay="0"/>
+                                          </p:stCondLst>
+                                        </p:cTn>
+                                        <p:tgtEl>
+                                          <p:spTgt spid="17"/>
+                                        </p:tgtEl>
+                                        <p:attrNameLst>
+                                          <p:attrName>style.visibility</p:attrName>
+                                        </p:attrNameLst>
+                                      </p:cBhvr>
+                                      <p:to>
+                                        <p:strVal val="visible"/>
+                                      </p:to>
+                                    </p:set>
+                                    <p:animEffect transition="in" filter="wipe(left)">
+                                      <p:cBhvr>
+                                        <p:cTn id="19" dur="500"/>
+                                        <p:tgtEl>
+                                          <p:spTgt spid="17"/>
+                                        </p:tgtEl>
+                                      </p:cBhvr>
+                                    </p:animEffect>
+                                  </p:childTnLst>
+                                </p:cTn>
+                              </p:par>
+                            </p:childTnLst>
+                          </p:cTn>
+                        </p:par>
+                        <p:par>
+                          <p:cTn id="20" fill="hold">
+                            <p:stCondLst>
+                              <p:cond delay="2000"/>
+                            </p:stCondLst>
+                            <p:childTnLst>
+                              <p:par>
+                                <p:cTn id="21" presetID="22" presetClass="entr" presetSubtype="8" fill="hold" grpId="0" nodeType="afterEffect">
+                                  <p:stCondLst>
+                                    <p:cond delay="0"/>
+                                  </p:stCondLst>
+                                  <p:childTnLst>
+                                    <p:set>
+                                      <p:cBhvr>
+                                        <p:cTn id="22" dur="1" fill="hold">
+                                          <p:stCondLst>
+                                            <p:cond delay="0"/>
+                                          </p:stCondLst>
+                                        </p:cTn>
+                                        <p:tgtEl>
+                                          <p:spTgt spid="18"/>
+                                        </p:tgtEl>
+                                        <p:attrNameLst>
+                                          <p:attrName>style.visibility</p:attrName>
+                                        </p:attrNameLst>
+                                      </p:cBhvr>
+                                      <p:to>
+                                        <p:strVal val="visible"/>
+                                      </p:to>
+                                    </p:set>
+                                    <p:animEffect transition="in" filter="wipe(left)">
+                                      <p:cBhvr>
+                                        <p:cTn id="23" dur="500"/>
+                                        <p:tgtEl>
+                                          <p:spTgt spid="18"/>
+                                        </p:tgtEl>
+                                      </p:cBhvr>
+                                    </p:animEffect>
+                                  </p:childTnLst>
+                                </p:cTn>
+                              </p:par>
+                            </p:childTnLst>
+                          </p:cTn>
+                        </p:par>
+                        <p:par>
+                          <p:cTn id="24" fill="hold">
+                            <p:stCondLst>
+                              <p:cond delay="2500"/>
+                            </p:stCondLst>
+                            <p:childTnLst>
+                              <p:par>
+                                <p:cTn id="25" presetID="22" presetClass="entr" presetSubtype="8" fill="hold" grpId="0" nodeType="afterEffect">
+                                  <p:stCondLst>
+                                    <p:cond delay="0"/>
+                                  </p:stCondLst>
+                                  <p:childTnLst>
+                                    <p:set>
+                                      <p:cBhvr>
+                                        <p:cTn id="26" dur="1" fill="hold">
+                                          <p:stCondLst>
+                                            <p:cond delay="0"/>
+                                          </p:stCondLst>
+                                        </p:cTn>
+                                        <p:tgtEl>
+                                          <p:spTgt spid="19"/>
+                                        </p:tgtEl>
+                                        <p:attrNameLst>
+                                          <p:attrName>style.visibility</p:attrName>
+                                        </p:attrNameLst>
+                                      </p:cBhvr>
+                                      <p:to>
+                                        <p:strVal val="visible"/>
+                                      </p:to>
+                                    </p:set>
+                                    <p:animEffect transition="in" filter="wipe(left)">
+                                      <p:cBhvr>
+                                        <p:cTn id="27" dur="500"/>
+                                        <p:tgtEl>
+                                          <p:spTgt spid="19"/>
+                                        </p:tgtEl>
+                                      </p:cBhvr>
+                                    </p:animEffect>
+                                  </p:childTnLst>
+                                </p:cTn>
+                              </p:par>
+                            </p:childTnLst>
+                          </p:cTn>
+                        </p:par>
+                      </p:childTnLst>
+                    </p:cTn>
+                  </p:par>
+                </p:childTnLst>
+              </p:cTn>
+              <p:prevCondLst>
+                <p:cond evt="onPrev" delay="0">
+                  <p:tgtEl>
+                    <p:sldTgt/>
+                  </p:tgtEl>
+                </p:cond>
+              </p:prevCondLst>
+              <p:nextCondLst>
+                <p:cond evt="onNext" delay="0">
+                  <p:tgtEl>
+                    <p:sldTgt/>
+                  </p:tgtEl>
+                </p:cond>
+              </p:nextCondLst>
+            </p:seq>
+          </p:childTnLst>
+        </p:cTn>
+      </p:par>
+    </p:tnLst>
+    <p:bldLst>
+      <p:bldP spid="3" grpId="0"/>
+      <p:bldP spid="5" grpId="0"/>
+      <p:bldP spid="4" grpId="0"/>
+      <p:bldP spid="17" grpId="0"/>
+      <p:bldP spid="18" grpId="0"/>
+      <p:bldP spid="19" grpId="0"/>
+    </p:bldLst>
+  </p:timing>
+</p:sld>
+</file>
+
+<file path=ppt/slides/slide29.xml><?xml version="1.0" encoding="utf-8"?>
 <p:sld xmlns:a="http://schemas.openxmlformats.org/drawingml/2006/main" xmlns:r="http://schemas.openxmlformats.org/officeDocument/2006/relationships" xmlns:p="http://schemas.openxmlformats.org/presentationml/2006/main">
   <p:cSld>
     <p:spTree>
@@ -18353,229 +22115,208 @@
           </a:p>
         </p:txBody>
       </p:sp>
-      <p:grpSp>
-        <p:nvGrpSpPr>
-          <p:cNvPr id="3" name="Group 2">
+      <p:cxnSp>
+        <p:nvCxnSpPr>
+          <p:cNvPr id="13" name="Straight Arrow Connector 12">
             <a:extLst>
               <a:ext uri="{FF2B5EF4-FFF2-40B4-BE49-F238E27FC236}">
-                <a16:creationId xmlns:a16="http://schemas.microsoft.com/office/drawing/2014/main" id="{31E9F0C7-F9E9-911D-D4AA-7A3FFB18B59B}"/>
+                <a16:creationId xmlns:a16="http://schemas.microsoft.com/office/drawing/2014/main" id="{FF77B169-D401-BECE-D365-EEA90817D3BC}"/>
               </a:ext>
             </a:extLst>
           </p:cNvPr>
-          <p:cNvGrpSpPr/>
+          <p:cNvCxnSpPr>
+            <a:cxnSpLocks/>
+          </p:cNvCxnSpPr>
           <p:nvPr/>
-        </p:nvGrpSpPr>
-        <p:grpSpPr>
+        </p:nvCxnSpPr>
+        <p:spPr>
           <a:xfrm>
-            <a:off x="2533012" y="3822836"/>
-            <a:ext cx="6894710" cy="2030200"/>
-            <a:chOff x="2519404" y="2970928"/>
-            <a:chExt cx="6894710" cy="2030200"/>
+            <a:off x="6448474" y="4469167"/>
+            <a:ext cx="1730188" cy="0"/>
           </a:xfrm>
-        </p:grpSpPr>
-        <p:cxnSp>
-          <p:nvCxnSpPr>
-            <p:cNvPr id="13" name="Straight Arrow Connector 12">
-              <a:extLst>
-                <a:ext uri="{FF2B5EF4-FFF2-40B4-BE49-F238E27FC236}">
-                  <a16:creationId xmlns:a16="http://schemas.microsoft.com/office/drawing/2014/main" id="{FF77B169-D401-BECE-D365-EEA90817D3BC}"/>
-                </a:ext>
-              </a:extLst>
-            </p:cNvPr>
-            <p:cNvCxnSpPr>
-              <a:cxnSpLocks/>
-            </p:cNvCxnSpPr>
-            <p:nvPr/>
-          </p:nvCxnSpPr>
-          <p:spPr>
-            <a:xfrm>
-              <a:off x="6434866" y="3617259"/>
-              <a:ext cx="1730188" cy="0"/>
-            </a:xfrm>
-            <a:prstGeom prst="straightConnector1">
-              <a:avLst/>
-            </a:prstGeom>
-            <a:ln w="57150">
-              <a:solidFill>
-                <a:srgbClr val="FF0000"/>
-              </a:solidFill>
-              <a:tailEnd type="triangle"/>
-            </a:ln>
-          </p:spPr>
-          <p:style>
-            <a:lnRef idx="1">
-              <a:schemeClr val="accent2"/>
-            </a:lnRef>
-            <a:fillRef idx="0">
-              <a:schemeClr val="accent2"/>
-            </a:fillRef>
-            <a:effectRef idx="0">
-              <a:schemeClr val="accent2"/>
-            </a:effectRef>
-            <a:fontRef idx="minor">
-              <a:schemeClr val="tx1"/>
-            </a:fontRef>
-          </p:style>
-        </p:cxnSp>
-        <p:sp>
-          <p:nvSpPr>
-            <p:cNvPr id="17" name="TextBox 16">
-              <a:extLst>
-                <a:ext uri="{FF2B5EF4-FFF2-40B4-BE49-F238E27FC236}">
-                  <a16:creationId xmlns:a16="http://schemas.microsoft.com/office/drawing/2014/main" id="{B81B4CE5-D1D1-4E5C-CA73-E18E0F865F19}"/>
-                </a:ext>
-              </a:extLst>
-            </p:cNvPr>
-            <p:cNvSpPr txBox="1"/>
-            <p:nvPr/>
-          </p:nvSpPr>
-          <p:spPr>
-            <a:xfrm>
-              <a:off x="5300165" y="4354797"/>
-              <a:ext cx="1253035" cy="646331"/>
-            </a:xfrm>
-            <a:prstGeom prst="rect">
-              <a:avLst/>
-            </a:prstGeom>
-            <a:noFill/>
-          </p:spPr>
-          <p:txBody>
-            <a:bodyPr wrap="none" rtlCol="0">
-              <a:spAutoFit/>
-            </a:bodyPr>
-            <a:lstStyle/>
-            <a:p>
-              <a:r>
-                <a:rPr lang="en-US" sz="3600" dirty="0">
-                  <a:latin typeface="Cambria" panose="02040503050406030204" pitchFamily="18" charset="0"/>
-                  <a:ea typeface="Cambria" panose="02040503050406030204" pitchFamily="18" charset="0"/>
-                </a:rPr>
-                <a:t>Filter</a:t>
-              </a:r>
-            </a:p>
-          </p:txBody>
-        </p:sp>
-        <p:sp>
-          <p:nvSpPr>
-            <p:cNvPr id="18" name="TextBox 17">
-              <a:extLst>
-                <a:ext uri="{FF2B5EF4-FFF2-40B4-BE49-F238E27FC236}">
-                  <a16:creationId xmlns:a16="http://schemas.microsoft.com/office/drawing/2014/main" id="{87B15540-1434-A6F3-FB79-47EF5746971A}"/>
-                </a:ext>
-              </a:extLst>
-            </p:cNvPr>
-            <p:cNvSpPr txBox="1"/>
-            <p:nvPr/>
-          </p:nvSpPr>
-          <p:spPr>
-            <a:xfrm>
-              <a:off x="2519404" y="3042124"/>
-              <a:ext cx="1503938" cy="646331"/>
-            </a:xfrm>
-            <a:prstGeom prst="rect">
-              <a:avLst/>
-            </a:prstGeom>
-            <a:noFill/>
-          </p:spPr>
-          <p:txBody>
-            <a:bodyPr wrap="none" rtlCol="0">
-              <a:spAutoFit/>
-            </a:bodyPr>
-            <a:lstStyle/>
-            <a:p>
-              <a:r>
-                <a:rPr lang="en-US" sz="3600" dirty="0">
-                  <a:latin typeface="Cambria" panose="02040503050406030204" pitchFamily="18" charset="0"/>
-                  <a:ea typeface="Cambria" panose="02040503050406030204" pitchFamily="18" charset="0"/>
-                </a:rPr>
-                <a:t>50mW</a:t>
-              </a:r>
-            </a:p>
-          </p:txBody>
-        </p:sp>
-        <p:sp>
-          <p:nvSpPr>
-            <p:cNvPr id="19" name="TextBox 18">
-              <a:extLst>
-                <a:ext uri="{FF2B5EF4-FFF2-40B4-BE49-F238E27FC236}">
-                  <a16:creationId xmlns:a16="http://schemas.microsoft.com/office/drawing/2014/main" id="{624A9DB7-AD84-C33D-2BFA-3454FFF61553}"/>
-                </a:ext>
-              </a:extLst>
-            </p:cNvPr>
-            <p:cNvSpPr txBox="1"/>
-            <p:nvPr/>
-          </p:nvSpPr>
-          <p:spPr>
-            <a:xfrm>
-              <a:off x="8165054" y="2970928"/>
-              <a:ext cx="1249060" cy="646331"/>
-            </a:xfrm>
-            <a:prstGeom prst="rect">
-              <a:avLst/>
-            </a:prstGeom>
-            <a:noFill/>
-          </p:spPr>
-          <p:txBody>
-            <a:bodyPr wrap="none" rtlCol="0">
-              <a:spAutoFit/>
-            </a:bodyPr>
-            <a:lstStyle/>
-            <a:p>
-              <a:r>
-                <a:rPr lang="en-US" sz="3600" dirty="0">
-                  <a:latin typeface="Cambria" panose="02040503050406030204" pitchFamily="18" charset="0"/>
-                  <a:ea typeface="Cambria" panose="02040503050406030204" pitchFamily="18" charset="0"/>
-                </a:rPr>
-                <a:t>2mW</a:t>
-              </a:r>
-            </a:p>
-          </p:txBody>
-        </p:sp>
-        <p:cxnSp>
-          <p:nvCxnSpPr>
-            <p:cNvPr id="5" name="Straight Arrow Connector 4">
-              <a:extLst>
-                <a:ext uri="{FF2B5EF4-FFF2-40B4-BE49-F238E27FC236}">
-                  <a16:creationId xmlns:a16="http://schemas.microsoft.com/office/drawing/2014/main" id="{FB144E85-FA56-2D89-4C65-7465D6CC032F}"/>
-                </a:ext>
-              </a:extLst>
-            </p:cNvPr>
-            <p:cNvCxnSpPr>
-              <a:cxnSpLocks/>
-            </p:cNvCxnSpPr>
-            <p:nvPr/>
-          </p:nvCxnSpPr>
-          <p:spPr>
-            <a:xfrm>
-              <a:off x="3876150" y="3496944"/>
-              <a:ext cx="1730188" cy="0"/>
-            </a:xfrm>
-            <a:prstGeom prst="straightConnector1">
-              <a:avLst/>
-            </a:prstGeom>
-            <a:ln w="57150">
-              <a:solidFill>
-                <a:srgbClr val="FF0000"/>
-              </a:solidFill>
-              <a:tailEnd type="triangle"/>
-            </a:ln>
-          </p:spPr>
-          <p:style>
-            <a:lnRef idx="1">
-              <a:schemeClr val="accent2"/>
-            </a:lnRef>
-            <a:fillRef idx="0">
-              <a:schemeClr val="accent2"/>
-            </a:fillRef>
-            <a:effectRef idx="0">
-              <a:schemeClr val="accent2"/>
-            </a:effectRef>
-            <a:fontRef idx="minor">
-              <a:schemeClr val="tx1"/>
-            </a:fontRef>
-          </p:style>
-        </p:cxnSp>
-      </p:grpSp>
+          <a:prstGeom prst="straightConnector1">
+            <a:avLst/>
+          </a:prstGeom>
+          <a:ln w="57150">
+            <a:solidFill>
+              <a:srgbClr val="FF0000"/>
+            </a:solidFill>
+            <a:tailEnd type="triangle"/>
+          </a:ln>
+        </p:spPr>
+        <p:style>
+          <a:lnRef idx="1">
+            <a:schemeClr val="accent2"/>
+          </a:lnRef>
+          <a:fillRef idx="0">
+            <a:schemeClr val="accent2"/>
+          </a:fillRef>
+          <a:effectRef idx="0">
+            <a:schemeClr val="accent2"/>
+          </a:effectRef>
+          <a:fontRef idx="minor">
+            <a:schemeClr val="tx1"/>
+          </a:fontRef>
+        </p:style>
+      </p:cxnSp>
+      <p:sp>
+        <p:nvSpPr>
+          <p:cNvPr id="17" name="TextBox 16">
+            <a:extLst>
+              <a:ext uri="{FF2B5EF4-FFF2-40B4-BE49-F238E27FC236}">
+                <a16:creationId xmlns:a16="http://schemas.microsoft.com/office/drawing/2014/main" id="{B81B4CE5-D1D1-4E5C-CA73-E18E0F865F19}"/>
+              </a:ext>
+            </a:extLst>
+          </p:cNvPr>
+          <p:cNvSpPr txBox="1"/>
+          <p:nvPr/>
+        </p:nvSpPr>
+        <p:spPr>
+          <a:xfrm>
+            <a:off x="5313773" y="5206705"/>
+            <a:ext cx="1253035" cy="646331"/>
+          </a:xfrm>
+          <a:prstGeom prst="rect">
+            <a:avLst/>
+          </a:prstGeom>
+          <a:noFill/>
+        </p:spPr>
+        <p:txBody>
+          <a:bodyPr wrap="none" rtlCol="0">
+            <a:spAutoFit/>
+          </a:bodyPr>
+          <a:lstStyle/>
+          <a:p>
+            <a:r>
+              <a:rPr lang="en-US" sz="3600" dirty="0">
+                <a:latin typeface="Cambria" panose="02040503050406030204" pitchFamily="18" charset="0"/>
+                <a:ea typeface="Cambria" panose="02040503050406030204" pitchFamily="18" charset="0"/>
+              </a:rPr>
+              <a:t>Filter</a:t>
+            </a:r>
+          </a:p>
+        </p:txBody>
+      </p:sp>
+      <p:sp>
+        <p:nvSpPr>
+          <p:cNvPr id="18" name="TextBox 17">
+            <a:extLst>
+              <a:ext uri="{FF2B5EF4-FFF2-40B4-BE49-F238E27FC236}">
+                <a16:creationId xmlns:a16="http://schemas.microsoft.com/office/drawing/2014/main" id="{87B15540-1434-A6F3-FB79-47EF5746971A}"/>
+              </a:ext>
+            </a:extLst>
+          </p:cNvPr>
+          <p:cNvSpPr txBox="1"/>
+          <p:nvPr/>
+        </p:nvSpPr>
+        <p:spPr>
+          <a:xfrm>
+            <a:off x="2533012" y="3894032"/>
+            <a:ext cx="1503938" cy="646331"/>
+          </a:xfrm>
+          <a:prstGeom prst="rect">
+            <a:avLst/>
+          </a:prstGeom>
+          <a:noFill/>
+        </p:spPr>
+        <p:txBody>
+          <a:bodyPr wrap="none" rtlCol="0">
+            <a:spAutoFit/>
+          </a:bodyPr>
+          <a:lstStyle/>
+          <a:p>
+            <a:r>
+              <a:rPr lang="en-US" sz="3600" dirty="0">
+                <a:latin typeface="Cambria" panose="02040503050406030204" pitchFamily="18" charset="0"/>
+                <a:ea typeface="Cambria" panose="02040503050406030204" pitchFamily="18" charset="0"/>
+              </a:rPr>
+              <a:t>50mW</a:t>
+            </a:r>
+          </a:p>
+        </p:txBody>
+      </p:sp>
+      <p:sp>
+        <p:nvSpPr>
+          <p:cNvPr id="19" name="TextBox 18">
+            <a:extLst>
+              <a:ext uri="{FF2B5EF4-FFF2-40B4-BE49-F238E27FC236}">
+                <a16:creationId xmlns:a16="http://schemas.microsoft.com/office/drawing/2014/main" id="{624A9DB7-AD84-C33D-2BFA-3454FFF61553}"/>
+              </a:ext>
+            </a:extLst>
+          </p:cNvPr>
+          <p:cNvSpPr txBox="1"/>
+          <p:nvPr/>
+        </p:nvSpPr>
+        <p:spPr>
+          <a:xfrm>
+            <a:off x="8178662" y="3822836"/>
+            <a:ext cx="1249060" cy="646331"/>
+          </a:xfrm>
+          <a:prstGeom prst="rect">
+            <a:avLst/>
+          </a:prstGeom>
+          <a:noFill/>
+        </p:spPr>
+        <p:txBody>
+          <a:bodyPr wrap="none" rtlCol="0">
+            <a:spAutoFit/>
+          </a:bodyPr>
+          <a:lstStyle/>
+          <a:p>
+            <a:r>
+              <a:rPr lang="en-US" sz="3600" dirty="0">
+                <a:latin typeface="Cambria" panose="02040503050406030204" pitchFamily="18" charset="0"/>
+                <a:ea typeface="Cambria" panose="02040503050406030204" pitchFamily="18" charset="0"/>
+              </a:rPr>
+              <a:t>2mW</a:t>
+            </a:r>
+          </a:p>
+        </p:txBody>
+      </p:sp>
+      <p:cxnSp>
+        <p:nvCxnSpPr>
+          <p:cNvPr id="5" name="Straight Arrow Connector 4">
+            <a:extLst>
+              <a:ext uri="{FF2B5EF4-FFF2-40B4-BE49-F238E27FC236}">
+                <a16:creationId xmlns:a16="http://schemas.microsoft.com/office/drawing/2014/main" id="{FB144E85-FA56-2D89-4C65-7465D6CC032F}"/>
+              </a:ext>
+            </a:extLst>
+          </p:cNvPr>
+          <p:cNvCxnSpPr>
+            <a:cxnSpLocks/>
+          </p:cNvCxnSpPr>
+          <p:nvPr/>
+        </p:nvCxnSpPr>
+        <p:spPr>
+          <a:xfrm>
+            <a:off x="3919738" y="4440891"/>
+            <a:ext cx="1730188" cy="0"/>
+          </a:xfrm>
+          <a:prstGeom prst="straightConnector1">
+            <a:avLst/>
+          </a:prstGeom>
+          <a:ln w="57150">
+            <a:solidFill>
+              <a:srgbClr val="FF0000"/>
+            </a:solidFill>
+            <a:tailEnd type="triangle"/>
+          </a:ln>
+        </p:spPr>
+        <p:style>
+          <a:lnRef idx="1">
+            <a:schemeClr val="accent2"/>
+          </a:lnRef>
+          <a:fillRef idx="0">
+            <a:schemeClr val="accent2"/>
+          </a:fillRef>
+          <a:effectRef idx="0">
+            <a:schemeClr val="accent2"/>
+          </a:effectRef>
+          <a:fontRef idx="minor">
+            <a:schemeClr val="tx1"/>
+          </a:fontRef>
+        </p:style>
+      </p:cxnSp>
       <p:sp>
         <p:nvSpPr>
           <p:cNvPr id="4" name="Rectangle 3">
@@ -18638,698 +22379,399 @@
   <p:clrMapOvr>
     <a:masterClrMapping/>
   </p:clrMapOvr>
-</p:sld>
-</file>
-
-<file path=ppt/slides/slide29.xml><?xml version="1.0" encoding="utf-8"?>
-<p:sld xmlns:a="http://schemas.openxmlformats.org/drawingml/2006/main" xmlns:r="http://schemas.openxmlformats.org/officeDocument/2006/relationships" xmlns:p="http://schemas.openxmlformats.org/presentationml/2006/main">
-  <p:cSld>
-    <p:spTree>
-      <p:nvGrpSpPr>
-        <p:cNvPr id="1" name="">
-          <a:extLst>
-            <a:ext uri="{FF2B5EF4-FFF2-40B4-BE49-F238E27FC236}">
-              <a16:creationId xmlns:a16="http://schemas.microsoft.com/office/drawing/2014/main" id="{721FD537-CDB6-0498-E3FD-69E266F4EF63}"/>
-            </a:ext>
-          </a:extLst>
-        </p:cNvPr>
-        <p:cNvGrpSpPr/>
-        <p:nvPr/>
-      </p:nvGrpSpPr>
-      <p:grpSpPr>
-        <a:xfrm>
-          <a:off x="0" y="0"/>
-          <a:ext cx="0" cy="0"/>
-          <a:chOff x="0" y="0"/>
-          <a:chExt cx="0" cy="0"/>
-        </a:xfrm>
-      </p:grpSpPr>
-      <p:sp>
-        <p:nvSpPr>
-          <p:cNvPr id="2" name="TextBox 1">
-            <a:extLst>
-              <a:ext uri="{FF2B5EF4-FFF2-40B4-BE49-F238E27FC236}">
-                <a16:creationId xmlns:a16="http://schemas.microsoft.com/office/drawing/2014/main" id="{C49AFE59-5C0A-7143-67D9-1E619FFFE4E2}"/>
-              </a:ext>
-            </a:extLst>
-          </p:cNvPr>
-          <p:cNvSpPr txBox="1"/>
-          <p:nvPr/>
-        </p:nvSpPr>
-        <p:spPr>
-          <a:xfrm>
-            <a:off x="10992196" y="0"/>
-            <a:ext cx="1199804" cy="369332"/>
-          </a:xfrm>
-          <a:prstGeom prst="rect">
-            <a:avLst/>
-          </a:prstGeom>
-          <a:noFill/>
-        </p:spPr>
-        <p:txBody>
-          <a:bodyPr wrap="square">
-            <a:spAutoFit/>
-          </a:bodyPr>
-          <a:lstStyle/>
-          <a:p>
-            <a:r>
-              <a:rPr lang="en-US" dirty="0">
-                <a:latin typeface="Berlin Sans FB" panose="020E0602020502020306" pitchFamily="34" charset="0"/>
-              </a:rPr>
-              <a:t>Buda Tech</a:t>
-            </a:r>
-          </a:p>
-        </p:txBody>
-      </p:sp>
-      <mc:AlternateContent xmlns:mc="http://schemas.openxmlformats.org/markup-compatibility/2006" xmlns:a14="http://schemas.microsoft.com/office/drawing/2010/main">
-        <mc:Choice Requires="a14">
-          <p:sp>
-            <p:nvSpPr>
-              <p:cNvPr id="7" name="TextBox 6">
-                <a:extLst>
-                  <a:ext uri="{FF2B5EF4-FFF2-40B4-BE49-F238E27FC236}">
-                    <a16:creationId xmlns:a16="http://schemas.microsoft.com/office/drawing/2014/main" id="{CA9F5996-A1DB-2C21-2C6E-E62C75A2C1EF}"/>
-                  </a:ext>
-                </a:extLst>
-              </p:cNvPr>
-              <p:cNvSpPr txBox="1"/>
-              <p:nvPr/>
-            </p:nvSpPr>
-            <p:spPr>
-              <a:xfrm>
-                <a:off x="3389721" y="1934360"/>
-                <a:ext cx="6118412" cy="879087"/>
-              </a:xfrm>
-              <a:prstGeom prst="rect">
-                <a:avLst/>
-              </a:prstGeom>
-              <a:noFill/>
-            </p:spPr>
-            <p:txBody>
-              <a:bodyPr wrap="square">
-                <a:spAutoFit/>
-              </a:bodyPr>
-              <a:lstStyle/>
-              <a:p>
-                <a14:m>
-                  <m:oMath xmlns:m="http://schemas.openxmlformats.org/officeDocument/2006/math">
-                    <m:f>
-                      <m:fPr>
-                        <m:ctrlPr>
-                          <a:rPr lang="en-US" sz="3600" i="1" smtClean="0">
-                            <a:latin typeface="Cambria Math" panose="02040503050406030204" pitchFamily="18" charset="0"/>
-                          </a:rPr>
-                        </m:ctrlPr>
-                      </m:fPr>
-                      <m:num>
-                        <m:r>
-                          <a:rPr lang="en-US" sz="3600" i="1">
-                            <a:latin typeface="Cambria Math" panose="02040503050406030204" pitchFamily="18" charset="0"/>
-                          </a:rPr>
-                          <m:t>𝑃</m:t>
-                        </m:r>
-                        <m:r>
-                          <a:rPr lang="en-US" sz="3600" b="0" i="1" smtClean="0">
-                            <a:latin typeface="Cambria Math" panose="02040503050406030204" pitchFamily="18" charset="0"/>
-                          </a:rPr>
-                          <m:t>𝑜𝑢𝑡</m:t>
-                        </m:r>
-                      </m:num>
-                      <m:den>
-                        <m:r>
-                          <a:rPr lang="en-US" sz="3600" b="0" i="1" smtClean="0">
-                            <a:latin typeface="Cambria Math" panose="02040503050406030204" pitchFamily="18" charset="0"/>
-                          </a:rPr>
-                          <m:t>𝑃𝑖𝑛</m:t>
-                        </m:r>
-                      </m:den>
-                    </m:f>
-                  </m:oMath>
-                </a14:m>
-                <a:r>
-                  <a:rPr lang="en-US" sz="3600" dirty="0">
-                    <a:latin typeface="Cambria" panose="02040503050406030204" pitchFamily="18" charset="0"/>
-                    <a:ea typeface="Cambria" panose="02040503050406030204" pitchFamily="18" charset="0"/>
-                  </a:rPr>
-                  <a:t> = Attenuation</a:t>
-                </a:r>
-              </a:p>
-            </p:txBody>
-          </p:sp>
-        </mc:Choice>
-        <mc:Fallback xmlns="">
-          <p:sp>
-            <p:nvSpPr>
-              <p:cNvPr id="7" name="TextBox 6">
-                <a:extLst>
-                  <a:ext uri="{FF2B5EF4-FFF2-40B4-BE49-F238E27FC236}">
-                    <a16:creationId xmlns:a16="http://schemas.microsoft.com/office/drawing/2014/main" id="{CA9F5996-A1DB-2C21-2C6E-E62C75A2C1EF}"/>
-                  </a:ext>
-                </a:extLst>
-              </p:cNvPr>
-              <p:cNvSpPr txBox="1">
-                <a:spLocks noRot="1" noChangeAspect="1" noMove="1" noResize="1" noEditPoints="1" noAdjustHandles="1" noChangeArrowheads="1" noChangeShapeType="1" noTextEdit="1"/>
-              </p:cNvSpPr>
-              <p:nvPr/>
-            </p:nvSpPr>
-            <p:spPr>
-              <a:xfrm>
-                <a:off x="3389721" y="1934360"/>
-                <a:ext cx="6118412" cy="879087"/>
-              </a:xfrm>
-              <a:prstGeom prst="rect">
-                <a:avLst/>
-              </a:prstGeom>
-              <a:blipFill>
-                <a:blip r:embed="rId2"/>
-                <a:stretch>
-                  <a:fillRect b="-10345"/>
-                </a:stretch>
-              </a:blipFill>
-            </p:spPr>
-            <p:txBody>
-              <a:bodyPr/>
-              <a:lstStyle/>
-              <a:p>
-                <a:r>
-                  <a:rPr lang="en-US">
-                    <a:noFill/>
-                  </a:rPr>
-                  <a:t> </a:t>
-                </a:r>
-              </a:p>
-            </p:txBody>
-          </p:sp>
-        </mc:Fallback>
-      </mc:AlternateContent>
-      <p:sp>
-        <p:nvSpPr>
-          <p:cNvPr id="10" name="TextBox 9">
-            <a:extLst>
-              <a:ext uri="{FF2B5EF4-FFF2-40B4-BE49-F238E27FC236}">
-                <a16:creationId xmlns:a16="http://schemas.microsoft.com/office/drawing/2014/main" id="{14B9F19E-8A5A-908A-6D48-5C1907929FE0}"/>
-              </a:ext>
-            </a:extLst>
-          </p:cNvPr>
-          <p:cNvSpPr txBox="1"/>
-          <p:nvPr/>
-        </p:nvSpPr>
-        <p:spPr>
-          <a:xfrm>
-            <a:off x="433137" y="395575"/>
-            <a:ext cx="11639468" cy="1200329"/>
-          </a:xfrm>
-          <a:prstGeom prst="rect">
-            <a:avLst/>
-          </a:prstGeom>
-          <a:noFill/>
-        </p:spPr>
-        <p:txBody>
-          <a:bodyPr wrap="none" rtlCol="0">
-            <a:spAutoFit/>
-          </a:bodyPr>
-          <a:lstStyle/>
-          <a:p>
-            <a:r>
-              <a:rPr lang="en-US" sz="3600" dirty="0">
-                <a:solidFill>
-                  <a:srgbClr val="FF0000"/>
-                </a:solidFill>
-                <a:latin typeface="Cambria" panose="02040503050406030204" pitchFamily="18" charset="0"/>
-                <a:ea typeface="Cambria" panose="02040503050406030204" pitchFamily="18" charset="0"/>
-              </a:rPr>
-              <a:t>Attenuation</a:t>
-            </a:r>
-            <a:r>
-              <a:rPr lang="en-US" sz="3600" dirty="0">
-                <a:latin typeface="Cambria" panose="02040503050406030204" pitchFamily="18" charset="0"/>
-                <a:ea typeface="Cambria" panose="02040503050406030204" pitchFamily="18" charset="0"/>
-              </a:rPr>
-              <a:t> is the reduction in signal strength or power as </a:t>
-            </a:r>
-          </a:p>
-          <a:p>
-            <a:r>
-              <a:rPr lang="en-US" sz="3600" dirty="0">
-                <a:latin typeface="Cambria" panose="02040503050406030204" pitchFamily="18" charset="0"/>
-                <a:ea typeface="Cambria" panose="02040503050406030204" pitchFamily="18" charset="0"/>
-              </a:rPr>
-              <a:t>it travels through a medium</a:t>
-            </a:r>
-          </a:p>
-        </p:txBody>
-      </p:sp>
-      <mc:AlternateContent xmlns:mc="http://schemas.openxmlformats.org/markup-compatibility/2006" xmlns:a14="http://schemas.microsoft.com/office/drawing/2010/main">
-        <mc:Choice Requires="a14">
-          <p:sp>
-            <p:nvSpPr>
-              <p:cNvPr id="3" name="TextBox 2">
-                <a:extLst>
-                  <a:ext uri="{FF2B5EF4-FFF2-40B4-BE49-F238E27FC236}">
-                    <a16:creationId xmlns:a16="http://schemas.microsoft.com/office/drawing/2014/main" id="{C5D02706-4AAF-DCC9-DE38-F2356FB371F6}"/>
-                  </a:ext>
-                </a:extLst>
-              </p:cNvPr>
-              <p:cNvSpPr txBox="1"/>
-              <p:nvPr/>
-            </p:nvSpPr>
-            <p:spPr>
-              <a:xfrm>
-                <a:off x="2361755" y="2813447"/>
-                <a:ext cx="7776856" cy="1167756"/>
-              </a:xfrm>
-              <a:prstGeom prst="rect">
-                <a:avLst/>
-              </a:prstGeom>
-              <a:noFill/>
-            </p:spPr>
-            <p:txBody>
-              <a:bodyPr wrap="square">
-                <a:spAutoFit/>
-              </a:bodyPr>
-              <a:lstStyle/>
-              <a:p>
-                <a:r>
-                  <a:rPr lang="en-US" sz="4000" dirty="0">
-                    <a:latin typeface="Cambria" panose="02040503050406030204"/>
-                    <a:ea typeface="Cambria" panose="02040503050406030204"/>
-                  </a:rPr>
-                  <a:t>Attenuation</a:t>
-                </a:r>
-                <a:r>
-                  <a:rPr lang="en-US" sz="4000" dirty="0">
-                    <a:solidFill>
-                      <a:schemeClr val="tx1"/>
-                    </a:solidFill>
-                    <a:latin typeface="Cambria" panose="02040503050406030204"/>
-                    <a:ea typeface="Cambria" panose="02040503050406030204"/>
-                  </a:rPr>
-                  <a:t> </a:t>
-                </a:r>
-                <a14:m>
-                  <m:oMath xmlns:m="http://schemas.openxmlformats.org/officeDocument/2006/math">
-                    <m:d>
-                      <m:dPr>
-                        <m:ctrlPr>
-                          <a:rPr lang="en-US" sz="4000" i="1">
-                            <a:solidFill>
-                              <a:schemeClr val="tx1"/>
-                            </a:solidFill>
-                            <a:latin typeface="Cambria Math" panose="02040503050406030204" pitchFamily="18" charset="0"/>
-                          </a:rPr>
-                        </m:ctrlPr>
-                      </m:dPr>
-                      <m:e>
-                        <m:r>
-                          <a:rPr lang="en-US" sz="4000" i="1">
-                            <a:solidFill>
-                              <a:schemeClr val="tx1"/>
-                            </a:solidFill>
-                            <a:latin typeface="Cambria Math" panose="02040503050406030204" pitchFamily="18" charset="0"/>
-                          </a:rPr>
-                          <m:t>𝑑𝐵</m:t>
-                        </m:r>
-                      </m:e>
-                    </m:d>
-                    <m:r>
-                      <a:rPr lang="en-US" sz="4000">
-                        <a:solidFill>
-                          <a:schemeClr val="tx1"/>
-                        </a:solidFill>
-                        <a:latin typeface="Cambria Math" panose="02040503050406030204" pitchFamily="18" charset="0"/>
-                      </a:rPr>
-                      <m:t>=10</m:t>
-                    </m:r>
-                    <m:r>
-                      <a:rPr lang="en-US" sz="4000" i="1">
-                        <a:solidFill>
-                          <a:schemeClr val="tx1"/>
-                        </a:solidFill>
-                        <a:latin typeface="Cambria Math" panose="02040503050406030204" pitchFamily="18" charset="0"/>
-                      </a:rPr>
-                      <m:t> </m:t>
-                    </m:r>
-                    <m:sSubSup>
-                      <m:sSubSupPr>
-                        <m:ctrlPr>
-                          <a:rPr lang="en-US" sz="4000" i="1" smtClean="0">
-                            <a:solidFill>
-                              <a:schemeClr val="tx1"/>
-                            </a:solidFill>
-                            <a:latin typeface="Cambria Math" panose="02040503050406030204" pitchFamily="18" charset="0"/>
-                          </a:rPr>
-                        </m:ctrlPr>
-                      </m:sSubSupPr>
-                      <m:e>
-                        <m:r>
-                          <a:rPr lang="en-US" sz="4000" i="1">
-                            <a:solidFill>
-                              <a:schemeClr val="tx1"/>
-                            </a:solidFill>
-                            <a:latin typeface="Cambria Math" panose="02040503050406030204" pitchFamily="18" charset="0"/>
-                          </a:rPr>
-                          <m:t>𝑙𝑜𝑔</m:t>
-                        </m:r>
-                      </m:e>
-                      <m:sub>
-                        <m:r>
-                          <a:rPr lang="en-US" sz="4000" i="0">
-                            <a:solidFill>
-                              <a:schemeClr val="tx1"/>
-                            </a:solidFill>
-                            <a:latin typeface="Cambria Math" panose="02040503050406030204" pitchFamily="18" charset="0"/>
-                          </a:rPr>
-                          <m:t>10</m:t>
-                        </m:r>
-                      </m:sub>
-                      <m:sup>
-                        <m:d>
-                          <m:dPr>
-                            <m:ctrlPr>
-                              <a:rPr lang="en-US" sz="4000" i="1">
-                                <a:solidFill>
-                                  <a:schemeClr val="tx1"/>
-                                </a:solidFill>
-                                <a:latin typeface="Cambria Math" panose="02040503050406030204" pitchFamily="18" charset="0"/>
-                              </a:rPr>
-                            </m:ctrlPr>
-                          </m:dPr>
-                          <m:e>
-                            <m:f>
-                              <m:fPr>
-                                <m:ctrlPr>
-                                  <a:rPr lang="en-US" sz="4000" i="1">
-                                    <a:solidFill>
-                                      <a:schemeClr val="tx1"/>
-                                    </a:solidFill>
-                                    <a:latin typeface="Cambria Math" panose="02040503050406030204" pitchFamily="18" charset="0"/>
-                                  </a:rPr>
-                                </m:ctrlPr>
-                              </m:fPr>
-                              <m:num>
-                                <m:r>
-                                  <a:rPr lang="en-US" sz="4000" i="1">
-                                    <a:solidFill>
-                                      <a:schemeClr val="tx1"/>
-                                    </a:solidFill>
-                                    <a:latin typeface="Cambria Math" panose="02040503050406030204" pitchFamily="18" charset="0"/>
-                                  </a:rPr>
-                                  <m:t>𝑃</m:t>
-                                </m:r>
-                                <m:r>
-                                  <a:rPr lang="en-US" sz="4000" b="0" i="1" smtClean="0">
-                                    <a:solidFill>
-                                      <a:schemeClr val="tx1"/>
-                                    </a:solidFill>
-                                    <a:latin typeface="Cambria Math" panose="02040503050406030204" pitchFamily="18" charset="0"/>
-                                  </a:rPr>
-                                  <m:t>𝑜𝑢𝑡</m:t>
-                                </m:r>
-                              </m:num>
-                              <m:den>
-                                <m:r>
-                                  <a:rPr lang="en-US" sz="4000" b="0" i="1" smtClean="0">
-                                    <a:solidFill>
-                                      <a:schemeClr val="tx1"/>
-                                    </a:solidFill>
-                                    <a:latin typeface="Cambria Math" panose="02040503050406030204" pitchFamily="18" charset="0"/>
-                                  </a:rPr>
-                                  <m:t>𝑃𝑖𝑛</m:t>
-                                </m:r>
-                              </m:den>
-                            </m:f>
-                          </m:e>
-                        </m:d>
-                      </m:sup>
-                    </m:sSubSup>
-                  </m:oMath>
-                </a14:m>
-                <a:endParaRPr lang="en-US" sz="4000" dirty="0">
-                  <a:solidFill>
-                    <a:schemeClr val="tx1"/>
-                  </a:solidFill>
-                  <a:latin typeface="Cambria" panose="02040503050406030204"/>
-                  <a:ea typeface="Cambria" panose="02040503050406030204"/>
-                </a:endParaRPr>
-              </a:p>
-            </p:txBody>
-          </p:sp>
-        </mc:Choice>
-        <mc:Fallback xmlns="">
-          <p:sp>
-            <p:nvSpPr>
-              <p:cNvPr id="3" name="TextBox 2">
-                <a:extLst>
-                  <a:ext uri="{FF2B5EF4-FFF2-40B4-BE49-F238E27FC236}">
-                    <a16:creationId xmlns:a16="http://schemas.microsoft.com/office/drawing/2014/main" id="{C5D02706-4AAF-DCC9-DE38-F2356FB371F6}"/>
-                  </a:ext>
-                </a:extLst>
-              </p:cNvPr>
-              <p:cNvSpPr txBox="1">
-                <a:spLocks noRot="1" noChangeAspect="1" noMove="1" noResize="1" noEditPoints="1" noAdjustHandles="1" noChangeArrowheads="1" noChangeShapeType="1" noTextEdit="1"/>
-              </p:cNvSpPr>
-              <p:nvPr/>
-            </p:nvSpPr>
-            <p:spPr>
-              <a:xfrm>
-                <a:off x="2361755" y="2813447"/>
-                <a:ext cx="7776856" cy="1167756"/>
-              </a:xfrm>
-              <a:prstGeom prst="rect">
-                <a:avLst/>
-              </a:prstGeom>
-              <a:blipFill>
-                <a:blip r:embed="rId3"/>
-                <a:stretch>
-                  <a:fillRect l="-2743" b="-16230"/>
-                </a:stretch>
-              </a:blipFill>
-            </p:spPr>
-            <p:txBody>
-              <a:bodyPr/>
-              <a:lstStyle/>
-              <a:p>
-                <a:r>
-                  <a:rPr lang="en-US">
-                    <a:noFill/>
-                  </a:rPr>
-                  <a:t> </a:t>
-                </a:r>
-              </a:p>
-            </p:txBody>
-          </p:sp>
-        </mc:Fallback>
-      </mc:AlternateContent>
-      <mc:AlternateContent xmlns:mc="http://schemas.openxmlformats.org/markup-compatibility/2006" xmlns:a14="http://schemas.microsoft.com/office/drawing/2010/main">
-        <mc:Choice Requires="a14">
-          <p:sp>
-            <p:nvSpPr>
-              <p:cNvPr id="4" name="TextBox 3">
-                <a:extLst>
-                  <a:ext uri="{FF2B5EF4-FFF2-40B4-BE49-F238E27FC236}">
-                    <a16:creationId xmlns:a16="http://schemas.microsoft.com/office/drawing/2014/main" id="{11DD9D7A-EF8D-C1EC-49AF-0D4D1470C700}"/>
-                  </a:ext>
-                </a:extLst>
-              </p:cNvPr>
-              <p:cNvSpPr txBox="1"/>
-              <p:nvPr/>
-            </p:nvSpPr>
-            <p:spPr>
-              <a:xfrm>
-                <a:off x="2361754" y="4404682"/>
-                <a:ext cx="9076267" cy="857414"/>
-              </a:xfrm>
-              <a:prstGeom prst="rect">
-                <a:avLst/>
-              </a:prstGeom>
-              <a:noFill/>
-            </p:spPr>
-            <p:txBody>
-              <a:bodyPr wrap="square">
-                <a:spAutoFit/>
-              </a:bodyPr>
-              <a:lstStyle/>
-              <a:p>
-                <a:r>
-                  <a:rPr lang="en-US" sz="4000" dirty="0">
-                    <a:solidFill>
-                      <a:schemeClr val="tx1"/>
-                    </a:solidFill>
-                    <a:latin typeface="Cambria" panose="02040503050406030204"/>
-                    <a:ea typeface="Cambria" panose="02040503050406030204"/>
-                  </a:rPr>
-                  <a:t>Attenuation </a:t>
-                </a:r>
-                <a14:m>
-                  <m:oMath xmlns:m="http://schemas.openxmlformats.org/officeDocument/2006/math">
-                    <m:d>
-                      <m:dPr>
-                        <m:ctrlPr>
-                          <a:rPr lang="en-US" sz="4000" i="1">
-                            <a:solidFill>
-                              <a:schemeClr val="tx1"/>
-                            </a:solidFill>
-                            <a:latin typeface="Cambria Math" panose="02040503050406030204" pitchFamily="18" charset="0"/>
-                          </a:rPr>
-                        </m:ctrlPr>
-                      </m:dPr>
-                      <m:e>
-                        <m:r>
-                          <a:rPr lang="en-US" sz="4000" i="1">
-                            <a:solidFill>
-                              <a:schemeClr val="tx1"/>
-                            </a:solidFill>
-                            <a:latin typeface="Cambria Math" panose="02040503050406030204" pitchFamily="18" charset="0"/>
-                          </a:rPr>
-                          <m:t>𝑑𝐵</m:t>
-                        </m:r>
-                      </m:e>
-                    </m:d>
-                    <m:r>
-                      <a:rPr lang="en-US" sz="4000">
-                        <a:solidFill>
-                          <a:schemeClr val="tx1"/>
-                        </a:solidFill>
-                        <a:latin typeface="Cambria Math" panose="02040503050406030204" pitchFamily="18" charset="0"/>
-                      </a:rPr>
-                      <m:t>=10</m:t>
-                    </m:r>
-                    <m:r>
-                      <a:rPr lang="en-US" sz="4000" i="1">
-                        <a:solidFill>
-                          <a:schemeClr val="tx1"/>
-                        </a:solidFill>
-                        <a:latin typeface="Cambria Math" panose="02040503050406030204" pitchFamily="18" charset="0"/>
-                      </a:rPr>
-                      <m:t> </m:t>
-                    </m:r>
-                    <m:sSubSup>
-                      <m:sSubSupPr>
-                        <m:ctrlPr>
-                          <a:rPr lang="en-US" sz="4000" i="1" smtClean="0">
-                            <a:solidFill>
-                              <a:schemeClr val="tx1"/>
-                            </a:solidFill>
-                            <a:latin typeface="Cambria Math" panose="02040503050406030204" pitchFamily="18" charset="0"/>
-                          </a:rPr>
-                        </m:ctrlPr>
-                      </m:sSubSupPr>
-                      <m:e>
-                        <m:r>
-                          <a:rPr lang="en-US" sz="4000" i="1">
-                            <a:solidFill>
-                              <a:schemeClr val="tx1"/>
-                            </a:solidFill>
-                            <a:latin typeface="Cambria Math" panose="02040503050406030204" pitchFamily="18" charset="0"/>
-                          </a:rPr>
-                          <m:t>𝑙𝑜𝑔</m:t>
-                        </m:r>
-                      </m:e>
-                      <m:sub>
-                        <m:r>
-                          <a:rPr lang="en-US" sz="4000" i="0">
-                            <a:solidFill>
-                              <a:schemeClr val="tx1"/>
-                            </a:solidFill>
-                            <a:latin typeface="Cambria Math" panose="02040503050406030204" pitchFamily="18" charset="0"/>
-                          </a:rPr>
-                          <m:t>10</m:t>
-                        </m:r>
-                      </m:sub>
-                      <m:sup>
-                        <m:d>
-                          <m:dPr>
-                            <m:ctrlPr>
-                              <a:rPr lang="en-US" sz="4000" i="1">
-                                <a:solidFill>
-                                  <a:schemeClr val="tx1"/>
-                                </a:solidFill>
-                                <a:latin typeface="Cambria Math" panose="02040503050406030204" pitchFamily="18" charset="0"/>
-                              </a:rPr>
-                            </m:ctrlPr>
-                          </m:dPr>
-                          <m:e>
-                            <m:r>
-                              <a:rPr lang="en-US" sz="4000" b="0" i="1" smtClean="0">
-                                <a:solidFill>
-                                  <a:schemeClr val="tx1"/>
-                                </a:solidFill>
-                                <a:latin typeface="Cambria Math" panose="02040503050406030204" pitchFamily="18" charset="0"/>
-                              </a:rPr>
-                              <m:t>𝐴𝑡𝑡𝑒𝑛𝑢𝑎𝑡𝑖𝑜𝑛</m:t>
-                            </m:r>
-                          </m:e>
-                        </m:d>
-                      </m:sup>
-                    </m:sSubSup>
-                  </m:oMath>
-                </a14:m>
-                <a:endParaRPr lang="en-US" sz="4000" dirty="0">
-                  <a:solidFill>
-                    <a:schemeClr val="tx1"/>
-                  </a:solidFill>
-                  <a:latin typeface="Cambria" panose="02040503050406030204"/>
-                  <a:ea typeface="Cambria" panose="02040503050406030204"/>
-                </a:endParaRPr>
-              </a:p>
-            </p:txBody>
-          </p:sp>
-        </mc:Choice>
-        <mc:Fallback xmlns="">
-          <p:sp>
-            <p:nvSpPr>
-              <p:cNvPr id="4" name="TextBox 3">
-                <a:extLst>
-                  <a:ext uri="{FF2B5EF4-FFF2-40B4-BE49-F238E27FC236}">
-                    <a16:creationId xmlns:a16="http://schemas.microsoft.com/office/drawing/2014/main" id="{11DD9D7A-EF8D-C1EC-49AF-0D4D1470C700}"/>
-                  </a:ext>
-                </a:extLst>
-              </p:cNvPr>
-              <p:cNvSpPr txBox="1">
-                <a:spLocks noRot="1" noChangeAspect="1" noMove="1" noResize="1" noEditPoints="1" noAdjustHandles="1" noChangeArrowheads="1" noChangeShapeType="1" noTextEdit="1"/>
-              </p:cNvSpPr>
-              <p:nvPr/>
-            </p:nvSpPr>
-            <p:spPr>
-              <a:xfrm>
-                <a:off x="2361754" y="4404682"/>
-                <a:ext cx="9076267" cy="857414"/>
-              </a:xfrm>
-              <a:prstGeom prst="rect">
-                <a:avLst/>
-              </a:prstGeom>
-              <a:blipFill>
-                <a:blip r:embed="rId4"/>
-                <a:stretch>
-                  <a:fillRect l="-2351" b="-26429"/>
-                </a:stretch>
-              </a:blipFill>
-            </p:spPr>
-            <p:txBody>
-              <a:bodyPr/>
-              <a:lstStyle/>
-              <a:p>
-                <a:r>
-                  <a:rPr lang="en-US">
-                    <a:noFill/>
-                  </a:rPr>
-                  <a:t> </a:t>
-                </a:r>
-              </a:p>
-            </p:txBody>
-          </p:sp>
-        </mc:Fallback>
-      </mc:AlternateContent>
-    </p:spTree>
-    <p:extLst>
-      <p:ext uri="{BB962C8B-B14F-4D97-AF65-F5344CB8AC3E}">
-        <p14:creationId xmlns:p14="http://schemas.microsoft.com/office/powerpoint/2010/main" val="1692717821"/>
-      </p:ext>
-    </p:extLst>
-  </p:cSld>
-  <p:clrMapOvr>
-    <a:masterClrMapping/>
-  </p:clrMapOvr>
+  <p:timing>
+    <p:tnLst>
+      <p:par>
+        <p:cTn id="1" dur="indefinite" restart="never" nodeType="tmRoot">
+          <p:childTnLst>
+            <p:seq concurrent="1" nextAc="seek">
+              <p:cTn id="2" dur="indefinite" nodeType="mainSeq">
+                <p:childTnLst>
+                  <p:par>
+                    <p:cTn id="3" fill="hold">
+                      <p:stCondLst>
+                        <p:cond delay="indefinite"/>
+                        <p:cond evt="onBegin" delay="0">
+                          <p:tn val="2"/>
+                        </p:cond>
+                      </p:stCondLst>
+                      <p:childTnLst>
+                        <p:par>
+                          <p:cTn id="4" fill="hold">
+                            <p:stCondLst>
+                              <p:cond delay="0"/>
+                            </p:stCondLst>
+                            <p:childTnLst>
+                              <p:par>
+                                <p:cTn id="5" presetID="22" presetClass="entr" presetSubtype="8" fill="hold" grpId="0" nodeType="withEffect">
+                                  <p:stCondLst>
+                                    <p:cond delay="0"/>
+                                  </p:stCondLst>
+                                  <p:childTnLst>
+                                    <p:set>
+                                      <p:cBhvr>
+                                        <p:cTn id="6" dur="1" fill="hold">
+                                          <p:stCondLst>
+                                            <p:cond delay="0"/>
+                                          </p:stCondLst>
+                                        </p:cTn>
+                                        <p:tgtEl>
+                                          <p:spTgt spid="10"/>
+                                        </p:tgtEl>
+                                        <p:attrNameLst>
+                                          <p:attrName>style.visibility</p:attrName>
+                                        </p:attrNameLst>
+                                      </p:cBhvr>
+                                      <p:to>
+                                        <p:strVal val="visible"/>
+                                      </p:to>
+                                    </p:set>
+                                    <p:animEffect transition="in" filter="wipe(left)">
+                                      <p:cBhvr>
+                                        <p:cTn id="7" dur="500"/>
+                                        <p:tgtEl>
+                                          <p:spTgt spid="10"/>
+                                        </p:tgtEl>
+                                      </p:cBhvr>
+                                    </p:animEffect>
+                                  </p:childTnLst>
+                                </p:cTn>
+                              </p:par>
+                            </p:childTnLst>
+                          </p:cTn>
+                        </p:par>
+                        <p:par>
+                          <p:cTn id="8" fill="hold">
+                            <p:stCondLst>
+                              <p:cond delay="500"/>
+                            </p:stCondLst>
+                            <p:childTnLst>
+                              <p:par>
+                                <p:cTn id="9" presetID="22" presetClass="entr" presetSubtype="8" fill="hold" grpId="0" nodeType="afterEffect">
+                                  <p:stCondLst>
+                                    <p:cond delay="0"/>
+                                  </p:stCondLst>
+                                  <p:childTnLst>
+                                    <p:set>
+                                      <p:cBhvr>
+                                        <p:cTn id="10" dur="1" fill="hold">
+                                          <p:stCondLst>
+                                            <p:cond delay="0"/>
+                                          </p:stCondLst>
+                                        </p:cTn>
+                                        <p:tgtEl>
+                                          <p:spTgt spid="7"/>
+                                        </p:tgtEl>
+                                        <p:attrNameLst>
+                                          <p:attrName>style.visibility</p:attrName>
+                                        </p:attrNameLst>
+                                      </p:cBhvr>
+                                      <p:to>
+                                        <p:strVal val="visible"/>
+                                      </p:to>
+                                    </p:set>
+                                    <p:animEffect transition="in" filter="wipe(left)">
+                                      <p:cBhvr>
+                                        <p:cTn id="11" dur="500"/>
+                                        <p:tgtEl>
+                                          <p:spTgt spid="7"/>
+                                        </p:tgtEl>
+                                      </p:cBhvr>
+                                    </p:animEffect>
+                                  </p:childTnLst>
+                                </p:cTn>
+                              </p:par>
+                            </p:childTnLst>
+                          </p:cTn>
+                        </p:par>
+                        <p:par>
+                          <p:cTn id="12" fill="hold">
+                            <p:stCondLst>
+                              <p:cond delay="1000"/>
+                            </p:stCondLst>
+                            <p:childTnLst>
+                              <p:par>
+                                <p:cTn id="13" presetID="22" presetClass="entr" presetSubtype="4" fill="hold" grpId="0" nodeType="afterEffect">
+                                  <p:stCondLst>
+                                    <p:cond delay="0"/>
+                                  </p:stCondLst>
+                                  <p:childTnLst>
+                                    <p:set>
+                                      <p:cBhvr>
+                                        <p:cTn id="14" dur="1" fill="hold">
+                                          <p:stCondLst>
+                                            <p:cond delay="0"/>
+                                          </p:stCondLst>
+                                        </p:cTn>
+                                        <p:tgtEl>
+                                          <p:spTgt spid="4"/>
+                                        </p:tgtEl>
+                                        <p:attrNameLst>
+                                          <p:attrName>style.visibility</p:attrName>
+                                        </p:attrNameLst>
+                                      </p:cBhvr>
+                                      <p:to>
+                                        <p:strVal val="visible"/>
+                                      </p:to>
+                                    </p:set>
+                                    <p:animEffect transition="in" filter="wipe(down)">
+                                      <p:cBhvr>
+                                        <p:cTn id="15" dur="500"/>
+                                        <p:tgtEl>
+                                          <p:spTgt spid="4"/>
+                                        </p:tgtEl>
+                                      </p:cBhvr>
+                                    </p:animEffect>
+                                  </p:childTnLst>
+                                </p:cTn>
+                              </p:par>
+                            </p:childTnLst>
+                          </p:cTn>
+                        </p:par>
+                        <p:par>
+                          <p:cTn id="16" fill="hold">
+                            <p:stCondLst>
+                              <p:cond delay="1500"/>
+                            </p:stCondLst>
+                            <p:childTnLst>
+                              <p:par>
+                                <p:cTn id="17" presetID="22" presetClass="entr" presetSubtype="8" fill="hold" nodeType="afterEffect">
+                                  <p:stCondLst>
+                                    <p:cond delay="0"/>
+                                  </p:stCondLst>
+                                  <p:childTnLst>
+                                    <p:set>
+                                      <p:cBhvr>
+                                        <p:cTn id="18" dur="1" fill="hold">
+                                          <p:stCondLst>
+                                            <p:cond delay="0"/>
+                                          </p:stCondLst>
+                                        </p:cTn>
+                                        <p:tgtEl>
+                                          <p:spTgt spid="5"/>
+                                        </p:tgtEl>
+                                        <p:attrNameLst>
+                                          <p:attrName>style.visibility</p:attrName>
+                                        </p:attrNameLst>
+                                      </p:cBhvr>
+                                      <p:to>
+                                        <p:strVal val="visible"/>
+                                      </p:to>
+                                    </p:set>
+                                    <p:animEffect transition="in" filter="wipe(left)">
+                                      <p:cBhvr>
+                                        <p:cTn id="19" dur="500"/>
+                                        <p:tgtEl>
+                                          <p:spTgt spid="5"/>
+                                        </p:tgtEl>
+                                      </p:cBhvr>
+                                    </p:animEffect>
+                                  </p:childTnLst>
+                                </p:cTn>
+                              </p:par>
+                              <p:par>
+                                <p:cTn id="20" presetID="22" presetClass="entr" presetSubtype="8" fill="hold" grpId="0" nodeType="withEffect">
+                                  <p:stCondLst>
+                                    <p:cond delay="0"/>
+                                  </p:stCondLst>
+                                  <p:childTnLst>
+                                    <p:set>
+                                      <p:cBhvr>
+                                        <p:cTn id="21" dur="1" fill="hold">
+                                          <p:stCondLst>
+                                            <p:cond delay="0"/>
+                                          </p:stCondLst>
+                                        </p:cTn>
+                                        <p:tgtEl>
+                                          <p:spTgt spid="18"/>
+                                        </p:tgtEl>
+                                        <p:attrNameLst>
+                                          <p:attrName>style.visibility</p:attrName>
+                                        </p:attrNameLst>
+                                      </p:cBhvr>
+                                      <p:to>
+                                        <p:strVal val="visible"/>
+                                      </p:to>
+                                    </p:set>
+                                    <p:animEffect transition="in" filter="wipe(left)">
+                                      <p:cBhvr>
+                                        <p:cTn id="22" dur="500"/>
+                                        <p:tgtEl>
+                                          <p:spTgt spid="18"/>
+                                        </p:tgtEl>
+                                      </p:cBhvr>
+                                    </p:animEffect>
+                                  </p:childTnLst>
+                                </p:cTn>
+                              </p:par>
+                            </p:childTnLst>
+                          </p:cTn>
+                        </p:par>
+                        <p:par>
+                          <p:cTn id="23" fill="hold">
+                            <p:stCondLst>
+                              <p:cond delay="2000"/>
+                            </p:stCondLst>
+                            <p:childTnLst>
+                              <p:par>
+                                <p:cTn id="24" presetID="22" presetClass="entr" presetSubtype="8" fill="hold" grpId="0" nodeType="afterEffect">
+                                  <p:stCondLst>
+                                    <p:cond delay="0"/>
+                                  </p:stCondLst>
+                                  <p:childTnLst>
+                                    <p:set>
+                                      <p:cBhvr>
+                                        <p:cTn id="25" dur="1" fill="hold">
+                                          <p:stCondLst>
+                                            <p:cond delay="0"/>
+                                          </p:stCondLst>
+                                        </p:cTn>
+                                        <p:tgtEl>
+                                          <p:spTgt spid="17"/>
+                                        </p:tgtEl>
+                                        <p:attrNameLst>
+                                          <p:attrName>style.visibility</p:attrName>
+                                        </p:attrNameLst>
+                                      </p:cBhvr>
+                                      <p:to>
+                                        <p:strVal val="visible"/>
+                                      </p:to>
+                                    </p:set>
+                                    <p:animEffect transition="in" filter="wipe(left)">
+                                      <p:cBhvr>
+                                        <p:cTn id="26" dur="500"/>
+                                        <p:tgtEl>
+                                          <p:spTgt spid="17"/>
+                                        </p:tgtEl>
+                                      </p:cBhvr>
+                                    </p:animEffect>
+                                  </p:childTnLst>
+                                </p:cTn>
+                              </p:par>
+                            </p:childTnLst>
+                          </p:cTn>
+                        </p:par>
+                        <p:par>
+                          <p:cTn id="27" fill="hold">
+                            <p:stCondLst>
+                              <p:cond delay="2500"/>
+                            </p:stCondLst>
+                            <p:childTnLst>
+                              <p:par>
+                                <p:cTn id="28" presetID="22" presetClass="entr" presetSubtype="8" fill="hold" nodeType="afterEffect">
+                                  <p:stCondLst>
+                                    <p:cond delay="0"/>
+                                  </p:stCondLst>
+                                  <p:childTnLst>
+                                    <p:set>
+                                      <p:cBhvr>
+                                        <p:cTn id="29" dur="1" fill="hold">
+                                          <p:stCondLst>
+                                            <p:cond delay="0"/>
+                                          </p:stCondLst>
+                                        </p:cTn>
+                                        <p:tgtEl>
+                                          <p:spTgt spid="13"/>
+                                        </p:tgtEl>
+                                        <p:attrNameLst>
+                                          <p:attrName>style.visibility</p:attrName>
+                                        </p:attrNameLst>
+                                      </p:cBhvr>
+                                      <p:to>
+                                        <p:strVal val="visible"/>
+                                      </p:to>
+                                    </p:set>
+                                    <p:animEffect transition="in" filter="wipe(left)">
+                                      <p:cBhvr>
+                                        <p:cTn id="30" dur="500"/>
+                                        <p:tgtEl>
+                                          <p:spTgt spid="13"/>
+                                        </p:tgtEl>
+                                      </p:cBhvr>
+                                    </p:animEffect>
+                                  </p:childTnLst>
+                                </p:cTn>
+                              </p:par>
+                            </p:childTnLst>
+                          </p:cTn>
+                        </p:par>
+                        <p:par>
+                          <p:cTn id="31" fill="hold">
+                            <p:stCondLst>
+                              <p:cond delay="3000"/>
+                            </p:stCondLst>
+                            <p:childTnLst>
+                              <p:par>
+                                <p:cTn id="32" presetID="22" presetClass="entr" presetSubtype="8" fill="hold" grpId="0" nodeType="afterEffect">
+                                  <p:stCondLst>
+                                    <p:cond delay="0"/>
+                                  </p:stCondLst>
+                                  <p:childTnLst>
+                                    <p:set>
+                                      <p:cBhvr>
+                                        <p:cTn id="33" dur="1" fill="hold">
+                                          <p:stCondLst>
+                                            <p:cond delay="0"/>
+                                          </p:stCondLst>
+                                        </p:cTn>
+                                        <p:tgtEl>
+                                          <p:spTgt spid="19"/>
+                                        </p:tgtEl>
+                                        <p:attrNameLst>
+                                          <p:attrName>style.visibility</p:attrName>
+                                        </p:attrNameLst>
+                                      </p:cBhvr>
+                                      <p:to>
+                                        <p:strVal val="visible"/>
+                                      </p:to>
+                                    </p:set>
+                                    <p:animEffect transition="in" filter="wipe(left)">
+                                      <p:cBhvr>
+                                        <p:cTn id="34" dur="500"/>
+                                        <p:tgtEl>
+                                          <p:spTgt spid="19"/>
+                                        </p:tgtEl>
+                                      </p:cBhvr>
+                                    </p:animEffect>
+                                  </p:childTnLst>
+                                </p:cTn>
+                              </p:par>
+                            </p:childTnLst>
+                          </p:cTn>
+                        </p:par>
+                      </p:childTnLst>
+                    </p:cTn>
+                  </p:par>
+                </p:childTnLst>
+              </p:cTn>
+              <p:prevCondLst>
+                <p:cond evt="onPrev" delay="0">
+                  <p:tgtEl>
+                    <p:sldTgt/>
+                  </p:tgtEl>
+                </p:cond>
+              </p:prevCondLst>
+              <p:nextCondLst>
+                <p:cond evt="onNext" delay="0">
+                  <p:tgtEl>
+                    <p:sldTgt/>
+                  </p:tgtEl>
+                </p:cond>
+              </p:nextCondLst>
+            </p:seq>
+          </p:childTnLst>
+        </p:cTn>
+      </p:par>
+    </p:tnLst>
+    <p:bldLst>
+      <p:bldP spid="7" grpId="0"/>
+      <p:bldP spid="10" grpId="0"/>
+      <p:bldP spid="17" grpId="0"/>
+      <p:bldP spid="18" grpId="0"/>
+      <p:bldP spid="19" grpId="0"/>
+      <p:bldP spid="4" grpId="0" animBg="1"/>
+    </p:bldLst>
+  </p:timing>
 </p:sld>
 </file>
 
@@ -20031,6 +23473,922 @@
 </file>
 
 <file path=ppt/slides/slide30.xml><?xml version="1.0" encoding="utf-8"?>
+<p:sld xmlns:a="http://schemas.openxmlformats.org/drawingml/2006/main" xmlns:r="http://schemas.openxmlformats.org/officeDocument/2006/relationships" xmlns:p="http://schemas.openxmlformats.org/presentationml/2006/main">
+  <p:cSld>
+    <p:spTree>
+      <p:nvGrpSpPr>
+        <p:cNvPr id="1" name="">
+          <a:extLst>
+            <a:ext uri="{FF2B5EF4-FFF2-40B4-BE49-F238E27FC236}">
+              <a16:creationId xmlns:a16="http://schemas.microsoft.com/office/drawing/2014/main" id="{721FD537-CDB6-0498-E3FD-69E266F4EF63}"/>
+            </a:ext>
+          </a:extLst>
+        </p:cNvPr>
+        <p:cNvGrpSpPr/>
+        <p:nvPr/>
+      </p:nvGrpSpPr>
+      <p:grpSpPr>
+        <a:xfrm>
+          <a:off x="0" y="0"/>
+          <a:ext cx="0" cy="0"/>
+          <a:chOff x="0" y="0"/>
+          <a:chExt cx="0" cy="0"/>
+        </a:xfrm>
+      </p:grpSpPr>
+      <p:sp>
+        <p:nvSpPr>
+          <p:cNvPr id="2" name="TextBox 1">
+            <a:extLst>
+              <a:ext uri="{FF2B5EF4-FFF2-40B4-BE49-F238E27FC236}">
+                <a16:creationId xmlns:a16="http://schemas.microsoft.com/office/drawing/2014/main" id="{C49AFE59-5C0A-7143-67D9-1E619FFFE4E2}"/>
+              </a:ext>
+            </a:extLst>
+          </p:cNvPr>
+          <p:cNvSpPr txBox="1"/>
+          <p:nvPr/>
+        </p:nvSpPr>
+        <p:spPr>
+          <a:xfrm>
+            <a:off x="10992196" y="0"/>
+            <a:ext cx="1199804" cy="369332"/>
+          </a:xfrm>
+          <a:prstGeom prst="rect">
+            <a:avLst/>
+          </a:prstGeom>
+          <a:noFill/>
+        </p:spPr>
+        <p:txBody>
+          <a:bodyPr wrap="square">
+            <a:spAutoFit/>
+          </a:bodyPr>
+          <a:lstStyle/>
+          <a:p>
+            <a:r>
+              <a:rPr lang="en-US" dirty="0">
+                <a:latin typeface="Berlin Sans FB" panose="020E0602020502020306" pitchFamily="34" charset="0"/>
+              </a:rPr>
+              <a:t>Buda Tech</a:t>
+            </a:r>
+          </a:p>
+        </p:txBody>
+      </p:sp>
+      <mc:AlternateContent xmlns:mc="http://schemas.openxmlformats.org/markup-compatibility/2006" xmlns:a14="http://schemas.microsoft.com/office/drawing/2010/main">
+        <mc:Choice Requires="a14">
+          <p:sp>
+            <p:nvSpPr>
+              <p:cNvPr id="7" name="TextBox 6">
+                <a:extLst>
+                  <a:ext uri="{FF2B5EF4-FFF2-40B4-BE49-F238E27FC236}">
+                    <a16:creationId xmlns:a16="http://schemas.microsoft.com/office/drawing/2014/main" id="{CA9F5996-A1DB-2C21-2C6E-E62C75A2C1EF}"/>
+                  </a:ext>
+                </a:extLst>
+              </p:cNvPr>
+              <p:cNvSpPr txBox="1"/>
+              <p:nvPr/>
+            </p:nvSpPr>
+            <p:spPr>
+              <a:xfrm>
+                <a:off x="3389721" y="1934360"/>
+                <a:ext cx="6118412" cy="879087"/>
+              </a:xfrm>
+              <a:prstGeom prst="rect">
+                <a:avLst/>
+              </a:prstGeom>
+              <a:noFill/>
+            </p:spPr>
+            <p:txBody>
+              <a:bodyPr wrap="square">
+                <a:spAutoFit/>
+              </a:bodyPr>
+              <a:lstStyle/>
+              <a:p>
+                <a14:m>
+                  <m:oMath xmlns:m="http://schemas.openxmlformats.org/officeDocument/2006/math">
+                    <m:f>
+                      <m:fPr>
+                        <m:ctrlPr>
+                          <a:rPr lang="en-US" sz="3600" i="1" smtClean="0">
+                            <a:latin typeface="Cambria Math" panose="02040503050406030204" pitchFamily="18" charset="0"/>
+                          </a:rPr>
+                        </m:ctrlPr>
+                      </m:fPr>
+                      <m:num>
+                        <m:r>
+                          <a:rPr lang="en-US" sz="3600" i="1">
+                            <a:latin typeface="Cambria Math" panose="02040503050406030204" pitchFamily="18" charset="0"/>
+                          </a:rPr>
+                          <m:t>𝑃</m:t>
+                        </m:r>
+                        <m:r>
+                          <a:rPr lang="en-US" sz="3600" b="0" i="1" smtClean="0">
+                            <a:latin typeface="Cambria Math" panose="02040503050406030204" pitchFamily="18" charset="0"/>
+                          </a:rPr>
+                          <m:t>𝑜𝑢𝑡</m:t>
+                        </m:r>
+                      </m:num>
+                      <m:den>
+                        <m:r>
+                          <a:rPr lang="en-US" sz="3600" b="0" i="1" smtClean="0">
+                            <a:latin typeface="Cambria Math" panose="02040503050406030204" pitchFamily="18" charset="0"/>
+                          </a:rPr>
+                          <m:t>𝑃𝑖𝑛</m:t>
+                        </m:r>
+                      </m:den>
+                    </m:f>
+                  </m:oMath>
+                </a14:m>
+                <a:r>
+                  <a:rPr lang="en-US" sz="3600" dirty="0">
+                    <a:latin typeface="Cambria" panose="02040503050406030204" pitchFamily="18" charset="0"/>
+                    <a:ea typeface="Cambria" panose="02040503050406030204" pitchFamily="18" charset="0"/>
+                  </a:rPr>
+                  <a:t> = Attenuation</a:t>
+                </a:r>
+              </a:p>
+            </p:txBody>
+          </p:sp>
+        </mc:Choice>
+        <mc:Fallback xmlns="">
+          <p:sp>
+            <p:nvSpPr>
+              <p:cNvPr id="7" name="TextBox 6">
+                <a:extLst>
+                  <a:ext uri="{FF2B5EF4-FFF2-40B4-BE49-F238E27FC236}">
+                    <a16:creationId xmlns:a16="http://schemas.microsoft.com/office/drawing/2014/main" id="{CA9F5996-A1DB-2C21-2C6E-E62C75A2C1EF}"/>
+                  </a:ext>
+                </a:extLst>
+              </p:cNvPr>
+              <p:cNvSpPr txBox="1">
+                <a:spLocks noRot="1" noChangeAspect="1" noMove="1" noResize="1" noEditPoints="1" noAdjustHandles="1" noChangeArrowheads="1" noChangeShapeType="1" noTextEdit="1"/>
+              </p:cNvSpPr>
+              <p:nvPr/>
+            </p:nvSpPr>
+            <p:spPr>
+              <a:xfrm>
+                <a:off x="3389721" y="1934360"/>
+                <a:ext cx="6118412" cy="879087"/>
+              </a:xfrm>
+              <a:prstGeom prst="rect">
+                <a:avLst/>
+              </a:prstGeom>
+              <a:blipFill>
+                <a:blip r:embed="rId2"/>
+                <a:stretch>
+                  <a:fillRect b="-10345"/>
+                </a:stretch>
+              </a:blipFill>
+            </p:spPr>
+            <p:txBody>
+              <a:bodyPr/>
+              <a:lstStyle/>
+              <a:p>
+                <a:r>
+                  <a:rPr lang="en-US">
+                    <a:noFill/>
+                  </a:rPr>
+                  <a:t> </a:t>
+                </a:r>
+              </a:p>
+            </p:txBody>
+          </p:sp>
+        </mc:Fallback>
+      </mc:AlternateContent>
+      <p:sp>
+        <p:nvSpPr>
+          <p:cNvPr id="10" name="TextBox 9">
+            <a:extLst>
+              <a:ext uri="{FF2B5EF4-FFF2-40B4-BE49-F238E27FC236}">
+                <a16:creationId xmlns:a16="http://schemas.microsoft.com/office/drawing/2014/main" id="{14B9F19E-8A5A-908A-6D48-5C1907929FE0}"/>
+              </a:ext>
+            </a:extLst>
+          </p:cNvPr>
+          <p:cNvSpPr txBox="1"/>
+          <p:nvPr/>
+        </p:nvSpPr>
+        <p:spPr>
+          <a:xfrm>
+            <a:off x="433137" y="395575"/>
+            <a:ext cx="11639468" cy="1200329"/>
+          </a:xfrm>
+          <a:prstGeom prst="rect">
+            <a:avLst/>
+          </a:prstGeom>
+          <a:noFill/>
+        </p:spPr>
+        <p:txBody>
+          <a:bodyPr wrap="none" rtlCol="0">
+            <a:spAutoFit/>
+          </a:bodyPr>
+          <a:lstStyle/>
+          <a:p>
+            <a:r>
+              <a:rPr lang="en-US" sz="3600" dirty="0">
+                <a:solidFill>
+                  <a:srgbClr val="FF0000"/>
+                </a:solidFill>
+                <a:latin typeface="Cambria" panose="02040503050406030204" pitchFamily="18" charset="0"/>
+                <a:ea typeface="Cambria" panose="02040503050406030204" pitchFamily="18" charset="0"/>
+              </a:rPr>
+              <a:t>Attenuation</a:t>
+            </a:r>
+            <a:r>
+              <a:rPr lang="en-US" sz="3600" dirty="0">
+                <a:latin typeface="Cambria" panose="02040503050406030204" pitchFamily="18" charset="0"/>
+                <a:ea typeface="Cambria" panose="02040503050406030204" pitchFamily="18" charset="0"/>
+              </a:rPr>
+              <a:t> is the reduction in signal strength or power as </a:t>
+            </a:r>
+          </a:p>
+          <a:p>
+            <a:r>
+              <a:rPr lang="en-US" sz="3600" dirty="0">
+                <a:latin typeface="Cambria" panose="02040503050406030204" pitchFamily="18" charset="0"/>
+                <a:ea typeface="Cambria" panose="02040503050406030204" pitchFamily="18" charset="0"/>
+              </a:rPr>
+              <a:t>it travels through a medium</a:t>
+            </a:r>
+          </a:p>
+        </p:txBody>
+      </p:sp>
+      <mc:AlternateContent xmlns:mc="http://schemas.openxmlformats.org/markup-compatibility/2006" xmlns:a14="http://schemas.microsoft.com/office/drawing/2010/main">
+        <mc:Choice Requires="a14">
+          <p:sp>
+            <p:nvSpPr>
+              <p:cNvPr id="3" name="TextBox 2">
+                <a:extLst>
+                  <a:ext uri="{FF2B5EF4-FFF2-40B4-BE49-F238E27FC236}">
+                    <a16:creationId xmlns:a16="http://schemas.microsoft.com/office/drawing/2014/main" id="{C5D02706-4AAF-DCC9-DE38-F2356FB371F6}"/>
+                  </a:ext>
+                </a:extLst>
+              </p:cNvPr>
+              <p:cNvSpPr txBox="1"/>
+              <p:nvPr/>
+            </p:nvSpPr>
+            <p:spPr>
+              <a:xfrm>
+                <a:off x="2361755" y="2813447"/>
+                <a:ext cx="7776856" cy="1167756"/>
+              </a:xfrm>
+              <a:prstGeom prst="rect">
+                <a:avLst/>
+              </a:prstGeom>
+              <a:noFill/>
+            </p:spPr>
+            <p:txBody>
+              <a:bodyPr wrap="square">
+                <a:spAutoFit/>
+              </a:bodyPr>
+              <a:lstStyle/>
+              <a:p>
+                <a:r>
+                  <a:rPr lang="en-US" sz="4000" dirty="0">
+                    <a:latin typeface="Cambria" panose="02040503050406030204"/>
+                    <a:ea typeface="Cambria" panose="02040503050406030204"/>
+                  </a:rPr>
+                  <a:t>Attenuation</a:t>
+                </a:r>
+                <a:r>
+                  <a:rPr lang="en-US" sz="4000" dirty="0">
+                    <a:solidFill>
+                      <a:schemeClr val="tx1"/>
+                    </a:solidFill>
+                    <a:latin typeface="Cambria" panose="02040503050406030204"/>
+                    <a:ea typeface="Cambria" panose="02040503050406030204"/>
+                  </a:rPr>
+                  <a:t> </a:t>
+                </a:r>
+                <a14:m>
+                  <m:oMath xmlns:m="http://schemas.openxmlformats.org/officeDocument/2006/math">
+                    <m:d>
+                      <m:dPr>
+                        <m:ctrlPr>
+                          <a:rPr lang="en-US" sz="4000" i="1">
+                            <a:solidFill>
+                              <a:schemeClr val="tx1"/>
+                            </a:solidFill>
+                            <a:latin typeface="Cambria Math" panose="02040503050406030204" pitchFamily="18" charset="0"/>
+                          </a:rPr>
+                        </m:ctrlPr>
+                      </m:dPr>
+                      <m:e>
+                        <m:r>
+                          <a:rPr lang="en-US" sz="4000" i="1">
+                            <a:solidFill>
+                              <a:schemeClr val="tx1"/>
+                            </a:solidFill>
+                            <a:latin typeface="Cambria Math" panose="02040503050406030204" pitchFamily="18" charset="0"/>
+                          </a:rPr>
+                          <m:t>𝑑𝐵</m:t>
+                        </m:r>
+                      </m:e>
+                    </m:d>
+                    <m:r>
+                      <a:rPr lang="en-US" sz="4000">
+                        <a:solidFill>
+                          <a:schemeClr val="tx1"/>
+                        </a:solidFill>
+                        <a:latin typeface="Cambria Math" panose="02040503050406030204" pitchFamily="18" charset="0"/>
+                      </a:rPr>
+                      <m:t>=10</m:t>
+                    </m:r>
+                    <m:r>
+                      <a:rPr lang="en-US" sz="4000" i="1">
+                        <a:solidFill>
+                          <a:schemeClr val="tx1"/>
+                        </a:solidFill>
+                        <a:latin typeface="Cambria Math" panose="02040503050406030204" pitchFamily="18" charset="0"/>
+                      </a:rPr>
+                      <m:t> </m:t>
+                    </m:r>
+                    <m:sSubSup>
+                      <m:sSubSupPr>
+                        <m:ctrlPr>
+                          <a:rPr lang="en-US" sz="4000" i="1" smtClean="0">
+                            <a:solidFill>
+                              <a:schemeClr val="tx1"/>
+                            </a:solidFill>
+                            <a:latin typeface="Cambria Math" panose="02040503050406030204" pitchFamily="18" charset="0"/>
+                          </a:rPr>
+                        </m:ctrlPr>
+                      </m:sSubSupPr>
+                      <m:e>
+                        <m:r>
+                          <a:rPr lang="en-US" sz="4000" i="1">
+                            <a:solidFill>
+                              <a:schemeClr val="tx1"/>
+                            </a:solidFill>
+                            <a:latin typeface="Cambria Math" panose="02040503050406030204" pitchFamily="18" charset="0"/>
+                          </a:rPr>
+                          <m:t>𝑙𝑜𝑔</m:t>
+                        </m:r>
+                      </m:e>
+                      <m:sub>
+                        <m:r>
+                          <a:rPr lang="en-US" sz="4000" i="0">
+                            <a:solidFill>
+                              <a:schemeClr val="tx1"/>
+                            </a:solidFill>
+                            <a:latin typeface="Cambria Math" panose="02040503050406030204" pitchFamily="18" charset="0"/>
+                          </a:rPr>
+                          <m:t>10</m:t>
+                        </m:r>
+                      </m:sub>
+                      <m:sup>
+                        <m:d>
+                          <m:dPr>
+                            <m:ctrlPr>
+                              <a:rPr lang="en-US" sz="4000" i="1">
+                                <a:solidFill>
+                                  <a:schemeClr val="tx1"/>
+                                </a:solidFill>
+                                <a:latin typeface="Cambria Math" panose="02040503050406030204" pitchFamily="18" charset="0"/>
+                              </a:rPr>
+                            </m:ctrlPr>
+                          </m:dPr>
+                          <m:e>
+                            <m:f>
+                              <m:fPr>
+                                <m:ctrlPr>
+                                  <a:rPr lang="en-US" sz="4000" i="1">
+                                    <a:solidFill>
+                                      <a:schemeClr val="tx1"/>
+                                    </a:solidFill>
+                                    <a:latin typeface="Cambria Math" panose="02040503050406030204" pitchFamily="18" charset="0"/>
+                                  </a:rPr>
+                                </m:ctrlPr>
+                              </m:fPr>
+                              <m:num>
+                                <m:r>
+                                  <a:rPr lang="en-US" sz="4000" i="1">
+                                    <a:solidFill>
+                                      <a:schemeClr val="tx1"/>
+                                    </a:solidFill>
+                                    <a:latin typeface="Cambria Math" panose="02040503050406030204" pitchFamily="18" charset="0"/>
+                                  </a:rPr>
+                                  <m:t>𝑃</m:t>
+                                </m:r>
+                                <m:r>
+                                  <a:rPr lang="en-US" sz="4000" b="0" i="1" smtClean="0">
+                                    <a:solidFill>
+                                      <a:schemeClr val="tx1"/>
+                                    </a:solidFill>
+                                    <a:latin typeface="Cambria Math" panose="02040503050406030204" pitchFamily="18" charset="0"/>
+                                  </a:rPr>
+                                  <m:t>𝑜𝑢𝑡</m:t>
+                                </m:r>
+                              </m:num>
+                              <m:den>
+                                <m:r>
+                                  <a:rPr lang="en-US" sz="4000" b="0" i="1" smtClean="0">
+                                    <a:solidFill>
+                                      <a:schemeClr val="tx1"/>
+                                    </a:solidFill>
+                                    <a:latin typeface="Cambria Math" panose="02040503050406030204" pitchFamily="18" charset="0"/>
+                                  </a:rPr>
+                                  <m:t>𝑃𝑖𝑛</m:t>
+                                </m:r>
+                              </m:den>
+                            </m:f>
+                          </m:e>
+                        </m:d>
+                      </m:sup>
+                    </m:sSubSup>
+                  </m:oMath>
+                </a14:m>
+                <a:endParaRPr lang="en-US" sz="4000" dirty="0">
+                  <a:solidFill>
+                    <a:schemeClr val="tx1"/>
+                  </a:solidFill>
+                  <a:latin typeface="Cambria" panose="02040503050406030204"/>
+                  <a:ea typeface="Cambria" panose="02040503050406030204"/>
+                </a:endParaRPr>
+              </a:p>
+            </p:txBody>
+          </p:sp>
+        </mc:Choice>
+        <mc:Fallback xmlns="">
+          <p:sp>
+            <p:nvSpPr>
+              <p:cNvPr id="3" name="TextBox 2">
+                <a:extLst>
+                  <a:ext uri="{FF2B5EF4-FFF2-40B4-BE49-F238E27FC236}">
+                    <a16:creationId xmlns:a16="http://schemas.microsoft.com/office/drawing/2014/main" id="{C5D02706-4AAF-DCC9-DE38-F2356FB371F6}"/>
+                  </a:ext>
+                </a:extLst>
+              </p:cNvPr>
+              <p:cNvSpPr txBox="1">
+                <a:spLocks noRot="1" noChangeAspect="1" noMove="1" noResize="1" noEditPoints="1" noAdjustHandles="1" noChangeArrowheads="1" noChangeShapeType="1" noTextEdit="1"/>
+              </p:cNvSpPr>
+              <p:nvPr/>
+            </p:nvSpPr>
+            <p:spPr>
+              <a:xfrm>
+                <a:off x="2361755" y="2813447"/>
+                <a:ext cx="7776856" cy="1167756"/>
+              </a:xfrm>
+              <a:prstGeom prst="rect">
+                <a:avLst/>
+              </a:prstGeom>
+              <a:blipFill>
+                <a:blip r:embed="rId3"/>
+                <a:stretch>
+                  <a:fillRect l="-2743" b="-16230"/>
+                </a:stretch>
+              </a:blipFill>
+            </p:spPr>
+            <p:txBody>
+              <a:bodyPr/>
+              <a:lstStyle/>
+              <a:p>
+                <a:r>
+                  <a:rPr lang="en-US">
+                    <a:noFill/>
+                  </a:rPr>
+                  <a:t> </a:t>
+                </a:r>
+              </a:p>
+            </p:txBody>
+          </p:sp>
+        </mc:Fallback>
+      </mc:AlternateContent>
+      <mc:AlternateContent xmlns:mc="http://schemas.openxmlformats.org/markup-compatibility/2006" xmlns:a14="http://schemas.microsoft.com/office/drawing/2010/main">
+        <mc:Choice Requires="a14">
+          <p:sp>
+            <p:nvSpPr>
+              <p:cNvPr id="4" name="TextBox 3">
+                <a:extLst>
+                  <a:ext uri="{FF2B5EF4-FFF2-40B4-BE49-F238E27FC236}">
+                    <a16:creationId xmlns:a16="http://schemas.microsoft.com/office/drawing/2014/main" id="{11DD9D7A-EF8D-C1EC-49AF-0D4D1470C700}"/>
+                  </a:ext>
+                </a:extLst>
+              </p:cNvPr>
+              <p:cNvSpPr txBox="1"/>
+              <p:nvPr/>
+            </p:nvSpPr>
+            <p:spPr>
+              <a:xfrm>
+                <a:off x="2361754" y="4404682"/>
+                <a:ext cx="9076267" cy="857414"/>
+              </a:xfrm>
+              <a:prstGeom prst="rect">
+                <a:avLst/>
+              </a:prstGeom>
+              <a:noFill/>
+            </p:spPr>
+            <p:txBody>
+              <a:bodyPr wrap="square">
+                <a:spAutoFit/>
+              </a:bodyPr>
+              <a:lstStyle/>
+              <a:p>
+                <a:r>
+                  <a:rPr lang="en-US" sz="4000" dirty="0">
+                    <a:solidFill>
+                      <a:schemeClr val="tx1"/>
+                    </a:solidFill>
+                    <a:latin typeface="Cambria" panose="02040503050406030204"/>
+                    <a:ea typeface="Cambria" panose="02040503050406030204"/>
+                  </a:rPr>
+                  <a:t>Attenuation </a:t>
+                </a:r>
+                <a14:m>
+                  <m:oMath xmlns:m="http://schemas.openxmlformats.org/officeDocument/2006/math">
+                    <m:d>
+                      <m:dPr>
+                        <m:ctrlPr>
+                          <a:rPr lang="en-US" sz="4000" i="1">
+                            <a:solidFill>
+                              <a:schemeClr val="tx1"/>
+                            </a:solidFill>
+                            <a:latin typeface="Cambria Math" panose="02040503050406030204" pitchFamily="18" charset="0"/>
+                          </a:rPr>
+                        </m:ctrlPr>
+                      </m:dPr>
+                      <m:e>
+                        <m:r>
+                          <a:rPr lang="en-US" sz="4000" i="1">
+                            <a:solidFill>
+                              <a:schemeClr val="tx1"/>
+                            </a:solidFill>
+                            <a:latin typeface="Cambria Math" panose="02040503050406030204" pitchFamily="18" charset="0"/>
+                          </a:rPr>
+                          <m:t>𝑑𝐵</m:t>
+                        </m:r>
+                      </m:e>
+                    </m:d>
+                    <m:r>
+                      <a:rPr lang="en-US" sz="4000">
+                        <a:solidFill>
+                          <a:schemeClr val="tx1"/>
+                        </a:solidFill>
+                        <a:latin typeface="Cambria Math" panose="02040503050406030204" pitchFamily="18" charset="0"/>
+                      </a:rPr>
+                      <m:t>=10</m:t>
+                    </m:r>
+                    <m:r>
+                      <a:rPr lang="en-US" sz="4000" i="1">
+                        <a:solidFill>
+                          <a:schemeClr val="tx1"/>
+                        </a:solidFill>
+                        <a:latin typeface="Cambria Math" panose="02040503050406030204" pitchFamily="18" charset="0"/>
+                      </a:rPr>
+                      <m:t> </m:t>
+                    </m:r>
+                    <m:sSubSup>
+                      <m:sSubSupPr>
+                        <m:ctrlPr>
+                          <a:rPr lang="en-US" sz="4000" i="1" smtClean="0">
+                            <a:solidFill>
+                              <a:schemeClr val="tx1"/>
+                            </a:solidFill>
+                            <a:latin typeface="Cambria Math" panose="02040503050406030204" pitchFamily="18" charset="0"/>
+                          </a:rPr>
+                        </m:ctrlPr>
+                      </m:sSubSupPr>
+                      <m:e>
+                        <m:r>
+                          <a:rPr lang="en-US" sz="4000" i="1">
+                            <a:solidFill>
+                              <a:schemeClr val="tx1"/>
+                            </a:solidFill>
+                            <a:latin typeface="Cambria Math" panose="02040503050406030204" pitchFamily="18" charset="0"/>
+                          </a:rPr>
+                          <m:t>𝑙𝑜𝑔</m:t>
+                        </m:r>
+                      </m:e>
+                      <m:sub>
+                        <m:r>
+                          <a:rPr lang="en-US" sz="4000" i="0">
+                            <a:solidFill>
+                              <a:schemeClr val="tx1"/>
+                            </a:solidFill>
+                            <a:latin typeface="Cambria Math" panose="02040503050406030204" pitchFamily="18" charset="0"/>
+                          </a:rPr>
+                          <m:t>10</m:t>
+                        </m:r>
+                      </m:sub>
+                      <m:sup>
+                        <m:d>
+                          <m:dPr>
+                            <m:ctrlPr>
+                              <a:rPr lang="en-US" sz="4000" i="1">
+                                <a:solidFill>
+                                  <a:schemeClr val="tx1"/>
+                                </a:solidFill>
+                                <a:latin typeface="Cambria Math" panose="02040503050406030204" pitchFamily="18" charset="0"/>
+                              </a:rPr>
+                            </m:ctrlPr>
+                          </m:dPr>
+                          <m:e>
+                            <m:r>
+                              <a:rPr lang="en-US" sz="4000" b="0" i="1" smtClean="0">
+                                <a:solidFill>
+                                  <a:schemeClr val="tx1"/>
+                                </a:solidFill>
+                                <a:latin typeface="Cambria Math" panose="02040503050406030204" pitchFamily="18" charset="0"/>
+                              </a:rPr>
+                              <m:t>𝐴𝑡𝑡𝑒𝑛𝑢𝑎𝑡𝑖𝑜𝑛</m:t>
+                            </m:r>
+                          </m:e>
+                        </m:d>
+                      </m:sup>
+                    </m:sSubSup>
+                  </m:oMath>
+                </a14:m>
+                <a:endParaRPr lang="en-US" sz="4000" dirty="0">
+                  <a:solidFill>
+                    <a:schemeClr val="tx1"/>
+                  </a:solidFill>
+                  <a:latin typeface="Cambria" panose="02040503050406030204"/>
+                  <a:ea typeface="Cambria" panose="02040503050406030204"/>
+                </a:endParaRPr>
+              </a:p>
+            </p:txBody>
+          </p:sp>
+        </mc:Choice>
+        <mc:Fallback xmlns="">
+          <p:sp>
+            <p:nvSpPr>
+              <p:cNvPr id="4" name="TextBox 3">
+                <a:extLst>
+                  <a:ext uri="{FF2B5EF4-FFF2-40B4-BE49-F238E27FC236}">
+                    <a16:creationId xmlns:a16="http://schemas.microsoft.com/office/drawing/2014/main" id="{11DD9D7A-EF8D-C1EC-49AF-0D4D1470C700}"/>
+                  </a:ext>
+                </a:extLst>
+              </p:cNvPr>
+              <p:cNvSpPr txBox="1">
+                <a:spLocks noRot="1" noChangeAspect="1" noMove="1" noResize="1" noEditPoints="1" noAdjustHandles="1" noChangeArrowheads="1" noChangeShapeType="1" noTextEdit="1"/>
+              </p:cNvSpPr>
+              <p:nvPr/>
+            </p:nvSpPr>
+            <p:spPr>
+              <a:xfrm>
+                <a:off x="2361754" y="4404682"/>
+                <a:ext cx="9076267" cy="857414"/>
+              </a:xfrm>
+              <a:prstGeom prst="rect">
+                <a:avLst/>
+              </a:prstGeom>
+              <a:blipFill>
+                <a:blip r:embed="rId4"/>
+                <a:stretch>
+                  <a:fillRect l="-2351" b="-26429"/>
+                </a:stretch>
+              </a:blipFill>
+            </p:spPr>
+            <p:txBody>
+              <a:bodyPr/>
+              <a:lstStyle/>
+              <a:p>
+                <a:r>
+                  <a:rPr lang="en-US">
+                    <a:noFill/>
+                  </a:rPr>
+                  <a:t> </a:t>
+                </a:r>
+              </a:p>
+            </p:txBody>
+          </p:sp>
+        </mc:Fallback>
+      </mc:AlternateContent>
+    </p:spTree>
+    <p:extLst>
+      <p:ext uri="{BB962C8B-B14F-4D97-AF65-F5344CB8AC3E}">
+        <p14:creationId xmlns:p14="http://schemas.microsoft.com/office/powerpoint/2010/main" val="1692717821"/>
+      </p:ext>
+    </p:extLst>
+  </p:cSld>
+  <p:clrMapOvr>
+    <a:masterClrMapping/>
+  </p:clrMapOvr>
+  <p:timing>
+    <p:tnLst>
+      <p:par>
+        <p:cTn id="1" dur="indefinite" restart="never" nodeType="tmRoot">
+          <p:childTnLst>
+            <p:seq concurrent="1" nextAc="seek">
+              <p:cTn id="2" dur="indefinite" nodeType="mainSeq">
+                <p:childTnLst>
+                  <p:par>
+                    <p:cTn id="3" fill="hold">
+                      <p:stCondLst>
+                        <p:cond delay="indefinite"/>
+                        <p:cond evt="onBegin" delay="0">
+                          <p:tn val="2"/>
+                        </p:cond>
+                      </p:stCondLst>
+                      <p:childTnLst>
+                        <p:par>
+                          <p:cTn id="4" fill="hold">
+                            <p:stCondLst>
+                              <p:cond delay="0"/>
+                            </p:stCondLst>
+                            <p:childTnLst>
+                              <p:par>
+                                <p:cTn id="5" presetID="22" presetClass="entr" presetSubtype="8" fill="hold" grpId="0" nodeType="withEffect">
+                                  <p:stCondLst>
+                                    <p:cond delay="0"/>
+                                  </p:stCondLst>
+                                  <p:childTnLst>
+                                    <p:set>
+                                      <p:cBhvr>
+                                        <p:cTn id="6" dur="1" fill="hold">
+                                          <p:stCondLst>
+                                            <p:cond delay="0"/>
+                                          </p:stCondLst>
+                                        </p:cTn>
+                                        <p:tgtEl>
+                                          <p:spTgt spid="10"/>
+                                        </p:tgtEl>
+                                        <p:attrNameLst>
+                                          <p:attrName>style.visibility</p:attrName>
+                                        </p:attrNameLst>
+                                      </p:cBhvr>
+                                      <p:to>
+                                        <p:strVal val="visible"/>
+                                      </p:to>
+                                    </p:set>
+                                    <p:animEffect transition="in" filter="wipe(left)">
+                                      <p:cBhvr>
+                                        <p:cTn id="7" dur="500"/>
+                                        <p:tgtEl>
+                                          <p:spTgt spid="10"/>
+                                        </p:tgtEl>
+                                      </p:cBhvr>
+                                    </p:animEffect>
+                                  </p:childTnLst>
+                                </p:cTn>
+                              </p:par>
+                            </p:childTnLst>
+                          </p:cTn>
+                        </p:par>
+                        <p:par>
+                          <p:cTn id="8" fill="hold">
+                            <p:stCondLst>
+                              <p:cond delay="500"/>
+                            </p:stCondLst>
+                            <p:childTnLst>
+                              <p:par>
+                                <p:cTn id="9" presetID="22" presetClass="entr" presetSubtype="8" fill="hold" grpId="0" nodeType="afterEffect">
+                                  <p:stCondLst>
+                                    <p:cond delay="0"/>
+                                  </p:stCondLst>
+                                  <p:childTnLst>
+                                    <p:set>
+                                      <p:cBhvr>
+                                        <p:cTn id="10" dur="1" fill="hold">
+                                          <p:stCondLst>
+                                            <p:cond delay="0"/>
+                                          </p:stCondLst>
+                                        </p:cTn>
+                                        <p:tgtEl>
+                                          <p:spTgt spid="7"/>
+                                        </p:tgtEl>
+                                        <p:attrNameLst>
+                                          <p:attrName>style.visibility</p:attrName>
+                                        </p:attrNameLst>
+                                      </p:cBhvr>
+                                      <p:to>
+                                        <p:strVal val="visible"/>
+                                      </p:to>
+                                    </p:set>
+                                    <p:animEffect transition="in" filter="wipe(left)">
+                                      <p:cBhvr>
+                                        <p:cTn id="11" dur="500"/>
+                                        <p:tgtEl>
+                                          <p:spTgt spid="7"/>
+                                        </p:tgtEl>
+                                      </p:cBhvr>
+                                    </p:animEffect>
+                                  </p:childTnLst>
+                                </p:cTn>
+                              </p:par>
+                            </p:childTnLst>
+                          </p:cTn>
+                        </p:par>
+                        <p:par>
+                          <p:cTn id="12" fill="hold">
+                            <p:stCondLst>
+                              <p:cond delay="1000"/>
+                            </p:stCondLst>
+                            <p:childTnLst>
+                              <p:par>
+                                <p:cTn id="13" presetID="22" presetClass="entr" presetSubtype="8" fill="hold" grpId="0" nodeType="afterEffect">
+                                  <p:stCondLst>
+                                    <p:cond delay="0"/>
+                                  </p:stCondLst>
+                                  <p:childTnLst>
+                                    <p:set>
+                                      <p:cBhvr>
+                                        <p:cTn id="14" dur="1" fill="hold">
+                                          <p:stCondLst>
+                                            <p:cond delay="0"/>
+                                          </p:stCondLst>
+                                        </p:cTn>
+                                        <p:tgtEl>
+                                          <p:spTgt spid="3"/>
+                                        </p:tgtEl>
+                                        <p:attrNameLst>
+                                          <p:attrName>style.visibility</p:attrName>
+                                        </p:attrNameLst>
+                                      </p:cBhvr>
+                                      <p:to>
+                                        <p:strVal val="visible"/>
+                                      </p:to>
+                                    </p:set>
+                                    <p:animEffect transition="in" filter="wipe(left)">
+                                      <p:cBhvr>
+                                        <p:cTn id="15" dur="500"/>
+                                        <p:tgtEl>
+                                          <p:spTgt spid="3"/>
+                                        </p:tgtEl>
+                                      </p:cBhvr>
+                                    </p:animEffect>
+                                  </p:childTnLst>
+                                </p:cTn>
+                              </p:par>
+                            </p:childTnLst>
+                          </p:cTn>
+                        </p:par>
+                        <p:par>
+                          <p:cTn id="16" fill="hold">
+                            <p:stCondLst>
+                              <p:cond delay="1500"/>
+                            </p:stCondLst>
+                            <p:childTnLst>
+                              <p:par>
+                                <p:cTn id="17" presetID="22" presetClass="entr" presetSubtype="8" fill="hold" grpId="0" nodeType="afterEffect">
+                                  <p:stCondLst>
+                                    <p:cond delay="0"/>
+                                  </p:stCondLst>
+                                  <p:childTnLst>
+                                    <p:set>
+                                      <p:cBhvr>
+                                        <p:cTn id="18" dur="1" fill="hold">
+                                          <p:stCondLst>
+                                            <p:cond delay="0"/>
+                                          </p:stCondLst>
+                                        </p:cTn>
+                                        <p:tgtEl>
+                                          <p:spTgt spid="4"/>
+                                        </p:tgtEl>
+                                        <p:attrNameLst>
+                                          <p:attrName>style.visibility</p:attrName>
+                                        </p:attrNameLst>
+                                      </p:cBhvr>
+                                      <p:to>
+                                        <p:strVal val="visible"/>
+                                      </p:to>
+                                    </p:set>
+                                    <p:animEffect transition="in" filter="wipe(left)">
+                                      <p:cBhvr>
+                                        <p:cTn id="19" dur="500"/>
+                                        <p:tgtEl>
+                                          <p:spTgt spid="4"/>
+                                        </p:tgtEl>
+                                      </p:cBhvr>
+                                    </p:animEffect>
+                                  </p:childTnLst>
+                                </p:cTn>
+                              </p:par>
+                            </p:childTnLst>
+                          </p:cTn>
+                        </p:par>
+                      </p:childTnLst>
+                    </p:cTn>
+                  </p:par>
+                </p:childTnLst>
+              </p:cTn>
+              <p:prevCondLst>
+                <p:cond evt="onPrev" delay="0">
+                  <p:tgtEl>
+                    <p:sldTgt/>
+                  </p:tgtEl>
+                </p:cond>
+              </p:prevCondLst>
+              <p:nextCondLst>
+                <p:cond evt="onNext" delay="0">
+                  <p:tgtEl>
+                    <p:sldTgt/>
+                  </p:tgtEl>
+                </p:cond>
+              </p:nextCondLst>
+            </p:seq>
+          </p:childTnLst>
+        </p:cTn>
+      </p:par>
+    </p:tnLst>
+    <p:bldLst>
+      <p:bldP spid="7" grpId="0"/>
+      <p:bldP spid="10" grpId="0"/>
+      <p:bldP spid="3" grpId="0"/>
+      <p:bldP spid="4" grpId="0"/>
+    </p:bldLst>
+  </p:timing>
+</p:sld>
+</file>
+
+<file path=ppt/slides/slide31.xml><?xml version="1.0" encoding="utf-8"?>
 <p:sld xmlns:a="http://schemas.openxmlformats.org/drawingml/2006/main" xmlns:r="http://schemas.openxmlformats.org/officeDocument/2006/relationships" xmlns:p="http://schemas.openxmlformats.org/presentationml/2006/main">
   <p:cSld>
     <p:spTree>
@@ -20892,10 +25250,234 @@
   <p:clrMapOvr>
     <a:masterClrMapping/>
   </p:clrMapOvr>
+  <p:timing>
+    <p:tnLst>
+      <p:par>
+        <p:cTn id="1" dur="indefinite" restart="never" nodeType="tmRoot">
+          <p:childTnLst>
+            <p:seq concurrent="1" nextAc="seek">
+              <p:cTn id="2" dur="indefinite" nodeType="mainSeq">
+                <p:childTnLst>
+                  <p:par>
+                    <p:cTn id="3" fill="hold">
+                      <p:stCondLst>
+                        <p:cond delay="indefinite"/>
+                        <p:cond evt="onBegin" delay="0">
+                          <p:tn val="2"/>
+                        </p:cond>
+                      </p:stCondLst>
+                      <p:childTnLst>
+                        <p:par>
+                          <p:cTn id="4" fill="hold">
+                            <p:stCondLst>
+                              <p:cond delay="0"/>
+                            </p:stCondLst>
+                            <p:childTnLst>
+                              <p:par>
+                                <p:cTn id="5" presetID="22" presetClass="entr" presetSubtype="8" fill="hold" grpId="0" nodeType="withEffect">
+                                  <p:stCondLst>
+                                    <p:cond delay="0"/>
+                                  </p:stCondLst>
+                                  <p:childTnLst>
+                                    <p:set>
+                                      <p:cBhvr>
+                                        <p:cTn id="6" dur="1" fill="hold">
+                                          <p:stCondLst>
+                                            <p:cond delay="0"/>
+                                          </p:stCondLst>
+                                        </p:cTn>
+                                        <p:tgtEl>
+                                          <p:spTgt spid="7"/>
+                                        </p:tgtEl>
+                                        <p:attrNameLst>
+                                          <p:attrName>style.visibility</p:attrName>
+                                        </p:attrNameLst>
+                                      </p:cBhvr>
+                                      <p:to>
+                                        <p:strVal val="visible"/>
+                                      </p:to>
+                                    </p:set>
+                                    <p:animEffect transition="in" filter="wipe(left)">
+                                      <p:cBhvr>
+                                        <p:cTn id="7" dur="500"/>
+                                        <p:tgtEl>
+                                          <p:spTgt spid="7"/>
+                                        </p:tgtEl>
+                                      </p:cBhvr>
+                                    </p:animEffect>
+                                  </p:childTnLst>
+                                </p:cTn>
+                              </p:par>
+                            </p:childTnLst>
+                          </p:cTn>
+                        </p:par>
+                        <p:par>
+                          <p:cTn id="8" fill="hold">
+                            <p:stCondLst>
+                              <p:cond delay="500"/>
+                            </p:stCondLst>
+                            <p:childTnLst>
+                              <p:par>
+                                <p:cTn id="9" presetID="22" presetClass="entr" presetSubtype="8" fill="hold" grpId="0" nodeType="afterEffect">
+                                  <p:stCondLst>
+                                    <p:cond delay="0"/>
+                                  </p:stCondLst>
+                                  <p:childTnLst>
+                                    <p:set>
+                                      <p:cBhvr>
+                                        <p:cTn id="10" dur="1" fill="hold">
+                                          <p:stCondLst>
+                                            <p:cond delay="0"/>
+                                          </p:stCondLst>
+                                        </p:cTn>
+                                        <p:tgtEl>
+                                          <p:spTgt spid="5"/>
+                                        </p:tgtEl>
+                                        <p:attrNameLst>
+                                          <p:attrName>style.visibility</p:attrName>
+                                        </p:attrNameLst>
+                                      </p:cBhvr>
+                                      <p:to>
+                                        <p:strVal val="visible"/>
+                                      </p:to>
+                                    </p:set>
+                                    <p:animEffect transition="in" filter="wipe(left)">
+                                      <p:cBhvr>
+                                        <p:cTn id="11" dur="500"/>
+                                        <p:tgtEl>
+                                          <p:spTgt spid="5"/>
+                                        </p:tgtEl>
+                                      </p:cBhvr>
+                                    </p:animEffect>
+                                  </p:childTnLst>
+                                </p:cTn>
+                              </p:par>
+                            </p:childTnLst>
+                          </p:cTn>
+                        </p:par>
+                        <p:par>
+                          <p:cTn id="12" fill="hold">
+                            <p:stCondLst>
+                              <p:cond delay="1000"/>
+                            </p:stCondLst>
+                            <p:childTnLst>
+                              <p:par>
+                                <p:cTn id="13" presetID="22" presetClass="entr" presetSubtype="8" fill="hold" grpId="0" nodeType="afterEffect">
+                                  <p:stCondLst>
+                                    <p:cond delay="0"/>
+                                  </p:stCondLst>
+                                  <p:childTnLst>
+                                    <p:set>
+                                      <p:cBhvr>
+                                        <p:cTn id="14" dur="1" fill="hold">
+                                          <p:stCondLst>
+                                            <p:cond delay="0"/>
+                                          </p:stCondLst>
+                                        </p:cTn>
+                                        <p:tgtEl>
+                                          <p:spTgt spid="4"/>
+                                        </p:tgtEl>
+                                        <p:attrNameLst>
+                                          <p:attrName>style.visibility</p:attrName>
+                                        </p:attrNameLst>
+                                      </p:cBhvr>
+                                      <p:to>
+                                        <p:strVal val="visible"/>
+                                      </p:to>
+                                    </p:set>
+                                    <p:animEffect transition="in" filter="wipe(left)">
+                                      <p:cBhvr>
+                                        <p:cTn id="15" dur="500"/>
+                                        <p:tgtEl>
+                                          <p:spTgt spid="4"/>
+                                        </p:tgtEl>
+                                      </p:cBhvr>
+                                    </p:animEffect>
+                                  </p:childTnLst>
+                                </p:cTn>
+                              </p:par>
+                            </p:childTnLst>
+                          </p:cTn>
+                        </p:par>
+                        <p:par>
+                          <p:cTn id="16" fill="hold">
+                            <p:stCondLst>
+                              <p:cond delay="1500"/>
+                            </p:stCondLst>
+                            <p:childTnLst>
+                              <p:par>
+                                <p:cTn id="17" presetID="22" presetClass="entr" presetSubtype="8" fill="hold" grpId="0" nodeType="afterEffect">
+                                  <p:stCondLst>
+                                    <p:cond delay="0"/>
+                                  </p:stCondLst>
+                                  <p:childTnLst>
+                                    <p:set>
+                                      <p:cBhvr>
+                                        <p:cTn id="18" dur="1" fill="hold">
+                                          <p:stCondLst>
+                                            <p:cond delay="0"/>
+                                          </p:stCondLst>
+                                        </p:cTn>
+                                        <p:tgtEl>
+                                          <p:spTgt spid="6"/>
+                                        </p:tgtEl>
+                                        <p:attrNameLst>
+                                          <p:attrName>style.visibility</p:attrName>
+                                        </p:attrNameLst>
+                                      </p:cBhvr>
+                                      <p:to>
+                                        <p:strVal val="visible"/>
+                                      </p:to>
+                                    </p:set>
+                                    <p:animEffect transition="in" filter="wipe(left)">
+                                      <p:cBhvr>
+                                        <p:cTn id="19" dur="500"/>
+                                        <p:tgtEl>
+                                          <p:spTgt spid="6"/>
+                                        </p:tgtEl>
+                                      </p:cBhvr>
+                                    </p:animEffect>
+                                  </p:childTnLst>
+                                </p:cTn>
+                              </p:par>
+                            </p:childTnLst>
+                          </p:cTn>
+                        </p:par>
+                      </p:childTnLst>
+                    </p:cTn>
+                  </p:par>
+                </p:childTnLst>
+              </p:cTn>
+              <p:prevCondLst>
+                <p:cond evt="onPrev" delay="0">
+                  <p:tgtEl>
+                    <p:sldTgt/>
+                  </p:tgtEl>
+                </p:cond>
+              </p:prevCondLst>
+              <p:nextCondLst>
+                <p:cond evt="onNext" delay="0">
+                  <p:tgtEl>
+                    <p:sldTgt/>
+                  </p:tgtEl>
+                </p:cond>
+              </p:nextCondLst>
+            </p:seq>
+          </p:childTnLst>
+        </p:cTn>
+      </p:par>
+    </p:tnLst>
+    <p:bldLst>
+      <p:bldP spid="7" grpId="0"/>
+      <p:bldP spid="4" grpId="0"/>
+      <p:bldP spid="5" grpId="0"/>
+      <p:bldP spid="6" grpId="0"/>
+    </p:bldLst>
+  </p:timing>
 </p:sld>
 </file>
 
-<file path=ppt/slides/slide31.xml><?xml version="1.0" encoding="utf-8"?>
+<file path=ppt/slides/slide32.xml><?xml version="1.0" encoding="utf-8"?>
 <p:sld xmlns:a="http://schemas.openxmlformats.org/drawingml/2006/main" xmlns:r="http://schemas.openxmlformats.org/officeDocument/2006/relationships" xmlns:p="http://schemas.openxmlformats.org/presentationml/2006/main">
   <p:cSld>
     <p:spTree>
@@ -21693,10 +26275,234 @@
   <p:clrMapOvr>
     <a:masterClrMapping/>
   </p:clrMapOvr>
+  <p:timing>
+    <p:tnLst>
+      <p:par>
+        <p:cTn id="1" dur="indefinite" restart="never" nodeType="tmRoot">
+          <p:childTnLst>
+            <p:seq concurrent="1" nextAc="seek">
+              <p:cTn id="2" dur="indefinite" nodeType="mainSeq">
+                <p:childTnLst>
+                  <p:par>
+                    <p:cTn id="3" fill="hold">
+                      <p:stCondLst>
+                        <p:cond delay="indefinite"/>
+                        <p:cond evt="onBegin" delay="0">
+                          <p:tn val="2"/>
+                        </p:cond>
+                      </p:stCondLst>
+                      <p:childTnLst>
+                        <p:par>
+                          <p:cTn id="4" fill="hold">
+                            <p:stCondLst>
+                              <p:cond delay="0"/>
+                            </p:stCondLst>
+                            <p:childTnLst>
+                              <p:par>
+                                <p:cTn id="5" presetID="22" presetClass="entr" presetSubtype="8" fill="hold" grpId="0" nodeType="withEffect">
+                                  <p:stCondLst>
+                                    <p:cond delay="0"/>
+                                  </p:stCondLst>
+                                  <p:childTnLst>
+                                    <p:set>
+                                      <p:cBhvr>
+                                        <p:cTn id="6" dur="1" fill="hold">
+                                          <p:stCondLst>
+                                            <p:cond delay="0"/>
+                                          </p:stCondLst>
+                                        </p:cTn>
+                                        <p:tgtEl>
+                                          <p:spTgt spid="6"/>
+                                        </p:tgtEl>
+                                        <p:attrNameLst>
+                                          <p:attrName>style.visibility</p:attrName>
+                                        </p:attrNameLst>
+                                      </p:cBhvr>
+                                      <p:to>
+                                        <p:strVal val="visible"/>
+                                      </p:to>
+                                    </p:set>
+                                    <p:animEffect transition="in" filter="wipe(left)">
+                                      <p:cBhvr>
+                                        <p:cTn id="7" dur="500"/>
+                                        <p:tgtEl>
+                                          <p:spTgt spid="6"/>
+                                        </p:tgtEl>
+                                      </p:cBhvr>
+                                    </p:animEffect>
+                                  </p:childTnLst>
+                                </p:cTn>
+                              </p:par>
+                            </p:childTnLst>
+                          </p:cTn>
+                        </p:par>
+                        <p:par>
+                          <p:cTn id="8" fill="hold">
+                            <p:stCondLst>
+                              <p:cond delay="500"/>
+                            </p:stCondLst>
+                            <p:childTnLst>
+                              <p:par>
+                                <p:cTn id="9" presetID="22" presetClass="entr" presetSubtype="8" fill="hold" grpId="0" nodeType="afterEffect">
+                                  <p:stCondLst>
+                                    <p:cond delay="0"/>
+                                  </p:stCondLst>
+                                  <p:childTnLst>
+                                    <p:set>
+                                      <p:cBhvr>
+                                        <p:cTn id="10" dur="1" fill="hold">
+                                          <p:stCondLst>
+                                            <p:cond delay="0"/>
+                                          </p:stCondLst>
+                                        </p:cTn>
+                                        <p:tgtEl>
+                                          <p:spTgt spid="3"/>
+                                        </p:tgtEl>
+                                        <p:attrNameLst>
+                                          <p:attrName>style.visibility</p:attrName>
+                                        </p:attrNameLst>
+                                      </p:cBhvr>
+                                      <p:to>
+                                        <p:strVal val="visible"/>
+                                      </p:to>
+                                    </p:set>
+                                    <p:animEffect transition="in" filter="wipe(left)">
+                                      <p:cBhvr>
+                                        <p:cTn id="11" dur="500"/>
+                                        <p:tgtEl>
+                                          <p:spTgt spid="3"/>
+                                        </p:tgtEl>
+                                      </p:cBhvr>
+                                    </p:animEffect>
+                                  </p:childTnLst>
+                                </p:cTn>
+                              </p:par>
+                            </p:childTnLst>
+                          </p:cTn>
+                        </p:par>
+                        <p:par>
+                          <p:cTn id="12" fill="hold">
+                            <p:stCondLst>
+                              <p:cond delay="1000"/>
+                            </p:stCondLst>
+                            <p:childTnLst>
+                              <p:par>
+                                <p:cTn id="13" presetID="22" presetClass="entr" presetSubtype="8" fill="hold" grpId="0" nodeType="afterEffect">
+                                  <p:stCondLst>
+                                    <p:cond delay="0"/>
+                                  </p:stCondLst>
+                                  <p:childTnLst>
+                                    <p:set>
+                                      <p:cBhvr>
+                                        <p:cTn id="14" dur="1" fill="hold">
+                                          <p:stCondLst>
+                                            <p:cond delay="0"/>
+                                          </p:stCondLst>
+                                        </p:cTn>
+                                        <p:tgtEl>
+                                          <p:spTgt spid="8"/>
+                                        </p:tgtEl>
+                                        <p:attrNameLst>
+                                          <p:attrName>style.visibility</p:attrName>
+                                        </p:attrNameLst>
+                                      </p:cBhvr>
+                                      <p:to>
+                                        <p:strVal val="visible"/>
+                                      </p:to>
+                                    </p:set>
+                                    <p:animEffect transition="in" filter="wipe(left)">
+                                      <p:cBhvr>
+                                        <p:cTn id="15" dur="500"/>
+                                        <p:tgtEl>
+                                          <p:spTgt spid="8"/>
+                                        </p:tgtEl>
+                                      </p:cBhvr>
+                                    </p:animEffect>
+                                  </p:childTnLst>
+                                </p:cTn>
+                              </p:par>
+                            </p:childTnLst>
+                          </p:cTn>
+                        </p:par>
+                        <p:par>
+                          <p:cTn id="16" fill="hold">
+                            <p:stCondLst>
+                              <p:cond delay="1500"/>
+                            </p:stCondLst>
+                            <p:childTnLst>
+                              <p:par>
+                                <p:cTn id="17" presetID="22" presetClass="entr" presetSubtype="8" fill="hold" grpId="0" nodeType="afterEffect">
+                                  <p:stCondLst>
+                                    <p:cond delay="0"/>
+                                  </p:stCondLst>
+                                  <p:childTnLst>
+                                    <p:set>
+                                      <p:cBhvr>
+                                        <p:cTn id="18" dur="1" fill="hold">
+                                          <p:stCondLst>
+                                            <p:cond delay="0"/>
+                                          </p:stCondLst>
+                                        </p:cTn>
+                                        <p:tgtEl>
+                                          <p:spTgt spid="9"/>
+                                        </p:tgtEl>
+                                        <p:attrNameLst>
+                                          <p:attrName>style.visibility</p:attrName>
+                                        </p:attrNameLst>
+                                      </p:cBhvr>
+                                      <p:to>
+                                        <p:strVal val="visible"/>
+                                      </p:to>
+                                    </p:set>
+                                    <p:animEffect transition="in" filter="wipe(left)">
+                                      <p:cBhvr>
+                                        <p:cTn id="19" dur="500"/>
+                                        <p:tgtEl>
+                                          <p:spTgt spid="9"/>
+                                        </p:tgtEl>
+                                      </p:cBhvr>
+                                    </p:animEffect>
+                                  </p:childTnLst>
+                                </p:cTn>
+                              </p:par>
+                            </p:childTnLst>
+                          </p:cTn>
+                        </p:par>
+                      </p:childTnLst>
+                    </p:cTn>
+                  </p:par>
+                </p:childTnLst>
+              </p:cTn>
+              <p:prevCondLst>
+                <p:cond evt="onPrev" delay="0">
+                  <p:tgtEl>
+                    <p:sldTgt/>
+                  </p:tgtEl>
+                </p:cond>
+              </p:prevCondLst>
+              <p:nextCondLst>
+                <p:cond evt="onNext" delay="0">
+                  <p:tgtEl>
+                    <p:sldTgt/>
+                  </p:tgtEl>
+                </p:cond>
+              </p:nextCondLst>
+            </p:seq>
+          </p:childTnLst>
+        </p:cTn>
+      </p:par>
+    </p:tnLst>
+    <p:bldLst>
+      <p:bldP spid="6" grpId="0"/>
+      <p:bldP spid="3" grpId="0"/>
+      <p:bldP spid="8" grpId="0"/>
+      <p:bldP spid="9" grpId="0"/>
+    </p:bldLst>
+  </p:timing>
 </p:sld>
 </file>
 
-<file path=ppt/slides/slide32.xml><?xml version="1.0" encoding="utf-8"?>
+<file path=ppt/slides/slide33.xml><?xml version="1.0" encoding="utf-8"?>
 <p:sld xmlns:a="http://schemas.openxmlformats.org/drawingml/2006/main" xmlns:r="http://schemas.openxmlformats.org/officeDocument/2006/relationships" xmlns:p="http://schemas.openxmlformats.org/presentationml/2006/main">
   <p:cSld>
     <p:spTree>
@@ -21769,7 +26575,7 @@
                 <a:latin typeface="Cambria" panose="02040503050406030204" pitchFamily="18" charset="0"/>
                 <a:ea typeface="Cambria" panose="02040503050406030204" pitchFamily="18" charset="0"/>
               </a:rPr>
-              <a:t> in dB</a:t>
+              <a:t> Decibel dB</a:t>
             </a:r>
           </a:p>
         </p:txBody>
@@ -21827,7 +26633,7 @@
             </p:nvSpPr>
             <p:spPr>
               <a:xfrm>
-                <a:off x="1171074" y="2781771"/>
+                <a:off x="2873004" y="2904258"/>
                 <a:ext cx="9192126" cy="1179810"/>
               </a:xfrm>
               <a:prstGeom prst="rect">
@@ -22062,7 +26868,7 @@
             </p:nvSpPr>
             <p:spPr>
               <a:xfrm>
-                <a:off x="1171074" y="2781771"/>
+                <a:off x="2873004" y="2904258"/>
                 <a:ext cx="9192126" cy="1179810"/>
               </a:xfrm>
               <a:prstGeom prst="rect">
@@ -22106,7 +26912,7 @@
             </p:nvSpPr>
             <p:spPr>
               <a:xfrm>
-                <a:off x="1252706" y="4479057"/>
+                <a:off x="2954636" y="4523342"/>
                 <a:ext cx="9028861" cy="1167756"/>
               </a:xfrm>
               <a:prstGeom prst="rect">
@@ -22302,7 +27108,7 @@
             </p:nvSpPr>
             <p:spPr>
               <a:xfrm>
-                <a:off x="1252706" y="4479057"/>
+                <a:off x="2954636" y="4523342"/>
                 <a:ext cx="9028861" cy="1167756"/>
               </a:xfrm>
               <a:prstGeom prst="rect">
@@ -22311,7 +27117,7 @@
               <a:blipFill>
                 <a:blip r:embed="rId3"/>
                 <a:stretch>
-                  <a:fillRect l="-2362" b="-16230"/>
+                  <a:fillRect l="-2431" b="-15625"/>
                 </a:stretch>
               </a:blipFill>
             </p:spPr>
@@ -22330,6 +27136,42 @@
           </p:sp>
         </mc:Fallback>
       </mc:AlternateContent>
+      <p:pic>
+        <p:nvPicPr>
+          <p:cNvPr id="3" name="Picture 2">
+            <a:extLst>
+              <a:ext uri="{FF2B5EF4-FFF2-40B4-BE49-F238E27FC236}">
+                <a16:creationId xmlns:a16="http://schemas.microsoft.com/office/drawing/2014/main" id="{969AFDF6-B55B-7918-AAD5-93A957B1A38E}"/>
+              </a:ext>
+            </a:extLst>
+          </p:cNvPr>
+          <p:cNvPicPr>
+            <a:picLocks noChangeAspect="1"/>
+          </p:cNvPicPr>
+          <p:nvPr/>
+        </p:nvPicPr>
+        <p:blipFill>
+          <a:blip r:embed="rId4">
+            <a:extLst>
+              <a:ext uri="{28A0092B-C50C-407E-A947-70E740481C1C}">
+                <a14:useLocalDpi xmlns:a14="http://schemas.microsoft.com/office/drawing/2010/main" val="0"/>
+              </a:ext>
+            </a:extLst>
+          </a:blip>
+          <a:stretch>
+            <a:fillRect/>
+          </a:stretch>
+        </p:blipFill>
+        <p:spPr>
+          <a:xfrm>
+            <a:off x="126870" y="2477039"/>
+            <a:ext cx="2735776" cy="3214059"/>
+          </a:xfrm>
+          <a:prstGeom prst="rect">
+            <a:avLst/>
+          </a:prstGeom>
+        </p:spPr>
+      </p:pic>
     </p:spTree>
     <p:extLst>
       <p:ext uri="{BB962C8B-B14F-4D97-AF65-F5344CB8AC3E}">
@@ -22343,7 +27185,7 @@
 </p:sld>
 </file>
 
-<file path=ppt/slides/slide33.xml><?xml version="1.0" encoding="utf-8"?>
+<file path=ppt/slides/slide34.xml><?xml version="1.0" encoding="utf-8"?>
 <p:sld xmlns:a="http://schemas.openxmlformats.org/drawingml/2006/main" xmlns:r="http://schemas.openxmlformats.org/officeDocument/2006/relationships" xmlns:p="http://schemas.openxmlformats.org/presentationml/2006/main">
   <p:cSld>
     <p:spTree>
@@ -22851,7 +27693,7 @@
 </p:sld>
 </file>
 
-<file path=ppt/slides/slide34.xml><?xml version="1.0" encoding="utf-8"?>
+<file path=ppt/slides/slide35.xml><?xml version="1.0" encoding="utf-8"?>
 <p:sld xmlns:a="http://schemas.openxmlformats.org/drawingml/2006/main" xmlns:r="http://schemas.openxmlformats.org/officeDocument/2006/relationships" xmlns:p="http://schemas.openxmlformats.org/presentationml/2006/main">
   <p:cSld>
     <p:spTree>
@@ -23232,7 +28074,7 @@
 </p:sld>
 </file>
 
-<file path=ppt/slides/slide35.xml><?xml version="1.0" encoding="utf-8"?>
+<file path=ppt/slides/slide36.xml><?xml version="1.0" encoding="utf-8"?>
 <p:sld xmlns:a="http://schemas.openxmlformats.org/drawingml/2006/main" xmlns:r="http://schemas.openxmlformats.org/officeDocument/2006/relationships" xmlns:p="http://schemas.openxmlformats.org/presentationml/2006/main">
   <p:cSld>
     <p:spTree>
@@ -23959,7 +28801,7 @@
 </p:sld>
 </file>
 
-<file path=ppt/slides/slide36.xml><?xml version="1.0" encoding="utf-8"?>
+<file path=ppt/slides/slide37.xml><?xml version="1.0" encoding="utf-8"?>
 <p:sld xmlns:a="http://schemas.openxmlformats.org/drawingml/2006/main" xmlns:r="http://schemas.openxmlformats.org/officeDocument/2006/relationships" xmlns:p="http://schemas.openxmlformats.org/presentationml/2006/main">
   <p:cSld>
     <p:spTree>
@@ -24812,7 +29654,7 @@
 </p:sld>
 </file>
 
-<file path=ppt/slides/slide37.xml><?xml version="1.0" encoding="utf-8"?>
+<file path=ppt/slides/slide38.xml><?xml version="1.0" encoding="utf-8"?>
 <p:sld xmlns:a="http://schemas.openxmlformats.org/drawingml/2006/main" xmlns:r="http://schemas.openxmlformats.org/officeDocument/2006/relationships" xmlns:p="http://schemas.openxmlformats.org/presentationml/2006/main">
   <p:cSld>
     <p:spTree>
@@ -25827,7 +30669,7 @@
 </p:sld>
 </file>
 
-<file path=ppt/slides/slide38.xml><?xml version="1.0" encoding="utf-8"?>
+<file path=ppt/slides/slide39.xml><?xml version="1.0" encoding="utf-8"?>
 <p:sld xmlns:a="http://schemas.openxmlformats.org/drawingml/2006/main" xmlns:r="http://schemas.openxmlformats.org/officeDocument/2006/relationships" xmlns:p="http://schemas.openxmlformats.org/presentationml/2006/main">
   <p:cSld>
     <p:spTree>
@@ -26252,737 +31094,6 @@
     <p:extLst>
       <p:ext uri="{BB962C8B-B14F-4D97-AF65-F5344CB8AC3E}">
         <p14:creationId xmlns:p14="http://schemas.microsoft.com/office/powerpoint/2010/main" val="1376116934"/>
-      </p:ext>
-    </p:extLst>
-  </p:cSld>
-  <p:clrMapOvr>
-    <a:masterClrMapping/>
-  </p:clrMapOvr>
-</p:sld>
-</file>
-
-<file path=ppt/slides/slide39.xml><?xml version="1.0" encoding="utf-8"?>
-<p:sld xmlns:a="http://schemas.openxmlformats.org/drawingml/2006/main" xmlns:r="http://schemas.openxmlformats.org/officeDocument/2006/relationships" xmlns:p="http://schemas.openxmlformats.org/presentationml/2006/main">
-  <p:cSld>
-    <p:spTree>
-      <p:nvGrpSpPr>
-        <p:cNvPr id="1" name="">
-          <a:extLst>
-            <a:ext uri="{FF2B5EF4-FFF2-40B4-BE49-F238E27FC236}">
-              <a16:creationId xmlns:a16="http://schemas.microsoft.com/office/drawing/2014/main" id="{3B9E778A-E0E4-02C0-E4D9-6C33960F261A}"/>
-            </a:ext>
-          </a:extLst>
-        </p:cNvPr>
-        <p:cNvGrpSpPr/>
-        <p:nvPr/>
-      </p:nvGrpSpPr>
-      <p:grpSpPr>
-        <a:xfrm>
-          <a:off x="0" y="0"/>
-          <a:ext cx="0" cy="0"/>
-          <a:chOff x="0" y="0"/>
-          <a:chExt cx="0" cy="0"/>
-        </a:xfrm>
-      </p:grpSpPr>
-      <p:sp>
-        <p:nvSpPr>
-          <p:cNvPr id="2" name="TextBox 1">
-            <a:extLst>
-              <a:ext uri="{FF2B5EF4-FFF2-40B4-BE49-F238E27FC236}">
-                <a16:creationId xmlns:a16="http://schemas.microsoft.com/office/drawing/2014/main" id="{8AE8BC7E-44A2-E5BE-D3A2-89816E4F186F}"/>
-              </a:ext>
-            </a:extLst>
-          </p:cNvPr>
-          <p:cNvSpPr txBox="1"/>
-          <p:nvPr/>
-        </p:nvSpPr>
-        <p:spPr>
-          <a:xfrm>
-            <a:off x="10992196" y="0"/>
-            <a:ext cx="1199804" cy="369332"/>
-          </a:xfrm>
-          <a:prstGeom prst="rect">
-            <a:avLst/>
-          </a:prstGeom>
-          <a:noFill/>
-        </p:spPr>
-        <p:txBody>
-          <a:bodyPr wrap="square">
-            <a:spAutoFit/>
-          </a:bodyPr>
-          <a:lstStyle/>
-          <a:p>
-            <a:r>
-              <a:rPr lang="en-US" dirty="0">
-                <a:latin typeface="Berlin Sans FB" panose="020E0602020502020306" pitchFamily="34" charset="0"/>
-              </a:rPr>
-              <a:t>Buda Tech</a:t>
-            </a:r>
-          </a:p>
-        </p:txBody>
-      </p:sp>
-      <p:pic>
-        <p:nvPicPr>
-          <p:cNvPr id="6" name="Picture 5">
-            <a:extLst>
-              <a:ext uri="{FF2B5EF4-FFF2-40B4-BE49-F238E27FC236}">
-                <a16:creationId xmlns:a16="http://schemas.microsoft.com/office/drawing/2014/main" id="{1419E45E-B480-4CEF-6FE8-4C260A2FD77B}"/>
-              </a:ext>
-            </a:extLst>
-          </p:cNvPr>
-          <p:cNvPicPr>
-            <a:picLocks noChangeAspect="1"/>
-          </p:cNvPicPr>
-          <p:nvPr/>
-        </p:nvPicPr>
-        <p:blipFill>
-          <a:blip r:embed="rId2">
-            <a:extLst>
-              <a:ext uri="{28A0092B-C50C-407E-A947-70E740481C1C}">
-                <a14:useLocalDpi xmlns:a14="http://schemas.microsoft.com/office/drawing/2010/main" val="0"/>
-              </a:ext>
-            </a:extLst>
-          </a:blip>
-          <a:stretch>
-            <a:fillRect/>
-          </a:stretch>
-        </p:blipFill>
-        <p:spPr>
-          <a:xfrm>
-            <a:off x="599902" y="706457"/>
-            <a:ext cx="3479440" cy="4087734"/>
-          </a:xfrm>
-          <a:prstGeom prst="rect">
-            <a:avLst/>
-          </a:prstGeom>
-        </p:spPr>
-      </p:pic>
-      <mc:AlternateContent xmlns:mc="http://schemas.openxmlformats.org/markup-compatibility/2006" xmlns:a14="http://schemas.microsoft.com/office/drawing/2010/main">
-        <mc:Choice Requires="a14">
-          <p:sp>
-            <p:nvSpPr>
-              <p:cNvPr id="3" name="TextBox 2">
-                <a:extLst>
-                  <a:ext uri="{FF2B5EF4-FFF2-40B4-BE49-F238E27FC236}">
-                    <a16:creationId xmlns:a16="http://schemas.microsoft.com/office/drawing/2014/main" id="{D36951D1-D138-4A61-C12A-61B0B4D8E361}"/>
-                  </a:ext>
-                </a:extLst>
-              </p:cNvPr>
-              <p:cNvSpPr txBox="1"/>
-              <p:nvPr/>
-            </p:nvSpPr>
-            <p:spPr>
-              <a:xfrm>
-                <a:off x="5333403" y="2455464"/>
-                <a:ext cx="6118412" cy="973536"/>
-              </a:xfrm>
-              <a:prstGeom prst="rect">
-                <a:avLst/>
-              </a:prstGeom>
-              <a:noFill/>
-            </p:spPr>
-            <p:txBody>
-              <a:bodyPr wrap="square">
-                <a:spAutoFit/>
-              </a:bodyPr>
-              <a:lstStyle/>
-              <a:p>
-                <a14:m>
-                  <m:oMath xmlns:m="http://schemas.openxmlformats.org/officeDocument/2006/math">
-                    <m:r>
-                      <a:rPr lang="en-US" sz="3600" i="1" smtClean="0">
-                        <a:latin typeface="Cambria Math" panose="02040503050406030204" pitchFamily="18" charset="0"/>
-                      </a:rPr>
-                      <m:t>𝐴</m:t>
-                    </m:r>
-                    <m:r>
-                      <a:rPr lang="en-US" sz="3600" b="0" i="1" smtClean="0">
-                        <a:latin typeface="Cambria Math" panose="02040503050406030204" pitchFamily="18" charset="0"/>
-                      </a:rPr>
-                      <m:t>𝑡𝑡𝑒𝑛𝑢𝑎𝑡𝑖𝑜𝑛</m:t>
-                    </m:r>
-                  </m:oMath>
-                </a14:m>
-                <a:r>
-                  <a:rPr lang="en-US" sz="3600" dirty="0">
-                    <a:latin typeface="Cambria" panose="02040503050406030204"/>
-                    <a:ea typeface="Cambria" panose="02040503050406030204"/>
-                  </a:rPr>
-                  <a:t> = </a:t>
-                </a:r>
-                <a14:m>
-                  <m:oMath xmlns:m="http://schemas.openxmlformats.org/officeDocument/2006/math">
-                    <m:d>
-                      <m:dPr>
-                        <m:ctrlPr>
-                          <a:rPr lang="en-US" sz="3600" i="1">
-                            <a:latin typeface="Cambria Math" panose="02040503050406030204" pitchFamily="18" charset="0"/>
-                          </a:rPr>
-                        </m:ctrlPr>
-                      </m:dPr>
-                      <m:e>
-                        <m:f>
-                          <m:fPr>
-                            <m:ctrlPr>
-                              <a:rPr lang="en-US" sz="3600" i="1">
-                                <a:latin typeface="Cambria Math" panose="02040503050406030204" pitchFamily="18" charset="0"/>
-                              </a:rPr>
-                            </m:ctrlPr>
-                          </m:fPr>
-                          <m:num>
-                            <m:sSub>
-                              <m:sSubPr>
-                                <m:ctrlPr>
-                                  <a:rPr lang="en-US" sz="3600" i="1">
-                                    <a:latin typeface="Cambria Math" panose="02040503050406030204" pitchFamily="18" charset="0"/>
-                                  </a:rPr>
-                                </m:ctrlPr>
-                              </m:sSubPr>
-                              <m:e>
-                                <m:r>
-                                  <a:rPr lang="en-US" sz="3600" i="1">
-                                    <a:latin typeface="Cambria Math" panose="02040503050406030204" pitchFamily="18" charset="0"/>
-                                  </a:rPr>
-                                  <m:t>𝑅</m:t>
-                                </m:r>
-                              </m:e>
-                              <m:sub>
-                                <m:r>
-                                  <a:rPr lang="en-US" sz="3600" i="1">
-                                    <a:latin typeface="Cambria Math" panose="02040503050406030204" pitchFamily="18" charset="0"/>
-                                  </a:rPr>
-                                  <m:t>1</m:t>
-                                </m:r>
-                              </m:sub>
-                            </m:sSub>
-                          </m:num>
-                          <m:den>
-                            <m:sSub>
-                              <m:sSubPr>
-                                <m:ctrlPr>
-                                  <a:rPr lang="en-US" sz="3600" i="1">
-                                    <a:latin typeface="Cambria Math" panose="02040503050406030204" pitchFamily="18" charset="0"/>
-                                  </a:rPr>
-                                </m:ctrlPr>
-                              </m:sSubPr>
-                              <m:e>
-                                <m:r>
-                                  <a:rPr lang="en-US" sz="3600" i="1">
-                                    <a:latin typeface="Cambria Math" panose="02040503050406030204" pitchFamily="18" charset="0"/>
-                                  </a:rPr>
-                                  <m:t>𝑅</m:t>
-                                </m:r>
-                              </m:e>
-                              <m:sub>
-                                <m:r>
-                                  <a:rPr lang="en-US" sz="3600" i="1">
-                                    <a:latin typeface="Cambria Math" panose="02040503050406030204" pitchFamily="18" charset="0"/>
-                                  </a:rPr>
-                                  <m:t>1</m:t>
-                                </m:r>
-                              </m:sub>
-                            </m:sSub>
-                            <m:r>
-                              <a:rPr lang="en-US" sz="3600" i="1">
-                                <a:latin typeface="Cambria Math" panose="02040503050406030204" pitchFamily="18" charset="0"/>
-                              </a:rPr>
-                              <m:t>+</m:t>
-                            </m:r>
-                            <m:sSub>
-                              <m:sSubPr>
-                                <m:ctrlPr>
-                                  <a:rPr lang="en-US" sz="3600" i="1">
-                                    <a:latin typeface="Cambria Math" panose="02040503050406030204" pitchFamily="18" charset="0"/>
-                                  </a:rPr>
-                                </m:ctrlPr>
-                              </m:sSubPr>
-                              <m:e>
-                                <m:r>
-                                  <a:rPr lang="en-US" sz="3600" i="1">
-                                    <a:latin typeface="Cambria Math" panose="02040503050406030204" pitchFamily="18" charset="0"/>
-                                  </a:rPr>
-                                  <m:t>𝑅</m:t>
-                                </m:r>
-                              </m:e>
-                              <m:sub>
-                                <m:r>
-                                  <a:rPr lang="en-US" sz="3600" i="1">
-                                    <a:latin typeface="Cambria Math" panose="02040503050406030204" pitchFamily="18" charset="0"/>
-                                  </a:rPr>
-                                  <m:t>2</m:t>
-                                </m:r>
-                              </m:sub>
-                            </m:sSub>
-                          </m:den>
-                        </m:f>
-                      </m:e>
-                    </m:d>
-                  </m:oMath>
-                </a14:m>
-                <a:endParaRPr lang="en-US" sz="3600" dirty="0">
-                  <a:latin typeface="Cambria" panose="02040503050406030204"/>
-                  <a:ea typeface="Cambria" panose="02040503050406030204"/>
-                </a:endParaRPr>
-              </a:p>
-            </p:txBody>
-          </p:sp>
-        </mc:Choice>
-        <mc:Fallback xmlns="">
-          <p:sp>
-            <p:nvSpPr>
-              <p:cNvPr id="3" name="TextBox 2">
-                <a:extLst>
-                  <a:ext uri="{FF2B5EF4-FFF2-40B4-BE49-F238E27FC236}">
-                    <a16:creationId xmlns:a16="http://schemas.microsoft.com/office/drawing/2014/main" id="{D36951D1-D138-4A61-C12A-61B0B4D8E361}"/>
-                  </a:ext>
-                </a:extLst>
-              </p:cNvPr>
-              <p:cNvSpPr txBox="1">
-                <a:spLocks noRot="1" noChangeAspect="1" noMove="1" noResize="1" noEditPoints="1" noAdjustHandles="1" noChangeArrowheads="1" noChangeShapeType="1" noTextEdit="1"/>
-              </p:cNvSpPr>
-              <p:nvPr/>
-            </p:nvSpPr>
-            <p:spPr>
-              <a:xfrm>
-                <a:off x="5333403" y="2455464"/>
-                <a:ext cx="6118412" cy="973536"/>
-              </a:xfrm>
-              <a:prstGeom prst="rect">
-                <a:avLst/>
-              </a:prstGeom>
-              <a:blipFill>
-                <a:blip r:embed="rId3"/>
-                <a:stretch>
-                  <a:fillRect b="-2500"/>
-                </a:stretch>
-              </a:blipFill>
-            </p:spPr>
-            <p:txBody>
-              <a:bodyPr/>
-              <a:lstStyle/>
-              <a:p>
-                <a:r>
-                  <a:rPr lang="en-US">
-                    <a:noFill/>
-                  </a:rPr>
-                  <a:t> </a:t>
-                </a:r>
-              </a:p>
-            </p:txBody>
-          </p:sp>
-        </mc:Fallback>
-      </mc:AlternateContent>
-      <mc:AlternateContent xmlns:mc="http://schemas.openxmlformats.org/markup-compatibility/2006" xmlns:a14="http://schemas.microsoft.com/office/drawing/2010/main">
-        <mc:Choice Requires="a14">
-          <p:sp>
-            <p:nvSpPr>
-              <p:cNvPr id="5" name="TextBox 4">
-                <a:extLst>
-                  <a:ext uri="{FF2B5EF4-FFF2-40B4-BE49-F238E27FC236}">
-                    <a16:creationId xmlns:a16="http://schemas.microsoft.com/office/drawing/2014/main" id="{974617A7-917D-D9A9-4808-FF22D61A0898}"/>
-                  </a:ext>
-                </a:extLst>
-              </p:cNvPr>
-              <p:cNvSpPr txBox="1"/>
-              <p:nvPr/>
-            </p:nvSpPr>
-            <p:spPr>
-              <a:xfrm>
-                <a:off x="5472036" y="1043066"/>
-                <a:ext cx="6120062" cy="1200329"/>
-              </a:xfrm>
-              <a:prstGeom prst="rect">
-                <a:avLst/>
-              </a:prstGeom>
-              <a:noFill/>
-            </p:spPr>
-            <p:txBody>
-              <a:bodyPr wrap="square">
-                <a:spAutoFit/>
-              </a:bodyPr>
-              <a:lstStyle/>
-              <a:p>
-                <a14:m>
-                  <m:oMath xmlns:m="http://schemas.openxmlformats.org/officeDocument/2006/math">
-                    <m:sSub>
-                      <m:sSubPr>
-                        <m:ctrlPr>
-                          <a:rPr lang="en-US" sz="3600" i="1" smtClean="0">
-                            <a:effectLst/>
-                            <a:latin typeface="Cambria Math" panose="02040503050406030204" pitchFamily="18" charset="0"/>
-                            <a:ea typeface="Calibri" panose="020F0502020204030204" pitchFamily="34" charset="0"/>
-                            <a:cs typeface="Times New Roman" panose="02020603050405020304" pitchFamily="18" charset="0"/>
-                          </a:rPr>
-                        </m:ctrlPr>
-                      </m:sSubPr>
-                      <m:e>
-                        <m:r>
-                          <a:rPr lang="en-US" sz="3600" i="1">
-                            <a:effectLst/>
-                            <a:latin typeface="Cambria Math" panose="02040503050406030204" pitchFamily="18" charset="0"/>
-                            <a:ea typeface="Calibri" panose="020F0502020204030204" pitchFamily="34" charset="0"/>
-                            <a:cs typeface="Times New Roman" panose="02020603050405020304" pitchFamily="18" charset="0"/>
-                          </a:rPr>
-                          <m:t>𝑅</m:t>
-                        </m:r>
-                      </m:e>
-                      <m:sub>
-                        <m:r>
-                          <a:rPr lang="en-US" sz="3600" i="1">
-                            <a:effectLst/>
-                            <a:latin typeface="Cambria Math" panose="02040503050406030204" pitchFamily="18" charset="0"/>
-                            <a:ea typeface="Calibri" panose="020F0502020204030204" pitchFamily="34" charset="0"/>
-                            <a:cs typeface="Times New Roman" panose="02020603050405020304" pitchFamily="18" charset="0"/>
-                          </a:rPr>
-                          <m:t>1</m:t>
-                        </m:r>
-                      </m:sub>
-                    </m:sSub>
-                  </m:oMath>
-                </a14:m>
-                <a:r>
-                  <a:rPr lang="en-US" sz="3600" dirty="0">
-                    <a:latin typeface="Cambria" panose="02040503050406030204"/>
-                    <a:ea typeface="Cambria" panose="02040503050406030204"/>
-                  </a:rPr>
-                  <a:t> 50ohms</a:t>
-                </a:r>
-              </a:p>
-              <a:p>
-                <a14:m>
-                  <m:oMath xmlns:m="http://schemas.openxmlformats.org/officeDocument/2006/math">
-                    <m:sSub>
-                      <m:sSubPr>
-                        <m:ctrlPr>
-                          <a:rPr lang="en-US" sz="3600" i="1" smtClean="0">
-                            <a:effectLst/>
-                            <a:latin typeface="Cambria Math" panose="02040503050406030204" pitchFamily="18" charset="0"/>
-                            <a:ea typeface="Calibri" panose="020F0502020204030204" pitchFamily="34" charset="0"/>
-                            <a:cs typeface="Times New Roman" panose="02020603050405020304" pitchFamily="18" charset="0"/>
-                          </a:rPr>
-                        </m:ctrlPr>
-                      </m:sSubPr>
-                      <m:e>
-                        <m:r>
-                          <a:rPr lang="en-US" sz="3600" i="1">
-                            <a:effectLst/>
-                            <a:latin typeface="Cambria Math" panose="02040503050406030204" pitchFamily="18" charset="0"/>
-                            <a:ea typeface="Calibri" panose="020F0502020204030204" pitchFamily="34" charset="0"/>
-                            <a:cs typeface="Times New Roman" panose="02020603050405020304" pitchFamily="18" charset="0"/>
-                          </a:rPr>
-                          <m:t>𝑅</m:t>
-                        </m:r>
-                      </m:e>
-                      <m:sub>
-                        <m:r>
-                          <a:rPr lang="en-US" sz="3600" b="0" i="1" smtClean="0">
-                            <a:effectLst/>
-                            <a:latin typeface="Cambria Math" panose="02040503050406030204" pitchFamily="18" charset="0"/>
-                            <a:ea typeface="Calibri" panose="020F0502020204030204" pitchFamily="34" charset="0"/>
-                            <a:cs typeface="Times New Roman" panose="02020603050405020304" pitchFamily="18" charset="0"/>
-                          </a:rPr>
-                          <m:t>2</m:t>
-                        </m:r>
-                      </m:sub>
-                    </m:sSub>
-                  </m:oMath>
-                </a14:m>
-                <a:r>
-                  <a:rPr lang="en-US" sz="3600" dirty="0">
-                    <a:latin typeface="Cambria" panose="02040503050406030204"/>
-                    <a:ea typeface="Cambria" panose="02040503050406030204"/>
-                  </a:rPr>
-                  <a:t> 20ohms </a:t>
-                </a:r>
-                <a:endParaRPr lang="en-US" sz="3600" dirty="0"/>
-              </a:p>
-            </p:txBody>
-          </p:sp>
-        </mc:Choice>
-        <mc:Fallback xmlns="">
-          <p:sp>
-            <p:nvSpPr>
-              <p:cNvPr id="5" name="TextBox 4">
-                <a:extLst>
-                  <a:ext uri="{FF2B5EF4-FFF2-40B4-BE49-F238E27FC236}">
-                    <a16:creationId xmlns:a16="http://schemas.microsoft.com/office/drawing/2014/main" id="{974617A7-917D-D9A9-4808-FF22D61A0898}"/>
-                  </a:ext>
-                </a:extLst>
-              </p:cNvPr>
-              <p:cNvSpPr txBox="1">
-                <a:spLocks noRot="1" noChangeAspect="1" noMove="1" noResize="1" noEditPoints="1" noAdjustHandles="1" noChangeArrowheads="1" noChangeShapeType="1" noTextEdit="1"/>
-              </p:cNvSpPr>
-              <p:nvPr/>
-            </p:nvSpPr>
-            <p:spPr>
-              <a:xfrm>
-                <a:off x="5472036" y="1043066"/>
-                <a:ext cx="6120062" cy="1200329"/>
-              </a:xfrm>
-              <a:prstGeom prst="rect">
-                <a:avLst/>
-              </a:prstGeom>
-              <a:blipFill>
-                <a:blip r:embed="rId4"/>
-                <a:stretch>
-                  <a:fillRect t="-7614" b="-17259"/>
-                </a:stretch>
-              </a:blipFill>
-            </p:spPr>
-            <p:txBody>
-              <a:bodyPr/>
-              <a:lstStyle/>
-              <a:p>
-                <a:r>
-                  <a:rPr lang="en-US">
-                    <a:noFill/>
-                  </a:rPr>
-                  <a:t> </a:t>
-                </a:r>
-              </a:p>
-            </p:txBody>
-          </p:sp>
-        </mc:Fallback>
-      </mc:AlternateContent>
-      <mc:AlternateContent xmlns:mc="http://schemas.openxmlformats.org/markup-compatibility/2006" xmlns:a14="http://schemas.microsoft.com/office/drawing/2010/main">
-        <mc:Choice Requires="a14">
-          <p:sp>
-            <p:nvSpPr>
-              <p:cNvPr id="7" name="TextBox 6">
-                <a:extLst>
-                  <a:ext uri="{FF2B5EF4-FFF2-40B4-BE49-F238E27FC236}">
-                    <a16:creationId xmlns:a16="http://schemas.microsoft.com/office/drawing/2014/main" id="{13305A87-CCD1-42B6-9C08-282866896686}"/>
-                  </a:ext>
-                </a:extLst>
-              </p:cNvPr>
-              <p:cNvSpPr txBox="1"/>
-              <p:nvPr/>
-            </p:nvSpPr>
-            <p:spPr>
-              <a:xfrm>
-                <a:off x="5473686" y="3856349"/>
-                <a:ext cx="6118412" cy="921471"/>
-              </a:xfrm>
-              <a:prstGeom prst="rect">
-                <a:avLst/>
-              </a:prstGeom>
-              <a:noFill/>
-            </p:spPr>
-            <p:txBody>
-              <a:bodyPr wrap="square">
-                <a:spAutoFit/>
-              </a:bodyPr>
-              <a:lstStyle/>
-              <a:p>
-                <a14:m>
-                  <m:oMath xmlns:m="http://schemas.openxmlformats.org/officeDocument/2006/math">
-                    <m:r>
-                      <a:rPr lang="en-US" sz="3600" i="1" smtClean="0">
-                        <a:latin typeface="Cambria Math" panose="02040503050406030204" pitchFamily="18" charset="0"/>
-                      </a:rPr>
-                      <m:t>𝐴</m:t>
-                    </m:r>
-                  </m:oMath>
-                </a14:m>
-                <a:r>
-                  <a:rPr lang="en-US" sz="3600" dirty="0">
-                    <a:latin typeface="Cambria" panose="02040503050406030204"/>
-                    <a:ea typeface="Cambria" panose="02040503050406030204"/>
-                  </a:rPr>
-                  <a:t> = </a:t>
-                </a:r>
-                <a14:m>
-                  <m:oMath xmlns:m="http://schemas.openxmlformats.org/officeDocument/2006/math">
-                    <m:d>
-                      <m:dPr>
-                        <m:ctrlPr>
-                          <a:rPr lang="en-US" sz="3600" i="1">
-                            <a:latin typeface="Cambria Math" panose="02040503050406030204" pitchFamily="18" charset="0"/>
-                          </a:rPr>
-                        </m:ctrlPr>
-                      </m:dPr>
-                      <m:e>
-                        <m:f>
-                          <m:fPr>
-                            <m:ctrlPr>
-                              <a:rPr lang="en-US" sz="3600" i="1">
-                                <a:latin typeface="Cambria Math" panose="02040503050406030204" pitchFamily="18" charset="0"/>
-                              </a:rPr>
-                            </m:ctrlPr>
-                          </m:fPr>
-                          <m:num>
-                            <m:r>
-                              <a:rPr lang="en-US" sz="3600" b="0" i="1" smtClean="0">
-                                <a:latin typeface="Cambria Math" panose="02040503050406030204" pitchFamily="18" charset="0"/>
-                              </a:rPr>
-                              <m:t>50</m:t>
-                            </m:r>
-                          </m:num>
-                          <m:den>
-                            <m:r>
-                              <a:rPr lang="en-US" sz="3600" b="0" i="1" smtClean="0">
-                                <a:latin typeface="Cambria Math" panose="02040503050406030204" pitchFamily="18" charset="0"/>
-                              </a:rPr>
-                              <m:t>50</m:t>
-                            </m:r>
-                            <m:r>
-                              <a:rPr lang="en-US" sz="3600" i="1">
-                                <a:latin typeface="Cambria Math" panose="02040503050406030204" pitchFamily="18" charset="0"/>
-                              </a:rPr>
-                              <m:t>+</m:t>
-                            </m:r>
-                            <m:r>
-                              <a:rPr lang="en-US" sz="3600" b="0" i="1" smtClean="0">
-                                <a:latin typeface="Cambria Math" panose="02040503050406030204" pitchFamily="18" charset="0"/>
-                              </a:rPr>
-                              <m:t>20</m:t>
-                            </m:r>
-                          </m:den>
-                        </m:f>
-                      </m:e>
-                    </m:d>
-                  </m:oMath>
-                </a14:m>
-                <a:r>
-                  <a:rPr lang="en-US" sz="3600" dirty="0">
-                    <a:latin typeface="Cambria" panose="02040503050406030204"/>
-                    <a:ea typeface="Cambria" panose="02040503050406030204"/>
-                  </a:rPr>
-                  <a:t> = 0.71428</a:t>
-                </a:r>
-              </a:p>
-            </p:txBody>
-          </p:sp>
-        </mc:Choice>
-        <mc:Fallback xmlns="">
-          <p:sp>
-            <p:nvSpPr>
-              <p:cNvPr id="7" name="TextBox 6">
-                <a:extLst>
-                  <a:ext uri="{FF2B5EF4-FFF2-40B4-BE49-F238E27FC236}">
-                    <a16:creationId xmlns:a16="http://schemas.microsoft.com/office/drawing/2014/main" id="{13305A87-CCD1-42B6-9C08-282866896686}"/>
-                  </a:ext>
-                </a:extLst>
-              </p:cNvPr>
-              <p:cNvSpPr txBox="1">
-                <a:spLocks noRot="1" noChangeAspect="1" noMove="1" noResize="1" noEditPoints="1" noAdjustHandles="1" noChangeArrowheads="1" noChangeShapeType="1" noTextEdit="1"/>
-              </p:cNvSpPr>
-              <p:nvPr/>
-            </p:nvSpPr>
-            <p:spPr>
-              <a:xfrm>
-                <a:off x="5473686" y="3856349"/>
-                <a:ext cx="6118412" cy="921471"/>
-              </a:xfrm>
-              <a:prstGeom prst="rect">
-                <a:avLst/>
-              </a:prstGeom>
-              <a:blipFill>
-                <a:blip r:embed="rId5"/>
-                <a:stretch>
-                  <a:fillRect b="-8609"/>
-                </a:stretch>
-              </a:blipFill>
-            </p:spPr>
-            <p:txBody>
-              <a:bodyPr/>
-              <a:lstStyle/>
-              <a:p>
-                <a:r>
-                  <a:rPr lang="en-US">
-                    <a:noFill/>
-                  </a:rPr>
-                  <a:t> </a:t>
-                </a:r>
-              </a:p>
-            </p:txBody>
-          </p:sp>
-        </mc:Fallback>
-      </mc:AlternateContent>
-      <p:sp>
-        <p:nvSpPr>
-          <p:cNvPr id="4" name="TextBox 3">
-            <a:extLst>
-              <a:ext uri="{FF2B5EF4-FFF2-40B4-BE49-F238E27FC236}">
-                <a16:creationId xmlns:a16="http://schemas.microsoft.com/office/drawing/2014/main" id="{FCDFF4BE-1AC6-041D-183E-49A595854D26}"/>
-              </a:ext>
-            </a:extLst>
-          </p:cNvPr>
-          <p:cNvSpPr txBox="1"/>
-          <p:nvPr/>
-        </p:nvSpPr>
-        <p:spPr>
-          <a:xfrm>
-            <a:off x="2797466" y="1743567"/>
-            <a:ext cx="6120062" cy="707886"/>
-          </a:xfrm>
-          <a:prstGeom prst="rect">
-            <a:avLst/>
-          </a:prstGeom>
-          <a:noFill/>
-        </p:spPr>
-        <p:txBody>
-          <a:bodyPr wrap="square">
-            <a:spAutoFit/>
-          </a:bodyPr>
-          <a:lstStyle/>
-          <a:p>
-            <a:r>
-              <a:rPr lang="en-US" sz="2000" dirty="0">
-                <a:latin typeface="Cambria" panose="02040503050406030204"/>
-                <a:ea typeface="Cambria" panose="02040503050406030204"/>
-              </a:rPr>
-              <a:t>50ohms</a:t>
-            </a:r>
-          </a:p>
-          <a:p>
-            <a:endParaRPr lang="en-US" sz="2000" dirty="0"/>
-          </a:p>
-        </p:txBody>
-      </p:sp>
-      <p:sp>
-        <p:nvSpPr>
-          <p:cNvPr id="8" name="TextBox 7">
-            <a:extLst>
-              <a:ext uri="{FF2B5EF4-FFF2-40B4-BE49-F238E27FC236}">
-                <a16:creationId xmlns:a16="http://schemas.microsoft.com/office/drawing/2014/main" id="{08AF8603-6FCB-E6DA-4064-60061D841782}"/>
-              </a:ext>
-            </a:extLst>
-          </p:cNvPr>
-          <p:cNvSpPr txBox="1"/>
-          <p:nvPr/>
-        </p:nvSpPr>
-        <p:spPr>
-          <a:xfrm rot="16200000">
-            <a:off x="-126679" y="843011"/>
-            <a:ext cx="6120062" cy="400110"/>
-          </a:xfrm>
-          <a:prstGeom prst="rect">
-            <a:avLst/>
-          </a:prstGeom>
-          <a:noFill/>
-        </p:spPr>
-        <p:txBody>
-          <a:bodyPr wrap="square">
-            <a:spAutoFit/>
-          </a:bodyPr>
-          <a:lstStyle/>
-          <a:p>
-            <a:r>
-              <a:rPr lang="en-US" sz="2000" dirty="0">
-                <a:latin typeface="Cambria" panose="02040503050406030204"/>
-                <a:ea typeface="Cambria" panose="02040503050406030204"/>
-              </a:rPr>
-              <a:t>20ohms </a:t>
-            </a:r>
-            <a:endParaRPr lang="en-US" sz="2000" dirty="0"/>
-          </a:p>
-        </p:txBody>
-      </p:sp>
-    </p:spTree>
-    <p:extLst>
-      <p:ext uri="{BB962C8B-B14F-4D97-AF65-F5344CB8AC3E}">
-        <p14:creationId xmlns:p14="http://schemas.microsoft.com/office/powerpoint/2010/main" val="1855610011"/>
       </p:ext>
     </p:extLst>
   </p:cSld>
@@ -27896,6 +32007,737 @@
 </file>
 
 <file path=ppt/slides/slide40.xml><?xml version="1.0" encoding="utf-8"?>
+<p:sld xmlns:a="http://schemas.openxmlformats.org/drawingml/2006/main" xmlns:r="http://schemas.openxmlformats.org/officeDocument/2006/relationships" xmlns:p="http://schemas.openxmlformats.org/presentationml/2006/main">
+  <p:cSld>
+    <p:spTree>
+      <p:nvGrpSpPr>
+        <p:cNvPr id="1" name="">
+          <a:extLst>
+            <a:ext uri="{FF2B5EF4-FFF2-40B4-BE49-F238E27FC236}">
+              <a16:creationId xmlns:a16="http://schemas.microsoft.com/office/drawing/2014/main" id="{3B9E778A-E0E4-02C0-E4D9-6C33960F261A}"/>
+            </a:ext>
+          </a:extLst>
+        </p:cNvPr>
+        <p:cNvGrpSpPr/>
+        <p:nvPr/>
+      </p:nvGrpSpPr>
+      <p:grpSpPr>
+        <a:xfrm>
+          <a:off x="0" y="0"/>
+          <a:ext cx="0" cy="0"/>
+          <a:chOff x="0" y="0"/>
+          <a:chExt cx="0" cy="0"/>
+        </a:xfrm>
+      </p:grpSpPr>
+      <p:sp>
+        <p:nvSpPr>
+          <p:cNvPr id="2" name="TextBox 1">
+            <a:extLst>
+              <a:ext uri="{FF2B5EF4-FFF2-40B4-BE49-F238E27FC236}">
+                <a16:creationId xmlns:a16="http://schemas.microsoft.com/office/drawing/2014/main" id="{8AE8BC7E-44A2-E5BE-D3A2-89816E4F186F}"/>
+              </a:ext>
+            </a:extLst>
+          </p:cNvPr>
+          <p:cNvSpPr txBox="1"/>
+          <p:nvPr/>
+        </p:nvSpPr>
+        <p:spPr>
+          <a:xfrm>
+            <a:off x="10992196" y="0"/>
+            <a:ext cx="1199804" cy="369332"/>
+          </a:xfrm>
+          <a:prstGeom prst="rect">
+            <a:avLst/>
+          </a:prstGeom>
+          <a:noFill/>
+        </p:spPr>
+        <p:txBody>
+          <a:bodyPr wrap="square">
+            <a:spAutoFit/>
+          </a:bodyPr>
+          <a:lstStyle/>
+          <a:p>
+            <a:r>
+              <a:rPr lang="en-US" dirty="0">
+                <a:latin typeface="Berlin Sans FB" panose="020E0602020502020306" pitchFamily="34" charset="0"/>
+              </a:rPr>
+              <a:t>Buda Tech</a:t>
+            </a:r>
+          </a:p>
+        </p:txBody>
+      </p:sp>
+      <p:pic>
+        <p:nvPicPr>
+          <p:cNvPr id="6" name="Picture 5">
+            <a:extLst>
+              <a:ext uri="{FF2B5EF4-FFF2-40B4-BE49-F238E27FC236}">
+                <a16:creationId xmlns:a16="http://schemas.microsoft.com/office/drawing/2014/main" id="{1419E45E-B480-4CEF-6FE8-4C260A2FD77B}"/>
+              </a:ext>
+            </a:extLst>
+          </p:cNvPr>
+          <p:cNvPicPr>
+            <a:picLocks noChangeAspect="1"/>
+          </p:cNvPicPr>
+          <p:nvPr/>
+        </p:nvPicPr>
+        <p:blipFill>
+          <a:blip r:embed="rId2">
+            <a:extLst>
+              <a:ext uri="{28A0092B-C50C-407E-A947-70E740481C1C}">
+                <a14:useLocalDpi xmlns:a14="http://schemas.microsoft.com/office/drawing/2010/main" val="0"/>
+              </a:ext>
+            </a:extLst>
+          </a:blip>
+          <a:stretch>
+            <a:fillRect/>
+          </a:stretch>
+        </p:blipFill>
+        <p:spPr>
+          <a:xfrm>
+            <a:off x="599902" y="706457"/>
+            <a:ext cx="3479440" cy="4087734"/>
+          </a:xfrm>
+          <a:prstGeom prst="rect">
+            <a:avLst/>
+          </a:prstGeom>
+        </p:spPr>
+      </p:pic>
+      <mc:AlternateContent xmlns:mc="http://schemas.openxmlformats.org/markup-compatibility/2006" xmlns:a14="http://schemas.microsoft.com/office/drawing/2010/main">
+        <mc:Choice Requires="a14">
+          <p:sp>
+            <p:nvSpPr>
+              <p:cNvPr id="3" name="TextBox 2">
+                <a:extLst>
+                  <a:ext uri="{FF2B5EF4-FFF2-40B4-BE49-F238E27FC236}">
+                    <a16:creationId xmlns:a16="http://schemas.microsoft.com/office/drawing/2014/main" id="{D36951D1-D138-4A61-C12A-61B0B4D8E361}"/>
+                  </a:ext>
+                </a:extLst>
+              </p:cNvPr>
+              <p:cNvSpPr txBox="1"/>
+              <p:nvPr/>
+            </p:nvSpPr>
+            <p:spPr>
+              <a:xfrm>
+                <a:off x="5333403" y="2455464"/>
+                <a:ext cx="6118412" cy="973536"/>
+              </a:xfrm>
+              <a:prstGeom prst="rect">
+                <a:avLst/>
+              </a:prstGeom>
+              <a:noFill/>
+            </p:spPr>
+            <p:txBody>
+              <a:bodyPr wrap="square">
+                <a:spAutoFit/>
+              </a:bodyPr>
+              <a:lstStyle/>
+              <a:p>
+                <a14:m>
+                  <m:oMath xmlns:m="http://schemas.openxmlformats.org/officeDocument/2006/math">
+                    <m:r>
+                      <a:rPr lang="en-US" sz="3600" i="1" smtClean="0">
+                        <a:latin typeface="Cambria Math" panose="02040503050406030204" pitchFamily="18" charset="0"/>
+                      </a:rPr>
+                      <m:t>𝐴</m:t>
+                    </m:r>
+                    <m:r>
+                      <a:rPr lang="en-US" sz="3600" b="0" i="1" smtClean="0">
+                        <a:latin typeface="Cambria Math" panose="02040503050406030204" pitchFamily="18" charset="0"/>
+                      </a:rPr>
+                      <m:t>𝑡𝑡𝑒𝑛𝑢𝑎𝑡𝑖𝑜𝑛</m:t>
+                    </m:r>
+                  </m:oMath>
+                </a14:m>
+                <a:r>
+                  <a:rPr lang="en-US" sz="3600" dirty="0">
+                    <a:latin typeface="Cambria" panose="02040503050406030204"/>
+                    <a:ea typeface="Cambria" panose="02040503050406030204"/>
+                  </a:rPr>
+                  <a:t> = </a:t>
+                </a:r>
+                <a14:m>
+                  <m:oMath xmlns:m="http://schemas.openxmlformats.org/officeDocument/2006/math">
+                    <m:d>
+                      <m:dPr>
+                        <m:ctrlPr>
+                          <a:rPr lang="en-US" sz="3600" i="1">
+                            <a:latin typeface="Cambria Math" panose="02040503050406030204" pitchFamily="18" charset="0"/>
+                          </a:rPr>
+                        </m:ctrlPr>
+                      </m:dPr>
+                      <m:e>
+                        <m:f>
+                          <m:fPr>
+                            <m:ctrlPr>
+                              <a:rPr lang="en-US" sz="3600" i="1">
+                                <a:latin typeface="Cambria Math" panose="02040503050406030204" pitchFamily="18" charset="0"/>
+                              </a:rPr>
+                            </m:ctrlPr>
+                          </m:fPr>
+                          <m:num>
+                            <m:sSub>
+                              <m:sSubPr>
+                                <m:ctrlPr>
+                                  <a:rPr lang="en-US" sz="3600" i="1">
+                                    <a:latin typeface="Cambria Math" panose="02040503050406030204" pitchFamily="18" charset="0"/>
+                                  </a:rPr>
+                                </m:ctrlPr>
+                              </m:sSubPr>
+                              <m:e>
+                                <m:r>
+                                  <a:rPr lang="en-US" sz="3600" i="1">
+                                    <a:latin typeface="Cambria Math" panose="02040503050406030204" pitchFamily="18" charset="0"/>
+                                  </a:rPr>
+                                  <m:t>𝑅</m:t>
+                                </m:r>
+                              </m:e>
+                              <m:sub>
+                                <m:r>
+                                  <a:rPr lang="en-US" sz="3600" i="1">
+                                    <a:latin typeface="Cambria Math" panose="02040503050406030204" pitchFamily="18" charset="0"/>
+                                  </a:rPr>
+                                  <m:t>1</m:t>
+                                </m:r>
+                              </m:sub>
+                            </m:sSub>
+                          </m:num>
+                          <m:den>
+                            <m:sSub>
+                              <m:sSubPr>
+                                <m:ctrlPr>
+                                  <a:rPr lang="en-US" sz="3600" i="1">
+                                    <a:latin typeface="Cambria Math" panose="02040503050406030204" pitchFamily="18" charset="0"/>
+                                  </a:rPr>
+                                </m:ctrlPr>
+                              </m:sSubPr>
+                              <m:e>
+                                <m:r>
+                                  <a:rPr lang="en-US" sz="3600" i="1">
+                                    <a:latin typeface="Cambria Math" panose="02040503050406030204" pitchFamily="18" charset="0"/>
+                                  </a:rPr>
+                                  <m:t>𝑅</m:t>
+                                </m:r>
+                              </m:e>
+                              <m:sub>
+                                <m:r>
+                                  <a:rPr lang="en-US" sz="3600" i="1">
+                                    <a:latin typeface="Cambria Math" panose="02040503050406030204" pitchFamily="18" charset="0"/>
+                                  </a:rPr>
+                                  <m:t>1</m:t>
+                                </m:r>
+                              </m:sub>
+                            </m:sSub>
+                            <m:r>
+                              <a:rPr lang="en-US" sz="3600" i="1">
+                                <a:latin typeface="Cambria Math" panose="02040503050406030204" pitchFamily="18" charset="0"/>
+                              </a:rPr>
+                              <m:t>+</m:t>
+                            </m:r>
+                            <m:sSub>
+                              <m:sSubPr>
+                                <m:ctrlPr>
+                                  <a:rPr lang="en-US" sz="3600" i="1">
+                                    <a:latin typeface="Cambria Math" panose="02040503050406030204" pitchFamily="18" charset="0"/>
+                                  </a:rPr>
+                                </m:ctrlPr>
+                              </m:sSubPr>
+                              <m:e>
+                                <m:r>
+                                  <a:rPr lang="en-US" sz="3600" i="1">
+                                    <a:latin typeface="Cambria Math" panose="02040503050406030204" pitchFamily="18" charset="0"/>
+                                  </a:rPr>
+                                  <m:t>𝑅</m:t>
+                                </m:r>
+                              </m:e>
+                              <m:sub>
+                                <m:r>
+                                  <a:rPr lang="en-US" sz="3600" i="1">
+                                    <a:latin typeface="Cambria Math" panose="02040503050406030204" pitchFamily="18" charset="0"/>
+                                  </a:rPr>
+                                  <m:t>2</m:t>
+                                </m:r>
+                              </m:sub>
+                            </m:sSub>
+                          </m:den>
+                        </m:f>
+                      </m:e>
+                    </m:d>
+                  </m:oMath>
+                </a14:m>
+                <a:endParaRPr lang="en-US" sz="3600" dirty="0">
+                  <a:latin typeface="Cambria" panose="02040503050406030204"/>
+                  <a:ea typeface="Cambria" panose="02040503050406030204"/>
+                </a:endParaRPr>
+              </a:p>
+            </p:txBody>
+          </p:sp>
+        </mc:Choice>
+        <mc:Fallback xmlns="">
+          <p:sp>
+            <p:nvSpPr>
+              <p:cNvPr id="3" name="TextBox 2">
+                <a:extLst>
+                  <a:ext uri="{FF2B5EF4-FFF2-40B4-BE49-F238E27FC236}">
+                    <a16:creationId xmlns:a16="http://schemas.microsoft.com/office/drawing/2014/main" id="{D36951D1-D138-4A61-C12A-61B0B4D8E361}"/>
+                  </a:ext>
+                </a:extLst>
+              </p:cNvPr>
+              <p:cNvSpPr txBox="1">
+                <a:spLocks noRot="1" noChangeAspect="1" noMove="1" noResize="1" noEditPoints="1" noAdjustHandles="1" noChangeArrowheads="1" noChangeShapeType="1" noTextEdit="1"/>
+              </p:cNvSpPr>
+              <p:nvPr/>
+            </p:nvSpPr>
+            <p:spPr>
+              <a:xfrm>
+                <a:off x="5333403" y="2455464"/>
+                <a:ext cx="6118412" cy="973536"/>
+              </a:xfrm>
+              <a:prstGeom prst="rect">
+                <a:avLst/>
+              </a:prstGeom>
+              <a:blipFill>
+                <a:blip r:embed="rId3"/>
+                <a:stretch>
+                  <a:fillRect b="-2500"/>
+                </a:stretch>
+              </a:blipFill>
+            </p:spPr>
+            <p:txBody>
+              <a:bodyPr/>
+              <a:lstStyle/>
+              <a:p>
+                <a:r>
+                  <a:rPr lang="en-US">
+                    <a:noFill/>
+                  </a:rPr>
+                  <a:t> </a:t>
+                </a:r>
+              </a:p>
+            </p:txBody>
+          </p:sp>
+        </mc:Fallback>
+      </mc:AlternateContent>
+      <mc:AlternateContent xmlns:mc="http://schemas.openxmlformats.org/markup-compatibility/2006" xmlns:a14="http://schemas.microsoft.com/office/drawing/2010/main">
+        <mc:Choice Requires="a14">
+          <p:sp>
+            <p:nvSpPr>
+              <p:cNvPr id="5" name="TextBox 4">
+                <a:extLst>
+                  <a:ext uri="{FF2B5EF4-FFF2-40B4-BE49-F238E27FC236}">
+                    <a16:creationId xmlns:a16="http://schemas.microsoft.com/office/drawing/2014/main" id="{974617A7-917D-D9A9-4808-FF22D61A0898}"/>
+                  </a:ext>
+                </a:extLst>
+              </p:cNvPr>
+              <p:cNvSpPr txBox="1"/>
+              <p:nvPr/>
+            </p:nvSpPr>
+            <p:spPr>
+              <a:xfrm>
+                <a:off x="5472036" y="1043066"/>
+                <a:ext cx="6120062" cy="1200329"/>
+              </a:xfrm>
+              <a:prstGeom prst="rect">
+                <a:avLst/>
+              </a:prstGeom>
+              <a:noFill/>
+            </p:spPr>
+            <p:txBody>
+              <a:bodyPr wrap="square">
+                <a:spAutoFit/>
+              </a:bodyPr>
+              <a:lstStyle/>
+              <a:p>
+                <a14:m>
+                  <m:oMath xmlns:m="http://schemas.openxmlformats.org/officeDocument/2006/math">
+                    <m:sSub>
+                      <m:sSubPr>
+                        <m:ctrlPr>
+                          <a:rPr lang="en-US" sz="3600" i="1" smtClean="0">
+                            <a:effectLst/>
+                            <a:latin typeface="Cambria Math" panose="02040503050406030204" pitchFamily="18" charset="0"/>
+                            <a:ea typeface="Calibri" panose="020F0502020204030204" pitchFamily="34" charset="0"/>
+                            <a:cs typeface="Times New Roman" panose="02020603050405020304" pitchFamily="18" charset="0"/>
+                          </a:rPr>
+                        </m:ctrlPr>
+                      </m:sSubPr>
+                      <m:e>
+                        <m:r>
+                          <a:rPr lang="en-US" sz="3600" i="1">
+                            <a:effectLst/>
+                            <a:latin typeface="Cambria Math" panose="02040503050406030204" pitchFamily="18" charset="0"/>
+                            <a:ea typeface="Calibri" panose="020F0502020204030204" pitchFamily="34" charset="0"/>
+                            <a:cs typeface="Times New Roman" panose="02020603050405020304" pitchFamily="18" charset="0"/>
+                          </a:rPr>
+                          <m:t>𝑅</m:t>
+                        </m:r>
+                      </m:e>
+                      <m:sub>
+                        <m:r>
+                          <a:rPr lang="en-US" sz="3600" i="1">
+                            <a:effectLst/>
+                            <a:latin typeface="Cambria Math" panose="02040503050406030204" pitchFamily="18" charset="0"/>
+                            <a:ea typeface="Calibri" panose="020F0502020204030204" pitchFamily="34" charset="0"/>
+                            <a:cs typeface="Times New Roman" panose="02020603050405020304" pitchFamily="18" charset="0"/>
+                          </a:rPr>
+                          <m:t>1</m:t>
+                        </m:r>
+                      </m:sub>
+                    </m:sSub>
+                  </m:oMath>
+                </a14:m>
+                <a:r>
+                  <a:rPr lang="en-US" sz="3600" dirty="0">
+                    <a:latin typeface="Cambria" panose="02040503050406030204"/>
+                    <a:ea typeface="Cambria" panose="02040503050406030204"/>
+                  </a:rPr>
+                  <a:t> 50ohms</a:t>
+                </a:r>
+              </a:p>
+              <a:p>
+                <a14:m>
+                  <m:oMath xmlns:m="http://schemas.openxmlformats.org/officeDocument/2006/math">
+                    <m:sSub>
+                      <m:sSubPr>
+                        <m:ctrlPr>
+                          <a:rPr lang="en-US" sz="3600" i="1" smtClean="0">
+                            <a:effectLst/>
+                            <a:latin typeface="Cambria Math" panose="02040503050406030204" pitchFamily="18" charset="0"/>
+                            <a:ea typeface="Calibri" panose="020F0502020204030204" pitchFamily="34" charset="0"/>
+                            <a:cs typeface="Times New Roman" panose="02020603050405020304" pitchFamily="18" charset="0"/>
+                          </a:rPr>
+                        </m:ctrlPr>
+                      </m:sSubPr>
+                      <m:e>
+                        <m:r>
+                          <a:rPr lang="en-US" sz="3600" i="1">
+                            <a:effectLst/>
+                            <a:latin typeface="Cambria Math" panose="02040503050406030204" pitchFamily="18" charset="0"/>
+                            <a:ea typeface="Calibri" panose="020F0502020204030204" pitchFamily="34" charset="0"/>
+                            <a:cs typeface="Times New Roman" panose="02020603050405020304" pitchFamily="18" charset="0"/>
+                          </a:rPr>
+                          <m:t>𝑅</m:t>
+                        </m:r>
+                      </m:e>
+                      <m:sub>
+                        <m:r>
+                          <a:rPr lang="en-US" sz="3600" b="0" i="1" smtClean="0">
+                            <a:effectLst/>
+                            <a:latin typeface="Cambria Math" panose="02040503050406030204" pitchFamily="18" charset="0"/>
+                            <a:ea typeface="Calibri" panose="020F0502020204030204" pitchFamily="34" charset="0"/>
+                            <a:cs typeface="Times New Roman" panose="02020603050405020304" pitchFamily="18" charset="0"/>
+                          </a:rPr>
+                          <m:t>2</m:t>
+                        </m:r>
+                      </m:sub>
+                    </m:sSub>
+                  </m:oMath>
+                </a14:m>
+                <a:r>
+                  <a:rPr lang="en-US" sz="3600" dirty="0">
+                    <a:latin typeface="Cambria" panose="02040503050406030204"/>
+                    <a:ea typeface="Cambria" panose="02040503050406030204"/>
+                  </a:rPr>
+                  <a:t> 20ohms </a:t>
+                </a:r>
+                <a:endParaRPr lang="en-US" sz="3600" dirty="0"/>
+              </a:p>
+            </p:txBody>
+          </p:sp>
+        </mc:Choice>
+        <mc:Fallback xmlns="">
+          <p:sp>
+            <p:nvSpPr>
+              <p:cNvPr id="5" name="TextBox 4">
+                <a:extLst>
+                  <a:ext uri="{FF2B5EF4-FFF2-40B4-BE49-F238E27FC236}">
+                    <a16:creationId xmlns:a16="http://schemas.microsoft.com/office/drawing/2014/main" id="{974617A7-917D-D9A9-4808-FF22D61A0898}"/>
+                  </a:ext>
+                </a:extLst>
+              </p:cNvPr>
+              <p:cNvSpPr txBox="1">
+                <a:spLocks noRot="1" noChangeAspect="1" noMove="1" noResize="1" noEditPoints="1" noAdjustHandles="1" noChangeArrowheads="1" noChangeShapeType="1" noTextEdit="1"/>
+              </p:cNvSpPr>
+              <p:nvPr/>
+            </p:nvSpPr>
+            <p:spPr>
+              <a:xfrm>
+                <a:off x="5472036" y="1043066"/>
+                <a:ext cx="6120062" cy="1200329"/>
+              </a:xfrm>
+              <a:prstGeom prst="rect">
+                <a:avLst/>
+              </a:prstGeom>
+              <a:blipFill>
+                <a:blip r:embed="rId4"/>
+                <a:stretch>
+                  <a:fillRect t="-7614" b="-17259"/>
+                </a:stretch>
+              </a:blipFill>
+            </p:spPr>
+            <p:txBody>
+              <a:bodyPr/>
+              <a:lstStyle/>
+              <a:p>
+                <a:r>
+                  <a:rPr lang="en-US">
+                    <a:noFill/>
+                  </a:rPr>
+                  <a:t> </a:t>
+                </a:r>
+              </a:p>
+            </p:txBody>
+          </p:sp>
+        </mc:Fallback>
+      </mc:AlternateContent>
+      <mc:AlternateContent xmlns:mc="http://schemas.openxmlformats.org/markup-compatibility/2006" xmlns:a14="http://schemas.microsoft.com/office/drawing/2010/main">
+        <mc:Choice Requires="a14">
+          <p:sp>
+            <p:nvSpPr>
+              <p:cNvPr id="7" name="TextBox 6">
+                <a:extLst>
+                  <a:ext uri="{FF2B5EF4-FFF2-40B4-BE49-F238E27FC236}">
+                    <a16:creationId xmlns:a16="http://schemas.microsoft.com/office/drawing/2014/main" id="{13305A87-CCD1-42B6-9C08-282866896686}"/>
+                  </a:ext>
+                </a:extLst>
+              </p:cNvPr>
+              <p:cNvSpPr txBox="1"/>
+              <p:nvPr/>
+            </p:nvSpPr>
+            <p:spPr>
+              <a:xfrm>
+                <a:off x="5473686" y="3856349"/>
+                <a:ext cx="6118412" cy="921471"/>
+              </a:xfrm>
+              <a:prstGeom prst="rect">
+                <a:avLst/>
+              </a:prstGeom>
+              <a:noFill/>
+            </p:spPr>
+            <p:txBody>
+              <a:bodyPr wrap="square">
+                <a:spAutoFit/>
+              </a:bodyPr>
+              <a:lstStyle/>
+              <a:p>
+                <a14:m>
+                  <m:oMath xmlns:m="http://schemas.openxmlformats.org/officeDocument/2006/math">
+                    <m:r>
+                      <a:rPr lang="en-US" sz="3600" i="1" smtClean="0">
+                        <a:latin typeface="Cambria Math" panose="02040503050406030204" pitchFamily="18" charset="0"/>
+                      </a:rPr>
+                      <m:t>𝐴</m:t>
+                    </m:r>
+                  </m:oMath>
+                </a14:m>
+                <a:r>
+                  <a:rPr lang="en-US" sz="3600" dirty="0">
+                    <a:latin typeface="Cambria" panose="02040503050406030204"/>
+                    <a:ea typeface="Cambria" panose="02040503050406030204"/>
+                  </a:rPr>
+                  <a:t> = </a:t>
+                </a:r>
+                <a14:m>
+                  <m:oMath xmlns:m="http://schemas.openxmlformats.org/officeDocument/2006/math">
+                    <m:d>
+                      <m:dPr>
+                        <m:ctrlPr>
+                          <a:rPr lang="en-US" sz="3600" i="1">
+                            <a:latin typeface="Cambria Math" panose="02040503050406030204" pitchFamily="18" charset="0"/>
+                          </a:rPr>
+                        </m:ctrlPr>
+                      </m:dPr>
+                      <m:e>
+                        <m:f>
+                          <m:fPr>
+                            <m:ctrlPr>
+                              <a:rPr lang="en-US" sz="3600" i="1">
+                                <a:latin typeface="Cambria Math" panose="02040503050406030204" pitchFamily="18" charset="0"/>
+                              </a:rPr>
+                            </m:ctrlPr>
+                          </m:fPr>
+                          <m:num>
+                            <m:r>
+                              <a:rPr lang="en-US" sz="3600" b="0" i="1" smtClean="0">
+                                <a:latin typeface="Cambria Math" panose="02040503050406030204" pitchFamily="18" charset="0"/>
+                              </a:rPr>
+                              <m:t>50</m:t>
+                            </m:r>
+                          </m:num>
+                          <m:den>
+                            <m:r>
+                              <a:rPr lang="en-US" sz="3600" b="0" i="1" smtClean="0">
+                                <a:latin typeface="Cambria Math" panose="02040503050406030204" pitchFamily="18" charset="0"/>
+                              </a:rPr>
+                              <m:t>50</m:t>
+                            </m:r>
+                            <m:r>
+                              <a:rPr lang="en-US" sz="3600" i="1">
+                                <a:latin typeface="Cambria Math" panose="02040503050406030204" pitchFamily="18" charset="0"/>
+                              </a:rPr>
+                              <m:t>+</m:t>
+                            </m:r>
+                            <m:r>
+                              <a:rPr lang="en-US" sz="3600" b="0" i="1" smtClean="0">
+                                <a:latin typeface="Cambria Math" panose="02040503050406030204" pitchFamily="18" charset="0"/>
+                              </a:rPr>
+                              <m:t>20</m:t>
+                            </m:r>
+                          </m:den>
+                        </m:f>
+                      </m:e>
+                    </m:d>
+                  </m:oMath>
+                </a14:m>
+                <a:r>
+                  <a:rPr lang="en-US" sz="3600" dirty="0">
+                    <a:latin typeface="Cambria" panose="02040503050406030204"/>
+                    <a:ea typeface="Cambria" panose="02040503050406030204"/>
+                  </a:rPr>
+                  <a:t> = 0.71428</a:t>
+                </a:r>
+              </a:p>
+            </p:txBody>
+          </p:sp>
+        </mc:Choice>
+        <mc:Fallback xmlns="">
+          <p:sp>
+            <p:nvSpPr>
+              <p:cNvPr id="7" name="TextBox 6">
+                <a:extLst>
+                  <a:ext uri="{FF2B5EF4-FFF2-40B4-BE49-F238E27FC236}">
+                    <a16:creationId xmlns:a16="http://schemas.microsoft.com/office/drawing/2014/main" id="{13305A87-CCD1-42B6-9C08-282866896686}"/>
+                  </a:ext>
+                </a:extLst>
+              </p:cNvPr>
+              <p:cNvSpPr txBox="1">
+                <a:spLocks noRot="1" noChangeAspect="1" noMove="1" noResize="1" noEditPoints="1" noAdjustHandles="1" noChangeArrowheads="1" noChangeShapeType="1" noTextEdit="1"/>
+              </p:cNvSpPr>
+              <p:nvPr/>
+            </p:nvSpPr>
+            <p:spPr>
+              <a:xfrm>
+                <a:off x="5473686" y="3856349"/>
+                <a:ext cx="6118412" cy="921471"/>
+              </a:xfrm>
+              <a:prstGeom prst="rect">
+                <a:avLst/>
+              </a:prstGeom>
+              <a:blipFill>
+                <a:blip r:embed="rId5"/>
+                <a:stretch>
+                  <a:fillRect b="-8609"/>
+                </a:stretch>
+              </a:blipFill>
+            </p:spPr>
+            <p:txBody>
+              <a:bodyPr/>
+              <a:lstStyle/>
+              <a:p>
+                <a:r>
+                  <a:rPr lang="en-US">
+                    <a:noFill/>
+                  </a:rPr>
+                  <a:t> </a:t>
+                </a:r>
+              </a:p>
+            </p:txBody>
+          </p:sp>
+        </mc:Fallback>
+      </mc:AlternateContent>
+      <p:sp>
+        <p:nvSpPr>
+          <p:cNvPr id="4" name="TextBox 3">
+            <a:extLst>
+              <a:ext uri="{FF2B5EF4-FFF2-40B4-BE49-F238E27FC236}">
+                <a16:creationId xmlns:a16="http://schemas.microsoft.com/office/drawing/2014/main" id="{FCDFF4BE-1AC6-041D-183E-49A595854D26}"/>
+              </a:ext>
+            </a:extLst>
+          </p:cNvPr>
+          <p:cNvSpPr txBox="1"/>
+          <p:nvPr/>
+        </p:nvSpPr>
+        <p:spPr>
+          <a:xfrm>
+            <a:off x="2797466" y="1743567"/>
+            <a:ext cx="6120062" cy="707886"/>
+          </a:xfrm>
+          <a:prstGeom prst="rect">
+            <a:avLst/>
+          </a:prstGeom>
+          <a:noFill/>
+        </p:spPr>
+        <p:txBody>
+          <a:bodyPr wrap="square">
+            <a:spAutoFit/>
+          </a:bodyPr>
+          <a:lstStyle/>
+          <a:p>
+            <a:r>
+              <a:rPr lang="en-US" sz="2000" dirty="0">
+                <a:latin typeface="Cambria" panose="02040503050406030204"/>
+                <a:ea typeface="Cambria" panose="02040503050406030204"/>
+              </a:rPr>
+              <a:t>50ohms</a:t>
+            </a:r>
+          </a:p>
+          <a:p>
+            <a:endParaRPr lang="en-US" sz="2000" dirty="0"/>
+          </a:p>
+        </p:txBody>
+      </p:sp>
+      <p:sp>
+        <p:nvSpPr>
+          <p:cNvPr id="8" name="TextBox 7">
+            <a:extLst>
+              <a:ext uri="{FF2B5EF4-FFF2-40B4-BE49-F238E27FC236}">
+                <a16:creationId xmlns:a16="http://schemas.microsoft.com/office/drawing/2014/main" id="{08AF8603-6FCB-E6DA-4064-60061D841782}"/>
+              </a:ext>
+            </a:extLst>
+          </p:cNvPr>
+          <p:cNvSpPr txBox="1"/>
+          <p:nvPr/>
+        </p:nvSpPr>
+        <p:spPr>
+          <a:xfrm rot="16200000">
+            <a:off x="-126679" y="843011"/>
+            <a:ext cx="6120062" cy="400110"/>
+          </a:xfrm>
+          <a:prstGeom prst="rect">
+            <a:avLst/>
+          </a:prstGeom>
+          <a:noFill/>
+        </p:spPr>
+        <p:txBody>
+          <a:bodyPr wrap="square">
+            <a:spAutoFit/>
+          </a:bodyPr>
+          <a:lstStyle/>
+          <a:p>
+            <a:r>
+              <a:rPr lang="en-US" sz="2000" dirty="0">
+                <a:latin typeface="Cambria" panose="02040503050406030204"/>
+                <a:ea typeface="Cambria" panose="02040503050406030204"/>
+              </a:rPr>
+              <a:t>20ohms </a:t>
+            </a:r>
+            <a:endParaRPr lang="en-US" sz="2000" dirty="0"/>
+          </a:p>
+        </p:txBody>
+      </p:sp>
+    </p:spTree>
+    <p:extLst>
+      <p:ext uri="{BB962C8B-B14F-4D97-AF65-F5344CB8AC3E}">
+        <p14:creationId xmlns:p14="http://schemas.microsoft.com/office/powerpoint/2010/main" val="1855610011"/>
+      </p:ext>
+    </p:extLst>
+  </p:cSld>
+  <p:clrMapOvr>
+    <a:masterClrMapping/>
+  </p:clrMapOvr>
+</p:sld>
+</file>
+
+<file path=ppt/slides/slide41.xml><?xml version="1.0" encoding="utf-8"?>
 <p:sld xmlns:a="http://schemas.openxmlformats.org/drawingml/2006/main" xmlns:r="http://schemas.openxmlformats.org/officeDocument/2006/relationships" xmlns:p="http://schemas.openxmlformats.org/presentationml/2006/main">
   <p:cSld>
     <p:spTree>
@@ -28849,7 +33691,7 @@
 </p:sld>
 </file>
 
-<file path=ppt/slides/slide41.xml><?xml version="1.0" encoding="utf-8"?>
+<file path=ppt/slides/slide42.xml><?xml version="1.0" encoding="utf-8"?>
 <p:sld xmlns:a="http://schemas.openxmlformats.org/drawingml/2006/main" xmlns:r="http://schemas.openxmlformats.org/officeDocument/2006/relationships" xmlns:p="http://schemas.openxmlformats.org/presentationml/2006/main">
   <p:cSld>
     <p:spTree>
@@ -29898,7 +34740,7 @@
 </p:sld>
 </file>
 
-<file path=ppt/slides/slide42.xml><?xml version="1.0" encoding="utf-8"?>
+<file path=ppt/slides/slide43.xml><?xml version="1.0" encoding="utf-8"?>
 <p:sld xmlns:a="http://schemas.openxmlformats.org/drawingml/2006/main" xmlns:r="http://schemas.openxmlformats.org/officeDocument/2006/relationships" xmlns:p="http://schemas.openxmlformats.org/presentationml/2006/main">
   <p:cSld>
     <p:spTree>
@@ -30545,7 +35387,7 @@
 </p:sld>
 </file>
 
-<file path=ppt/slides/slide43.xml><?xml version="1.0" encoding="utf-8"?>
+<file path=ppt/slides/slide44.xml><?xml version="1.0" encoding="utf-8"?>
 <p:sld xmlns:a="http://schemas.openxmlformats.org/drawingml/2006/main" xmlns:r="http://schemas.openxmlformats.org/officeDocument/2006/relationships" xmlns:p="http://schemas.openxmlformats.org/presentationml/2006/main">
   <p:cSld>
     <p:spTree>
@@ -30914,7 +35756,7 @@
 </p:sld>
 </file>
 
-<file path=ppt/slides/slide44.xml><?xml version="1.0" encoding="utf-8"?>
+<file path=ppt/slides/slide45.xml><?xml version="1.0" encoding="utf-8"?>
 <p:sld xmlns:a="http://schemas.openxmlformats.org/drawingml/2006/main" xmlns:r="http://schemas.openxmlformats.org/officeDocument/2006/relationships" xmlns:p="http://schemas.openxmlformats.org/presentationml/2006/main">
   <p:cSld>
     <p:spTree>
@@ -31629,7 +36471,7 @@
 </p:sld>
 </file>
 
-<file path=ppt/slides/slide45.xml><?xml version="1.0" encoding="utf-8"?>
+<file path=ppt/slides/slide46.xml><?xml version="1.0" encoding="utf-8"?>
 <p:sld xmlns:a="http://schemas.openxmlformats.org/drawingml/2006/main" xmlns:r="http://schemas.openxmlformats.org/officeDocument/2006/relationships" xmlns:p="http://schemas.openxmlformats.org/presentationml/2006/main">
   <p:cSld>
     <p:spTree>
@@ -32482,7 +37324,7 @@
 </p:sld>
 </file>
 
-<file path=ppt/slides/slide46.xml><?xml version="1.0" encoding="utf-8"?>
+<file path=ppt/slides/slide47.xml><?xml version="1.0" encoding="utf-8"?>
 <p:sld xmlns:a="http://schemas.openxmlformats.org/drawingml/2006/main" xmlns:r="http://schemas.openxmlformats.org/officeDocument/2006/relationships" xmlns:p="http://schemas.openxmlformats.org/presentationml/2006/main">
   <p:cSld>
     <p:spTree>
@@ -33314,7 +38156,7 @@
 </p:sld>
 </file>
 
-<file path=ppt/slides/slide47.xml><?xml version="1.0" encoding="utf-8"?>
+<file path=ppt/slides/slide48.xml><?xml version="1.0" encoding="utf-8"?>
 <p:sld xmlns:a="http://schemas.openxmlformats.org/drawingml/2006/main" xmlns:r="http://schemas.openxmlformats.org/officeDocument/2006/relationships" xmlns:p="http://schemas.openxmlformats.org/presentationml/2006/main">
   <p:cSld>
     <p:spTree>
@@ -34071,7 +38913,7 @@
 </p:sld>
 </file>
 
-<file path=ppt/slides/slide48.xml><?xml version="1.0" encoding="utf-8"?>
+<file path=ppt/slides/slide49.xml><?xml version="1.0" encoding="utf-8"?>
 <p:sld xmlns:a="http://schemas.openxmlformats.org/drawingml/2006/main" xmlns:r="http://schemas.openxmlformats.org/officeDocument/2006/relationships" xmlns:p="http://schemas.openxmlformats.org/presentationml/2006/main">
   <p:cSld>
     <p:spTree>
@@ -34108,8 +38950,8 @@
         </p:nvSpPr>
         <p:spPr>
           <a:xfrm>
-            <a:off x="237066" y="1693976"/>
-            <a:ext cx="11035137" cy="1446550"/>
+            <a:off x="1227401" y="1726060"/>
+            <a:ext cx="10364697" cy="1200329"/>
           </a:xfrm>
           <a:prstGeom prst="rect">
             <a:avLst/>
@@ -34123,34 +38965,14 @@
           <a:lstStyle/>
           <a:p>
             <a:r>
-              <a:rPr lang="en-US" sz="8800" b="1" dirty="0">
+              <a:rPr lang="en-US" sz="7200" b="1" dirty="0">
                 <a:solidFill>
                   <a:srgbClr val="FF0000"/>
                 </a:solidFill>
                 <a:latin typeface="Cambria" panose="02040503050406030204" pitchFamily="18" charset="0"/>
                 <a:ea typeface="Cambria" panose="02040503050406030204" pitchFamily="18" charset="0"/>
               </a:rPr>
-              <a:t>Power in </a:t>
-            </a:r>
-            <a:r>
-              <a:rPr lang="en-US" sz="8800" b="1" dirty="0" err="1">
-                <a:solidFill>
-                  <a:srgbClr val="FF0000"/>
-                </a:solidFill>
-                <a:latin typeface="Cambria" panose="02040503050406030204" pitchFamily="18" charset="0"/>
-                <a:ea typeface="Cambria" panose="02040503050406030204" pitchFamily="18" charset="0"/>
-              </a:rPr>
-              <a:t>mW</a:t>
-            </a:r>
-            <a:r>
-              <a:rPr lang="en-US" sz="8800" b="1" dirty="0">
-                <a:solidFill>
-                  <a:srgbClr val="FF0000"/>
-                </a:solidFill>
-                <a:latin typeface="Cambria" panose="02040503050406030204" pitchFamily="18" charset="0"/>
-                <a:ea typeface="Cambria" panose="02040503050406030204" pitchFamily="18" charset="0"/>
-              </a:rPr>
-              <a:t> to dBm</a:t>
+              <a:t>Power in V(rms) to dBm</a:t>
             </a:r>
           </a:p>
         </p:txBody>
@@ -34192,14 +39014,14 @@
           </a:p>
         </p:txBody>
       </p:sp>
-      <mc:AlternateContent xmlns:mc="http://schemas.openxmlformats.org/markup-compatibility/2006" xmlns:a14="http://schemas.microsoft.com/office/drawing/2010/main">
-        <mc:Choice Requires="a14">
+      <mc:AlternateContent xmlns:mc="http://schemas.openxmlformats.org/markup-compatibility/2006">
+        <mc:Choice xmlns:a14="http://schemas.microsoft.com/office/drawing/2010/main" Requires="a14">
           <p:sp>
             <p:nvSpPr>
-              <p:cNvPr id="3" name="TextBox 2">
+              <p:cNvPr id="12" name="TextBox 11">
                 <a:extLst>
                   <a:ext uri="{FF2B5EF4-FFF2-40B4-BE49-F238E27FC236}">
-                    <a16:creationId xmlns:a16="http://schemas.microsoft.com/office/drawing/2014/main" id="{0E0951FE-78EA-AD91-AB87-1202D391EBC2}"/>
+                    <a16:creationId xmlns:a16="http://schemas.microsoft.com/office/drawing/2014/main" id="{71763EC3-FACD-F398-3771-79988BE6E341}"/>
                   </a:ext>
                 </a:extLst>
               </p:cNvPr>
@@ -34208,8 +39030,8 @@
             </p:nvSpPr>
             <p:spPr>
               <a:xfrm>
-                <a:off x="2675743" y="3454765"/>
-                <a:ext cx="6430780" cy="1294457"/>
+                <a:off x="2594811" y="3429000"/>
+                <a:ext cx="7351294" cy="1475404"/>
               </a:xfrm>
               <a:prstGeom prst="rect">
                 <a:avLst/>
@@ -34233,78 +39055,38 @@
                         <a:rPr lang="en-US" sz="4000" i="1" smtClean="0">
                           <a:latin typeface="Cambria Math" panose="02040503050406030204" pitchFamily="18" charset="0"/>
                         </a:rPr>
-                        <m:t>𝑃</m:t>
+                        <m:t>𝑑𝐵𝑚</m:t>
                       </m:r>
-                      <m:d>
-                        <m:dPr>
+                      <m:r>
+                        <a:rPr lang="en-US" sz="4000" i="0">
+                          <a:latin typeface="Cambria Math" panose="02040503050406030204" pitchFamily="18" charset="0"/>
+                        </a:rPr>
+                        <m:t> = 30+ 20</m:t>
+                      </m:r>
+                      <m:func>
+                        <m:funcPr>
                           <m:ctrlPr>
                             <a:rPr lang="en-US" sz="4000" i="1">
-                              <a:solidFill>
-                                <a:srgbClr val="836967"/>
-                              </a:solidFill>
                               <a:latin typeface="Cambria Math" panose="02040503050406030204" pitchFamily="18" charset="0"/>
                             </a:rPr>
                           </m:ctrlPr>
-                        </m:dPr>
-                        <m:e>
-                          <m:r>
-                            <a:rPr lang="en-US" sz="4000" i="1">
-                              <a:latin typeface="Cambria Math" panose="02040503050406030204" pitchFamily="18" charset="0"/>
-                            </a:rPr>
-                            <m:t>𝑑𝐵</m:t>
-                          </m:r>
-                          <m:r>
-                            <a:rPr lang="en-US" sz="4000" b="0" i="1" smtClean="0">
-                              <a:latin typeface="Cambria Math" panose="02040503050406030204" pitchFamily="18" charset="0"/>
-                            </a:rPr>
-                            <m:t>𝑚</m:t>
-                          </m:r>
-                        </m:e>
-                      </m:d>
-                      <m:r>
-                        <a:rPr lang="en-US" sz="4000">
-                          <a:latin typeface="Cambria Math" panose="02040503050406030204" pitchFamily="18" charset="0"/>
-                        </a:rPr>
-                        <m:t>=10</m:t>
-                      </m:r>
-                      <m:r>
-                        <a:rPr lang="en-US" sz="4000" i="1">
-                          <a:latin typeface="Cambria Math" panose="02040503050406030204" pitchFamily="18" charset="0"/>
-                        </a:rPr>
-                        <m:t> </m:t>
-                      </m:r>
-                      <m:sSubSup>
-                        <m:sSubSupPr>
-                          <m:ctrlPr>
-                            <a:rPr lang="en-US" sz="4000" i="1" smtClean="0">
-                              <a:solidFill>
-                                <a:srgbClr val="836967"/>
-                              </a:solidFill>
-                              <a:latin typeface="Cambria Math" panose="02040503050406030204" pitchFamily="18" charset="0"/>
-                            </a:rPr>
-                          </m:ctrlPr>
-                        </m:sSubSupPr>
-                        <m:e>
+                        </m:funcPr>
+                        <m:fName>
                           <m:r>
                             <a:rPr lang="en-US" sz="4000" i="1">
                               <a:latin typeface="Cambria Math" panose="02040503050406030204" pitchFamily="18" charset="0"/>
                             </a:rPr>
                             <m:t>𝑙𝑜𝑔</m:t>
                           </m:r>
-                        </m:e>
-                        <m:sub>
-                          <m:r>
-                            <a:rPr lang="en-US" sz="4000" i="0">
-                              <a:latin typeface="Cambria Math" panose="02040503050406030204" pitchFamily="18" charset="0"/>
-                            </a:rPr>
-                            <m:t>10</m:t>
-                          </m:r>
-                        </m:sub>
-                        <m:sup>
+                        </m:fName>
+                        <m:e>
                           <m:d>
                             <m:dPr>
                               <m:ctrlPr>
                                 <a:rPr lang="en-US" sz="4000" i="1">
+                                  <a:solidFill>
+                                    <a:srgbClr val="836967"/>
+                                  </a:solidFill>
                                   <a:latin typeface="Cambria Math" panose="02040503050406030204" pitchFamily="18" charset="0"/>
                                 </a:rPr>
                               </m:ctrlPr>
@@ -34314,85 +39096,109 @@
                                 <m:fPr>
                                   <m:ctrlPr>
                                     <a:rPr lang="en-US" sz="4000" i="1">
+                                      <a:solidFill>
+                                        <a:srgbClr val="836967"/>
+                                      </a:solidFill>
                                       <a:latin typeface="Cambria Math" panose="02040503050406030204" pitchFamily="18" charset="0"/>
                                     </a:rPr>
                                   </m:ctrlPr>
                                 </m:fPr>
                                 <m:num>
-                                  <m:r>
-                                    <a:rPr lang="en-US" sz="4000" i="1">
-                                      <a:latin typeface="Cambria Math" panose="02040503050406030204" pitchFamily="18" charset="0"/>
-                                    </a:rPr>
-                                    <m:t>𝑃</m:t>
-                                  </m:r>
-                                  <m:r>
-                                    <a:rPr lang="en-US" sz="4000" i="1">
-                                      <a:latin typeface="Cambria Math" panose="02040503050406030204" pitchFamily="18" charset="0"/>
-                                    </a:rPr>
-                                    <m:t>(</m:t>
-                                  </m:r>
-                                  <m:r>
-                                    <a:rPr lang="en-US" sz="4000" b="0" i="1" smtClean="0">
-                                      <a:latin typeface="Cambria Math" panose="02040503050406030204" pitchFamily="18" charset="0"/>
-                                    </a:rPr>
-                                    <m:t>𝑚</m:t>
-                                  </m:r>
-                                  <m:r>
-                                    <a:rPr lang="en-US" sz="4000" i="1">
-                                      <a:latin typeface="Cambria Math" panose="02040503050406030204" pitchFamily="18" charset="0"/>
-                                    </a:rPr>
-                                    <m:t>𝑊</m:t>
-                                  </m:r>
-                                  <m:r>
-                                    <a:rPr lang="en-US" sz="4000" i="1">
-                                      <a:latin typeface="Cambria Math" panose="02040503050406030204" pitchFamily="18" charset="0"/>
-                                    </a:rPr>
-                                    <m:t>)</m:t>
-                                  </m:r>
+                                  <m:sSub>
+                                    <m:sSubPr>
+                                      <m:ctrlPr>
+                                        <a:rPr lang="en-US" sz="4000" i="1">
+                                          <a:solidFill>
+                                            <a:srgbClr val="836967"/>
+                                          </a:solidFill>
+                                          <a:latin typeface="Cambria Math" panose="02040503050406030204" pitchFamily="18" charset="0"/>
+                                        </a:rPr>
+                                      </m:ctrlPr>
+                                    </m:sSubPr>
+                                    <m:e>
+                                      <m:r>
+                                        <a:rPr lang="en-US" sz="4000" i="1">
+                                          <a:latin typeface="Cambria Math" panose="02040503050406030204" pitchFamily="18" charset="0"/>
+                                        </a:rPr>
+                                        <m:t>𝑉</m:t>
+                                      </m:r>
+                                    </m:e>
+                                    <m:sub>
+                                      <m:r>
+                                        <a:rPr lang="en-US" sz="4000" i="1">
+                                          <a:latin typeface="Cambria Math" panose="02040503050406030204" pitchFamily="18" charset="0"/>
+                                        </a:rPr>
+                                        <m:t>𝑟𝑚𝑠</m:t>
+                                      </m:r>
+                                    </m:sub>
+                                  </m:sSub>
                                 </m:num>
                                 <m:den>
-                                  <m:r>
-                                    <a:rPr lang="en-US" sz="4000" i="1">
-                                      <a:latin typeface="Cambria Math" panose="02040503050406030204" pitchFamily="18" charset="0"/>
-                                    </a:rPr>
-                                    <m:t>1</m:t>
-                                  </m:r>
-                                  <m:r>
-                                    <a:rPr lang="en-US" sz="4000" b="0" i="1" smtClean="0">
-                                      <a:latin typeface="Cambria Math" panose="02040503050406030204" pitchFamily="18" charset="0"/>
-                                    </a:rPr>
-                                    <m:t>𝑚</m:t>
-                                  </m:r>
-                                  <m:r>
-                                    <a:rPr lang="en-US" sz="4000" i="1">
-                                      <a:latin typeface="Cambria Math" panose="02040503050406030204" pitchFamily="18" charset="0"/>
-                                    </a:rPr>
-                                    <m:t>𝑊</m:t>
-                                  </m:r>
+                                  <m:rad>
+                                    <m:radPr>
+                                      <m:degHide m:val="on"/>
+                                      <m:ctrlPr>
+                                        <a:rPr lang="en-US" sz="4000" i="1">
+                                          <a:solidFill>
+                                            <a:srgbClr val="836967"/>
+                                          </a:solidFill>
+                                          <a:latin typeface="Cambria Math" panose="02040503050406030204" pitchFamily="18" charset="0"/>
+                                        </a:rPr>
+                                      </m:ctrlPr>
+                                    </m:radPr>
+                                    <m:deg/>
+                                    <m:e>
+                                      <m:sSub>
+                                        <m:sSubPr>
+                                          <m:ctrlPr>
+                                            <a:rPr lang="en-US" sz="4000" i="1">
+                                              <a:solidFill>
+                                                <a:srgbClr val="836967"/>
+                                              </a:solidFill>
+                                              <a:latin typeface="Cambria Math" panose="02040503050406030204" pitchFamily="18" charset="0"/>
+                                            </a:rPr>
+                                          </m:ctrlPr>
+                                        </m:sSubPr>
+                                        <m:e>
+                                          <m:r>
+                                            <a:rPr lang="en-US" sz="4000" i="1">
+                                              <a:latin typeface="Cambria Math" panose="02040503050406030204" pitchFamily="18" charset="0"/>
+                                            </a:rPr>
+                                            <m:t>𝑧</m:t>
+                                          </m:r>
+                                        </m:e>
+                                        <m:sub>
+                                          <m:r>
+                                            <a:rPr lang="en-US" sz="4000" i="0">
+                                              <a:latin typeface="Cambria Math" panose="02040503050406030204" pitchFamily="18" charset="0"/>
+                                            </a:rPr>
+                                            <m:t>0</m:t>
+                                          </m:r>
+                                        </m:sub>
+                                      </m:sSub>
+                                    </m:e>
+                                  </m:rad>
                                 </m:den>
                               </m:f>
                             </m:e>
                           </m:d>
-                        </m:sup>
-                      </m:sSubSup>
+                        </m:e>
+                      </m:func>
                     </m:oMath>
                   </m:oMathPara>
                 </a14:m>
-                <a:endParaRPr lang="en-US" sz="4000" dirty="0">
-                  <a:latin typeface="Cambria" panose="02040503050406030204" pitchFamily="18" charset="0"/>
-                  <a:ea typeface="Cambria" panose="02040503050406030204" pitchFamily="18" charset="0"/>
-                </a:endParaRPr>
+                <a:endParaRPr lang="en-US" sz="4000" dirty="0"/>
               </a:p>
             </p:txBody>
           </p:sp>
         </mc:Choice>
-        <mc:Fallback xmlns="">
+        <mc:Fallback>
           <p:sp>
             <p:nvSpPr>
-              <p:cNvPr id="3" name="TextBox 2">
+              <p:cNvPr id="12" name="TextBox 11">
                 <a:extLst>
                   <a:ext uri="{FF2B5EF4-FFF2-40B4-BE49-F238E27FC236}">
-                    <a16:creationId xmlns:a16="http://schemas.microsoft.com/office/drawing/2014/main" id="{0E0951FE-78EA-AD91-AB87-1202D391EBC2}"/>
+                    <a16:creationId xmlns:a16="http://schemas.microsoft.com/office/drawing/2014/main" id="{71763EC3-FACD-F398-3771-79988BE6E341}"/>
                   </a:ext>
                 </a:extLst>
               </p:cNvPr>
@@ -34403,8 +39209,8 @@
             </p:nvSpPr>
             <p:spPr>
               <a:xfrm>
-                <a:off x="2675743" y="3454765"/>
-                <a:ext cx="6430780" cy="1294457"/>
+                <a:off x="2594811" y="3429000"/>
+                <a:ext cx="7351294" cy="1475404"/>
               </a:xfrm>
               <a:prstGeom prst="rect">
                 <a:avLst/>
@@ -35358,6 +40164,375 @@
       </p:par>
     </p:tnLst>
   </p:timing>
+</p:sld>
+</file>
+
+<file path=ppt/slides/slide50.xml><?xml version="1.0" encoding="utf-8"?>
+<p:sld xmlns:a="http://schemas.openxmlformats.org/drawingml/2006/main" xmlns:r="http://schemas.openxmlformats.org/officeDocument/2006/relationships" xmlns:p="http://schemas.openxmlformats.org/presentationml/2006/main">
+  <p:cSld>
+    <p:spTree>
+      <p:nvGrpSpPr>
+        <p:cNvPr id="1" name="">
+          <a:extLst>
+            <a:ext uri="{FF2B5EF4-FFF2-40B4-BE49-F238E27FC236}">
+              <a16:creationId xmlns:a16="http://schemas.microsoft.com/office/drawing/2014/main" id="{8CA0A52C-541F-2819-364A-33CAF323490F}"/>
+            </a:ext>
+          </a:extLst>
+        </p:cNvPr>
+        <p:cNvGrpSpPr/>
+        <p:nvPr/>
+      </p:nvGrpSpPr>
+      <p:grpSpPr>
+        <a:xfrm>
+          <a:off x="0" y="0"/>
+          <a:ext cx="0" cy="0"/>
+          <a:chOff x="0" y="0"/>
+          <a:chExt cx="0" cy="0"/>
+        </a:xfrm>
+      </p:grpSpPr>
+      <p:sp>
+        <p:nvSpPr>
+          <p:cNvPr id="2" name="TextBox 1">
+            <a:extLst>
+              <a:ext uri="{FF2B5EF4-FFF2-40B4-BE49-F238E27FC236}">
+                <a16:creationId xmlns:a16="http://schemas.microsoft.com/office/drawing/2014/main" id="{D985692D-7C24-230E-754A-9049200B37EF}"/>
+              </a:ext>
+            </a:extLst>
+          </p:cNvPr>
+          <p:cNvSpPr txBox="1"/>
+          <p:nvPr/>
+        </p:nvSpPr>
+        <p:spPr>
+          <a:xfrm>
+            <a:off x="10992196" y="0"/>
+            <a:ext cx="1199804" cy="369332"/>
+          </a:xfrm>
+          <a:prstGeom prst="rect">
+            <a:avLst/>
+          </a:prstGeom>
+          <a:noFill/>
+        </p:spPr>
+        <p:txBody>
+          <a:bodyPr wrap="square">
+            <a:spAutoFit/>
+          </a:bodyPr>
+          <a:lstStyle/>
+          <a:p>
+            <a:r>
+              <a:rPr lang="en-US" dirty="0">
+                <a:latin typeface="Berlin Sans FB" panose="020E0602020502020306" pitchFamily="34" charset="0"/>
+              </a:rPr>
+              <a:t>Buda Tech</a:t>
+            </a:r>
+          </a:p>
+        </p:txBody>
+      </p:sp>
+      <mc:AlternateContent xmlns:mc="http://schemas.openxmlformats.org/markup-compatibility/2006" xmlns:a14="http://schemas.microsoft.com/office/drawing/2010/main">
+        <mc:Choice Requires="a14">
+          <p:sp>
+            <p:nvSpPr>
+              <p:cNvPr id="7" name="TextBox 6">
+                <a:extLst>
+                  <a:ext uri="{FF2B5EF4-FFF2-40B4-BE49-F238E27FC236}">
+                    <a16:creationId xmlns:a16="http://schemas.microsoft.com/office/drawing/2014/main" id="{C3F58112-8192-257F-2AAD-7DB02A91A45C}"/>
+                  </a:ext>
+                </a:extLst>
+              </p:cNvPr>
+              <p:cNvSpPr txBox="1"/>
+              <p:nvPr/>
+            </p:nvSpPr>
+            <p:spPr>
+              <a:xfrm>
+                <a:off x="3468762" y="3969481"/>
+                <a:ext cx="6118412" cy="878830"/>
+              </a:xfrm>
+              <a:prstGeom prst="rect">
+                <a:avLst/>
+              </a:prstGeom>
+              <a:noFill/>
+            </p:spPr>
+            <p:txBody>
+              <a:bodyPr wrap="square">
+                <a:spAutoFit/>
+              </a:bodyPr>
+              <a:lstStyle/>
+              <a:p>
+                <a14:m>
+                  <m:oMath xmlns:m="http://schemas.openxmlformats.org/officeDocument/2006/math">
+                    <m:f>
+                      <m:fPr>
+                        <m:ctrlPr>
+                          <a:rPr lang="en-US" sz="3600" i="1" smtClean="0">
+                            <a:latin typeface="Cambria Math" panose="02040503050406030204" pitchFamily="18" charset="0"/>
+                          </a:rPr>
+                        </m:ctrlPr>
+                      </m:fPr>
+                      <m:num>
+                        <m:r>
+                          <a:rPr lang="en-US" sz="3600" b="0" i="1" smtClean="0">
+                            <a:latin typeface="Cambria Math" panose="02040503050406030204" pitchFamily="18" charset="0"/>
+                          </a:rPr>
+                          <m:t>3</m:t>
+                        </m:r>
+                      </m:num>
+                      <m:den>
+                        <m:r>
+                          <a:rPr lang="en-US" sz="3600" b="0" i="1" smtClean="0">
+                            <a:latin typeface="Cambria Math" panose="02040503050406030204" pitchFamily="18" charset="0"/>
+                          </a:rPr>
+                          <m:t>1000</m:t>
+                        </m:r>
+                      </m:den>
+                    </m:f>
+                  </m:oMath>
+                </a14:m>
+                <a:r>
+                  <a:rPr lang="en-US" sz="3600" dirty="0">
+                    <a:latin typeface="Cambria" panose="02040503050406030204" pitchFamily="18" charset="0"/>
+                    <a:ea typeface="Cambria" panose="02040503050406030204" pitchFamily="18" charset="0"/>
+                  </a:rPr>
+                  <a:t> =  0.003A</a:t>
+                </a:r>
+              </a:p>
+            </p:txBody>
+          </p:sp>
+        </mc:Choice>
+        <mc:Fallback xmlns="">
+          <p:sp>
+            <p:nvSpPr>
+              <p:cNvPr id="7" name="TextBox 6">
+                <a:extLst>
+                  <a:ext uri="{FF2B5EF4-FFF2-40B4-BE49-F238E27FC236}">
+                    <a16:creationId xmlns:a16="http://schemas.microsoft.com/office/drawing/2014/main" id="{75835E15-4FA9-2527-AF02-3C1BC4B2A574}"/>
+                  </a:ext>
+                </a:extLst>
+              </p:cNvPr>
+              <p:cNvSpPr txBox="1">
+                <a:spLocks noRot="1" noChangeAspect="1" noMove="1" noResize="1" noEditPoints="1" noAdjustHandles="1" noChangeArrowheads="1" noChangeShapeType="1" noTextEdit="1"/>
+              </p:cNvSpPr>
+              <p:nvPr/>
+            </p:nvSpPr>
+            <p:spPr>
+              <a:xfrm>
+                <a:off x="3468762" y="3969481"/>
+                <a:ext cx="6118412" cy="878830"/>
+              </a:xfrm>
+              <a:prstGeom prst="rect">
+                <a:avLst/>
+              </a:prstGeom>
+              <a:blipFill>
+                <a:blip r:embed="rId2"/>
+                <a:stretch>
+                  <a:fillRect b="-11111"/>
+                </a:stretch>
+              </a:blipFill>
+            </p:spPr>
+            <p:txBody>
+              <a:bodyPr/>
+              <a:lstStyle/>
+              <a:p>
+                <a:r>
+                  <a:rPr lang="en-US">
+                    <a:noFill/>
+                  </a:rPr>
+                  <a:t> </a:t>
+                </a:r>
+              </a:p>
+            </p:txBody>
+          </p:sp>
+        </mc:Fallback>
+      </mc:AlternateContent>
+      <p:sp>
+        <p:nvSpPr>
+          <p:cNvPr id="10" name="TextBox 9">
+            <a:extLst>
+              <a:ext uri="{FF2B5EF4-FFF2-40B4-BE49-F238E27FC236}">
+                <a16:creationId xmlns:a16="http://schemas.microsoft.com/office/drawing/2014/main" id="{C1A73141-77AD-7722-4E02-732AC1FC43D0}"/>
+              </a:ext>
+            </a:extLst>
+          </p:cNvPr>
+          <p:cNvSpPr txBox="1"/>
+          <p:nvPr/>
+        </p:nvSpPr>
+        <p:spPr>
+          <a:xfrm>
+            <a:off x="345809" y="552873"/>
+            <a:ext cx="11774634" cy="1754326"/>
+          </a:xfrm>
+          <a:prstGeom prst="rect">
+            <a:avLst/>
+          </a:prstGeom>
+          <a:noFill/>
+        </p:spPr>
+        <p:txBody>
+          <a:bodyPr wrap="none" rtlCol="0">
+            <a:spAutoFit/>
+          </a:bodyPr>
+          <a:lstStyle/>
+          <a:p>
+            <a:r>
+              <a:rPr lang="en-US" sz="3600" dirty="0">
+                <a:solidFill>
+                  <a:srgbClr val="FF0000"/>
+                </a:solidFill>
+                <a:latin typeface="Cambria" panose="02040503050406030204" pitchFamily="18" charset="0"/>
+                <a:ea typeface="Cambria" panose="02040503050406030204" pitchFamily="18" charset="0"/>
+              </a:rPr>
+              <a:t>Example</a:t>
+            </a:r>
+            <a:r>
+              <a:rPr lang="en-US" sz="3600" dirty="0">
+                <a:latin typeface="Cambria" panose="02040503050406030204" pitchFamily="18" charset="0"/>
+                <a:ea typeface="Cambria" panose="02040503050406030204" pitchFamily="18" charset="0"/>
+              </a:rPr>
+              <a:t> </a:t>
+            </a:r>
+          </a:p>
+          <a:p>
+            <a:r>
+              <a:rPr lang="en-US" sz="3600" dirty="0">
+                <a:latin typeface="Cambria" panose="02040503050406030204" pitchFamily="18" charset="0"/>
+                <a:ea typeface="Cambria" panose="02040503050406030204" pitchFamily="18" charset="0"/>
+              </a:rPr>
+              <a:t>An amplifier has a input voltage of 3mA and output current</a:t>
+            </a:r>
+          </a:p>
+          <a:p>
+            <a:r>
+              <a:rPr lang="en-US" sz="3600" dirty="0">
+                <a:latin typeface="Cambria" panose="02040503050406030204" pitchFamily="18" charset="0"/>
+                <a:ea typeface="Cambria" panose="02040503050406030204" pitchFamily="18" charset="0"/>
+              </a:rPr>
+              <a:t>  5A, what is the gain in decibel</a:t>
+            </a:r>
+          </a:p>
+        </p:txBody>
+      </p:sp>
+      <mc:AlternateContent xmlns:mc="http://schemas.openxmlformats.org/markup-compatibility/2006" xmlns:a14="http://schemas.microsoft.com/office/drawing/2010/main">
+        <mc:Choice Requires="a14">
+          <p:sp>
+            <p:nvSpPr>
+              <p:cNvPr id="8" name="TextBox 7">
+                <a:extLst>
+                  <a:ext uri="{FF2B5EF4-FFF2-40B4-BE49-F238E27FC236}">
+                    <a16:creationId xmlns:a16="http://schemas.microsoft.com/office/drawing/2014/main" id="{AE5F1EFC-6567-98C7-42FF-10620D4CE15D}"/>
+                  </a:ext>
+                </a:extLst>
+              </p:cNvPr>
+              <p:cNvSpPr txBox="1"/>
+              <p:nvPr/>
+            </p:nvSpPr>
+            <p:spPr>
+              <a:xfrm>
+                <a:off x="3300320" y="2565797"/>
+                <a:ext cx="6118412" cy="879087"/>
+              </a:xfrm>
+              <a:prstGeom prst="rect">
+                <a:avLst/>
+              </a:prstGeom>
+              <a:noFill/>
+            </p:spPr>
+            <p:txBody>
+              <a:bodyPr wrap="square">
+                <a:spAutoFit/>
+              </a:bodyPr>
+              <a:lstStyle/>
+              <a:p>
+                <a14:m>
+                  <m:oMath xmlns:m="http://schemas.openxmlformats.org/officeDocument/2006/math">
+                    <m:f>
+                      <m:fPr>
+                        <m:ctrlPr>
+                          <a:rPr lang="en-US" sz="3600" i="1" smtClean="0">
+                            <a:latin typeface="Cambria Math" panose="02040503050406030204" pitchFamily="18" charset="0"/>
+                          </a:rPr>
+                        </m:ctrlPr>
+                      </m:fPr>
+                      <m:num>
+                        <m:r>
+                          <a:rPr lang="en-US" sz="3600" b="0" i="1" smtClean="0">
+                            <a:latin typeface="Cambria Math" panose="02040503050406030204" pitchFamily="18" charset="0"/>
+                          </a:rPr>
+                          <m:t>𝐼𝑜𝑢𝑡</m:t>
+                        </m:r>
+                      </m:num>
+                      <m:den>
+                        <m:r>
+                          <a:rPr lang="en-US" sz="3600" b="0" i="1" smtClean="0">
+                            <a:latin typeface="Cambria Math" panose="02040503050406030204" pitchFamily="18" charset="0"/>
+                          </a:rPr>
+                          <m:t>𝐼𝑖𝑛</m:t>
+                        </m:r>
+                      </m:den>
+                    </m:f>
+                  </m:oMath>
+                </a14:m>
+                <a:r>
+                  <a:rPr lang="en-US" sz="3600" dirty="0">
+                    <a:latin typeface="Cambria" panose="02040503050406030204" pitchFamily="18" charset="0"/>
+                    <a:ea typeface="Cambria" panose="02040503050406030204" pitchFamily="18" charset="0"/>
+                  </a:rPr>
+                  <a:t> = Gain</a:t>
+                </a:r>
+              </a:p>
+            </p:txBody>
+          </p:sp>
+        </mc:Choice>
+        <mc:Fallback xmlns="">
+          <p:sp>
+            <p:nvSpPr>
+              <p:cNvPr id="8" name="TextBox 7">
+                <a:extLst>
+                  <a:ext uri="{FF2B5EF4-FFF2-40B4-BE49-F238E27FC236}">
+                    <a16:creationId xmlns:a16="http://schemas.microsoft.com/office/drawing/2014/main" id="{A1DA00BB-EC39-1886-1F5E-5298F106F5BE}"/>
+                  </a:ext>
+                </a:extLst>
+              </p:cNvPr>
+              <p:cNvSpPr txBox="1">
+                <a:spLocks noRot="1" noChangeAspect="1" noMove="1" noResize="1" noEditPoints="1" noAdjustHandles="1" noChangeArrowheads="1" noChangeShapeType="1" noTextEdit="1"/>
+              </p:cNvSpPr>
+              <p:nvPr/>
+            </p:nvSpPr>
+            <p:spPr>
+              <a:xfrm>
+                <a:off x="3300320" y="2565797"/>
+                <a:ext cx="6118412" cy="879087"/>
+              </a:xfrm>
+              <a:prstGeom prst="rect">
+                <a:avLst/>
+              </a:prstGeom>
+              <a:blipFill>
+                <a:blip r:embed="rId3"/>
+                <a:stretch>
+                  <a:fillRect b="-11111"/>
+                </a:stretch>
+              </a:blipFill>
+            </p:spPr>
+            <p:txBody>
+              <a:bodyPr/>
+              <a:lstStyle/>
+              <a:p>
+                <a:r>
+                  <a:rPr lang="en-US">
+                    <a:noFill/>
+                  </a:rPr>
+                  <a:t> </a:t>
+                </a:r>
+              </a:p>
+            </p:txBody>
+          </p:sp>
+        </mc:Fallback>
+      </mc:AlternateContent>
+    </p:spTree>
+    <p:extLst>
+      <p:ext uri="{BB962C8B-B14F-4D97-AF65-F5344CB8AC3E}">
+        <p14:creationId xmlns:p14="http://schemas.microsoft.com/office/powerpoint/2010/main" val="1607586074"/>
+      </p:ext>
+    </p:extLst>
+  </p:cSld>
+  <p:clrMapOvr>
+    <a:masterClrMapping/>
+  </p:clrMapOvr>
 </p:sld>
 </file>
 
